--- a/Paper and Presentation/MANTIS_Presentation (3).pptx
+++ b/Paper and Presentation/MANTIS_Presentation (3).pptx
@@ -5,7 +5,7 @@
     <p:sldMasterId id="2147483648" r:id="rId1"/>
   </p:sldMasterIdLst>
   <p:notesMasterIdLst>
-    <p:notesMasterId r:id="rId21"/>
+    <p:notesMasterId r:id="rId23"/>
   </p:notesMasterIdLst>
   <p:sldIdLst>
     <p:sldId id="256" r:id="rId2"/>
@@ -20,13 +20,15 @@
     <p:sldId id="265" r:id="rId11"/>
     <p:sldId id="266" r:id="rId12"/>
     <p:sldId id="267" r:id="rId13"/>
-    <p:sldId id="268" r:id="rId14"/>
-    <p:sldId id="269" r:id="rId15"/>
-    <p:sldId id="270" r:id="rId16"/>
-    <p:sldId id="274" r:id="rId17"/>
-    <p:sldId id="271" r:id="rId18"/>
-    <p:sldId id="272" r:id="rId19"/>
-    <p:sldId id="273" r:id="rId20"/>
+    <p:sldId id="275" r:id="rId14"/>
+    <p:sldId id="268" r:id="rId15"/>
+    <p:sldId id="276" r:id="rId16"/>
+    <p:sldId id="269" r:id="rId17"/>
+    <p:sldId id="270" r:id="rId18"/>
+    <p:sldId id="274" r:id="rId19"/>
+    <p:sldId id="271" r:id="rId20"/>
+    <p:sldId id="272" r:id="rId21"/>
+    <p:sldId id="273" r:id="rId22"/>
   </p:sldIdLst>
   <p:sldSz cx="9144000" cy="5143500" type="screen16x9"/>
   <p:notesSz cx="5143500" cy="9144000"/>
@@ -596,7 +598,13 @@
   <p:cSld>
     <p:spTree>
       <p:nvGrpSpPr>
-        <p:cNvPr id="1" name=""/>
+        <p:cNvPr id="1" name="">
+          <a:extLst>
+            <a:ext uri="{FF2B5EF4-FFF2-40B4-BE49-F238E27FC236}">
+              <a16:creationId xmlns:a16="http://schemas.microsoft.com/office/drawing/2014/main" id="{9241C9A7-A4D3-1122-798E-655059024C28}"/>
+            </a:ext>
+          </a:extLst>
+        </p:cNvPr>
         <p:cNvGrpSpPr/>
         <p:nvPr/>
       </p:nvGrpSpPr>
@@ -610,7 +618,13 @@
       </p:grpSpPr>
       <p:sp>
         <p:nvSpPr>
-          <p:cNvPr id="2" name="Slide Image Placeholder 1"/>
+          <p:cNvPr id="2" name="Slide Image Placeholder 1">
+            <a:extLst>
+              <a:ext uri="{FF2B5EF4-FFF2-40B4-BE49-F238E27FC236}">
+                <a16:creationId xmlns:a16="http://schemas.microsoft.com/office/drawing/2014/main" id="{A507C64A-5A05-7462-17BE-42B285D3495B}"/>
+              </a:ext>
+            </a:extLst>
+          </p:cNvPr>
           <p:cNvSpPr>
             <a:spLocks noGrp="1" noRot="1" noChangeAspect="1"/>
           </p:cNvSpPr>
@@ -622,7 +636,13 @@
       </p:sp>
       <p:sp>
         <p:nvSpPr>
-          <p:cNvPr id="3" name="Notes Placeholder 2"/>
+          <p:cNvPr id="3" name="Notes Placeholder 2">
+            <a:extLst>
+              <a:ext uri="{FF2B5EF4-FFF2-40B4-BE49-F238E27FC236}">
+                <a16:creationId xmlns:a16="http://schemas.microsoft.com/office/drawing/2014/main" id="{4D3A8674-F878-478A-FC3E-A0FDBF05F42B}"/>
+              </a:ext>
+            </a:extLst>
+          </p:cNvPr>
           <p:cNvSpPr>
             <a:spLocks noGrp="1"/>
           </p:cNvSpPr>
@@ -641,7 +661,13 @@
       </p:sp>
       <p:sp>
         <p:nvSpPr>
-          <p:cNvPr id="4" name="Slide Number Placeholder 3"/>
+          <p:cNvPr id="4" name="Slide Number Placeholder 3">
+            <a:extLst>
+              <a:ext uri="{FF2B5EF4-FFF2-40B4-BE49-F238E27FC236}">
+                <a16:creationId xmlns:a16="http://schemas.microsoft.com/office/drawing/2014/main" id="{C917A939-FD92-6A49-5B7F-C78566B320CC}"/>
+              </a:ext>
+            </a:extLst>
+          </p:cNvPr>
           <p:cNvSpPr>
             <a:spLocks noGrp="1"/>
           </p:cNvSpPr>
@@ -665,7 +691,7 @@
     </p:spTree>
     <p:extLst>
       <p:ext uri="{BB962C8B-B14F-4D97-AF65-F5344CB8AC3E}">
-        <p14:creationId xmlns:p14="http://schemas.microsoft.com/office/powerpoint/2010/main" val="1024086991"/>
+        <p14:creationId xmlns:p14="http://schemas.microsoft.com/office/powerpoint/2010/main" val="2089623703"/>
       </p:ext>
     </p:extLst>
   </p:cSld>
@@ -764,7 +790,13 @@
   <p:cSld>
     <p:spTree>
       <p:nvGrpSpPr>
-        <p:cNvPr id="1" name=""/>
+        <p:cNvPr id="1" name="">
+          <a:extLst>
+            <a:ext uri="{FF2B5EF4-FFF2-40B4-BE49-F238E27FC236}">
+              <a16:creationId xmlns:a16="http://schemas.microsoft.com/office/drawing/2014/main" id="{A3067131-5E3C-5A81-E1A4-12E546E75D5F}"/>
+            </a:ext>
+          </a:extLst>
+        </p:cNvPr>
         <p:cNvGrpSpPr/>
         <p:nvPr/>
       </p:nvGrpSpPr>
@@ -778,7 +810,13 @@
       </p:grpSpPr>
       <p:sp>
         <p:nvSpPr>
-          <p:cNvPr id="2" name="Slide Image Placeholder 1"/>
+          <p:cNvPr id="2" name="Slide Image Placeholder 1">
+            <a:extLst>
+              <a:ext uri="{FF2B5EF4-FFF2-40B4-BE49-F238E27FC236}">
+                <a16:creationId xmlns:a16="http://schemas.microsoft.com/office/drawing/2014/main" id="{F8F824F7-DF52-D265-26F3-1E4656FF775B}"/>
+              </a:ext>
+            </a:extLst>
+          </p:cNvPr>
           <p:cNvSpPr>
             <a:spLocks noGrp="1" noRot="1" noChangeAspect="1"/>
           </p:cNvSpPr>
@@ -790,7 +828,13 @@
       </p:sp>
       <p:sp>
         <p:nvSpPr>
-          <p:cNvPr id="3" name="Notes Placeholder 2"/>
+          <p:cNvPr id="3" name="Notes Placeholder 2">
+            <a:extLst>
+              <a:ext uri="{FF2B5EF4-FFF2-40B4-BE49-F238E27FC236}">
+                <a16:creationId xmlns:a16="http://schemas.microsoft.com/office/drawing/2014/main" id="{5D1839FB-4399-5D5B-628F-74267FE08B3F}"/>
+              </a:ext>
+            </a:extLst>
+          </p:cNvPr>
           <p:cNvSpPr>
             <a:spLocks noGrp="1"/>
           </p:cNvSpPr>
@@ -809,7 +853,13 @@
       </p:sp>
       <p:sp>
         <p:nvSpPr>
-          <p:cNvPr id="4" name="Slide Number Placeholder 3"/>
+          <p:cNvPr id="4" name="Slide Number Placeholder 3">
+            <a:extLst>
+              <a:ext uri="{FF2B5EF4-FFF2-40B4-BE49-F238E27FC236}">
+                <a16:creationId xmlns:a16="http://schemas.microsoft.com/office/drawing/2014/main" id="{53B3459C-E9D5-5C21-A069-977008D2FBB3}"/>
+              </a:ext>
+            </a:extLst>
+          </p:cNvPr>
           <p:cNvSpPr>
             <a:spLocks noGrp="1"/>
           </p:cNvSpPr>
@@ -833,7 +883,7 @@
     </p:spTree>
     <p:extLst>
       <p:ext uri="{BB962C8B-B14F-4D97-AF65-F5344CB8AC3E}">
-        <p14:creationId xmlns:p14="http://schemas.microsoft.com/office/powerpoint/2010/main" val="1024086991"/>
+        <p14:creationId xmlns:p14="http://schemas.microsoft.com/office/powerpoint/2010/main" val="1094558128"/>
       </p:ext>
     </p:extLst>
   </p:cSld>
@@ -908,7 +958,7 @@
           <a:p>
             <a:fld id="{F7021451-1387-4CA6-816F-3879F97B5CBC}" type="slidenum">
               <a:rPr lang="en-US"/>
-              <a:t>17</a:t>
+              <a:t>16</a:t>
             </a:fld>
             <a:endParaRPr lang="en-US"/>
           </a:p>
@@ -992,7 +1042,7 @@
           <a:p>
             <a:fld id="{F7021451-1387-4CA6-816F-3879F97B5CBC}" type="slidenum">
               <a:rPr lang="en-US"/>
-              <a:t>18</a:t>
+              <a:t>17</a:t>
             </a:fld>
             <a:endParaRPr lang="en-US"/>
           </a:p>
@@ -1095,6 +1145,90 @@
 </p:notes>
 </file>
 
+<file path=ppt/notesSlides/notesSlide19.xml><?xml version="1.0" encoding="utf-8"?>
+<p:notes xmlns:a="http://schemas.openxmlformats.org/drawingml/2006/main" xmlns:r="http://schemas.openxmlformats.org/officeDocument/2006/relationships" xmlns:p="http://schemas.openxmlformats.org/presentationml/2006/main">
+  <p:cSld>
+    <p:spTree>
+      <p:nvGrpSpPr>
+        <p:cNvPr id="1" name=""/>
+        <p:cNvGrpSpPr/>
+        <p:nvPr/>
+      </p:nvGrpSpPr>
+      <p:grpSpPr>
+        <a:xfrm>
+          <a:off x="0" y="0"/>
+          <a:ext cx="0" cy="0"/>
+          <a:chOff x="0" y="0"/>
+          <a:chExt cx="0" cy="0"/>
+        </a:xfrm>
+      </p:grpSpPr>
+      <p:sp>
+        <p:nvSpPr>
+          <p:cNvPr id="2" name="Slide Image Placeholder 1"/>
+          <p:cNvSpPr>
+            <a:spLocks noGrp="1" noRot="1" noChangeAspect="1"/>
+          </p:cNvSpPr>
+          <p:nvPr>
+            <p:ph type="sldImg"/>
+          </p:nvPr>
+        </p:nvSpPr>
+        <p:spPr/>
+      </p:sp>
+      <p:sp>
+        <p:nvSpPr>
+          <p:cNvPr id="3" name="Notes Placeholder 2"/>
+          <p:cNvSpPr>
+            <a:spLocks noGrp="1"/>
+          </p:cNvSpPr>
+          <p:nvPr>
+            <p:ph type="body" idx="1"/>
+          </p:nvPr>
+        </p:nvSpPr>
+        <p:spPr/>
+        <p:txBody>
+          <a:bodyPr/>
+          <a:lstStyle/>
+          <a:p>
+            <a:endParaRPr lang="en-US" dirty="0"/>
+          </a:p>
+        </p:txBody>
+      </p:sp>
+      <p:sp>
+        <p:nvSpPr>
+          <p:cNvPr id="4" name="Slide Number Placeholder 3"/>
+          <p:cNvSpPr>
+            <a:spLocks noGrp="1"/>
+          </p:cNvSpPr>
+          <p:nvPr>
+            <p:ph type="sldNum" sz="quarter" idx="10"/>
+          </p:nvPr>
+        </p:nvSpPr>
+        <p:spPr/>
+        <p:txBody>
+          <a:bodyPr/>
+          <a:lstStyle/>
+          <a:p>
+            <a:fld id="{F7021451-1387-4CA6-816F-3879F97B5CBC}" type="slidenum">
+              <a:rPr lang="en-US"/>
+              <a:t>20</a:t>
+            </a:fld>
+            <a:endParaRPr lang="en-US"/>
+          </a:p>
+        </p:txBody>
+      </p:sp>
+    </p:spTree>
+    <p:extLst>
+      <p:ext uri="{BB962C8B-B14F-4D97-AF65-F5344CB8AC3E}">
+        <p14:creationId xmlns:p14="http://schemas.microsoft.com/office/powerpoint/2010/main" val="1024086991"/>
+      </p:ext>
+    </p:extLst>
+  </p:cSld>
+  <p:clrMapOvr>
+    <a:masterClrMapping/>
+  </p:clrMapOvr>
+</p:notes>
+</file>
+
 <file path=ppt/notesSlides/notesSlide2.xml><?xml version="1.0" encoding="utf-8"?>
 <p:notes xmlns:a="http://schemas.openxmlformats.org/drawingml/2006/main" xmlns:r="http://schemas.openxmlformats.org/officeDocument/2006/relationships" xmlns:p="http://schemas.openxmlformats.org/presentationml/2006/main">
   <p:cSld>
@@ -1161,6 +1295,90 @@
             <a:fld id="{F7021451-1387-4CA6-816F-3879F97B5CBC}" type="slidenum">
               <a:rPr lang="en-US"/>
               <a:t>2</a:t>
+            </a:fld>
+            <a:endParaRPr lang="en-US"/>
+          </a:p>
+        </p:txBody>
+      </p:sp>
+    </p:spTree>
+    <p:extLst>
+      <p:ext uri="{BB962C8B-B14F-4D97-AF65-F5344CB8AC3E}">
+        <p14:creationId xmlns:p14="http://schemas.microsoft.com/office/powerpoint/2010/main" val="1024086991"/>
+      </p:ext>
+    </p:extLst>
+  </p:cSld>
+  <p:clrMapOvr>
+    <a:masterClrMapping/>
+  </p:clrMapOvr>
+</p:notes>
+</file>
+
+<file path=ppt/notesSlides/notesSlide20.xml><?xml version="1.0" encoding="utf-8"?>
+<p:notes xmlns:a="http://schemas.openxmlformats.org/drawingml/2006/main" xmlns:r="http://schemas.openxmlformats.org/officeDocument/2006/relationships" xmlns:p="http://schemas.openxmlformats.org/presentationml/2006/main">
+  <p:cSld>
+    <p:spTree>
+      <p:nvGrpSpPr>
+        <p:cNvPr id="1" name=""/>
+        <p:cNvGrpSpPr/>
+        <p:nvPr/>
+      </p:nvGrpSpPr>
+      <p:grpSpPr>
+        <a:xfrm>
+          <a:off x="0" y="0"/>
+          <a:ext cx="0" cy="0"/>
+          <a:chOff x="0" y="0"/>
+          <a:chExt cx="0" cy="0"/>
+        </a:xfrm>
+      </p:grpSpPr>
+      <p:sp>
+        <p:nvSpPr>
+          <p:cNvPr id="2" name="Slide Image Placeholder 1"/>
+          <p:cNvSpPr>
+            <a:spLocks noGrp="1" noRot="1" noChangeAspect="1"/>
+          </p:cNvSpPr>
+          <p:nvPr>
+            <p:ph type="sldImg"/>
+          </p:nvPr>
+        </p:nvSpPr>
+        <p:spPr/>
+      </p:sp>
+      <p:sp>
+        <p:nvSpPr>
+          <p:cNvPr id="3" name="Notes Placeholder 2"/>
+          <p:cNvSpPr>
+            <a:spLocks noGrp="1"/>
+          </p:cNvSpPr>
+          <p:nvPr>
+            <p:ph type="body" idx="1"/>
+          </p:nvPr>
+        </p:nvSpPr>
+        <p:spPr/>
+        <p:txBody>
+          <a:bodyPr/>
+          <a:lstStyle/>
+          <a:p>
+            <a:endParaRPr lang="en-US" dirty="0"/>
+          </a:p>
+        </p:txBody>
+      </p:sp>
+      <p:sp>
+        <p:nvSpPr>
+          <p:cNvPr id="4" name="Slide Number Placeholder 3"/>
+          <p:cNvSpPr>
+            <a:spLocks noGrp="1"/>
+          </p:cNvSpPr>
+          <p:nvPr>
+            <p:ph type="sldNum" sz="quarter" idx="10"/>
+          </p:nvPr>
+        </p:nvSpPr>
+        <p:spPr/>
+        <p:txBody>
+          <a:bodyPr/>
+          <a:lstStyle/>
+          <a:p>
+            <a:fld id="{F7021451-1387-4CA6-816F-3879F97B5CBC}" type="slidenum">
+              <a:rPr lang="en-US"/>
+              <a:t>21</a:t>
             </a:fld>
             <a:endParaRPr lang="en-US"/>
           </a:p>
@@ -14578,6 +14796,72 @@
 
 <file path=ppt/slides/slide13.xml><?xml version="1.0" encoding="utf-8"?>
 <p:sld xmlns:a="http://schemas.openxmlformats.org/drawingml/2006/main" xmlns:r="http://schemas.openxmlformats.org/officeDocument/2006/relationships" xmlns:p="http://schemas.openxmlformats.org/presentationml/2006/main">
+  <p:cSld>
+    <p:spTree>
+      <p:nvGrpSpPr>
+        <p:cNvPr id="1" name="">
+          <a:extLst>
+            <a:ext uri="{FF2B5EF4-FFF2-40B4-BE49-F238E27FC236}">
+              <a16:creationId xmlns:a16="http://schemas.microsoft.com/office/drawing/2014/main" id="{2916AEF3-75A5-59F6-84DE-EAB1620F7F91}"/>
+            </a:ext>
+          </a:extLst>
+        </p:cNvPr>
+        <p:cNvGrpSpPr/>
+        <p:nvPr/>
+      </p:nvGrpSpPr>
+      <p:grpSpPr>
+        <a:xfrm>
+          <a:off x="0" y="0"/>
+          <a:ext cx="0" cy="0"/>
+          <a:chOff x="0" y="0"/>
+          <a:chExt cx="0" cy="0"/>
+        </a:xfrm>
+      </p:grpSpPr>
+      <p:pic>
+        <p:nvPicPr>
+          <p:cNvPr id="34" name="Picture 33" descr="A screenshot of a computer&#10;&#10;AI-generated content may be incorrect.">
+            <a:extLst>
+              <a:ext uri="{FF2B5EF4-FFF2-40B4-BE49-F238E27FC236}">
+                <a16:creationId xmlns:a16="http://schemas.microsoft.com/office/drawing/2014/main" id="{318B2F8F-7C5E-7C2B-C5FA-DC8DF6CDF477}"/>
+              </a:ext>
+            </a:extLst>
+          </p:cNvPr>
+          <p:cNvPicPr>
+            <a:picLocks noChangeAspect="1"/>
+          </p:cNvPicPr>
+          <p:nvPr/>
+        </p:nvPicPr>
+        <p:blipFill>
+          <a:blip r:embed="rId3"/>
+          <a:stretch>
+            <a:fillRect/>
+          </a:stretch>
+        </p:blipFill>
+        <p:spPr>
+          <a:xfrm>
+            <a:off x="-88490" y="-49775"/>
+            <a:ext cx="9311147" cy="5237520"/>
+          </a:xfrm>
+          <a:prstGeom prst="rect">
+            <a:avLst/>
+          </a:prstGeom>
+        </p:spPr>
+      </p:pic>
+    </p:spTree>
+    <p:extLst>
+      <p:ext uri="{BB962C8B-B14F-4D97-AF65-F5344CB8AC3E}">
+        <p14:creationId xmlns:p14="http://schemas.microsoft.com/office/powerpoint/2010/main" val="3880929074"/>
+      </p:ext>
+    </p:extLst>
+  </p:cSld>
+  <p:clrMapOvr>
+    <a:masterClrMapping/>
+  </p:clrMapOvr>
+</p:sld>
+</file>
+
+<file path=ppt/slides/slide14.xml><?xml version="1.0" encoding="utf-8"?>
+<p:sld xmlns:a="http://schemas.openxmlformats.org/drawingml/2006/main" xmlns:r="http://schemas.openxmlformats.org/officeDocument/2006/relationships" xmlns:p="http://schemas.openxmlformats.org/presentationml/2006/main">
   <p:cSld name="Slide 13">
     <p:bg>
       <p:bgPr>
@@ -16294,7 +16578,73 @@
 </p:sld>
 </file>
 
-<file path=ppt/slides/slide14.xml><?xml version="1.0" encoding="utf-8"?>
+<file path=ppt/slides/slide15.xml><?xml version="1.0" encoding="utf-8"?>
+<p:sld xmlns:a="http://schemas.openxmlformats.org/drawingml/2006/main" xmlns:r="http://schemas.openxmlformats.org/officeDocument/2006/relationships" xmlns:p="http://schemas.openxmlformats.org/presentationml/2006/main">
+  <p:cSld>
+    <p:spTree>
+      <p:nvGrpSpPr>
+        <p:cNvPr id="1" name="">
+          <a:extLst>
+            <a:ext uri="{FF2B5EF4-FFF2-40B4-BE49-F238E27FC236}">
+              <a16:creationId xmlns:a16="http://schemas.microsoft.com/office/drawing/2014/main" id="{871A8756-AF20-C0B2-5E81-B2CF09BAB6A7}"/>
+            </a:ext>
+          </a:extLst>
+        </p:cNvPr>
+        <p:cNvGrpSpPr/>
+        <p:nvPr/>
+      </p:nvGrpSpPr>
+      <p:grpSpPr>
+        <a:xfrm>
+          <a:off x="0" y="0"/>
+          <a:ext cx="0" cy="0"/>
+          <a:chOff x="0" y="0"/>
+          <a:chExt cx="0" cy="0"/>
+        </a:xfrm>
+      </p:grpSpPr>
+      <p:pic>
+        <p:nvPicPr>
+          <p:cNvPr id="28" name="Picture 27" descr="A screenshot of a computer&#10;&#10;AI-generated content may be incorrect.">
+            <a:extLst>
+              <a:ext uri="{FF2B5EF4-FFF2-40B4-BE49-F238E27FC236}">
+                <a16:creationId xmlns:a16="http://schemas.microsoft.com/office/drawing/2014/main" id="{B2767CB6-BD33-3C2F-6347-0FAD326E9944}"/>
+              </a:ext>
+            </a:extLst>
+          </p:cNvPr>
+          <p:cNvPicPr>
+            <a:picLocks noChangeAspect="1"/>
+          </p:cNvPicPr>
+          <p:nvPr/>
+        </p:nvPicPr>
+        <p:blipFill>
+          <a:blip r:embed="rId3"/>
+          <a:stretch>
+            <a:fillRect/>
+          </a:stretch>
+        </p:blipFill>
+        <p:spPr>
+          <a:xfrm>
+            <a:off x="-78658" y="-44245"/>
+            <a:ext cx="9360310" cy="5265174"/>
+          </a:xfrm>
+          <a:prstGeom prst="rect">
+            <a:avLst/>
+          </a:prstGeom>
+        </p:spPr>
+      </p:pic>
+    </p:spTree>
+    <p:extLst>
+      <p:ext uri="{BB962C8B-B14F-4D97-AF65-F5344CB8AC3E}">
+        <p14:creationId xmlns:p14="http://schemas.microsoft.com/office/powerpoint/2010/main" val="3653429644"/>
+      </p:ext>
+    </p:extLst>
+  </p:cSld>
+  <p:clrMapOvr>
+    <a:masterClrMapping/>
+  </p:clrMapOvr>
+</p:sld>
+</file>
+
+<file path=ppt/slides/slide16.xml><?xml version="1.0" encoding="utf-8"?>
 <p:sld xmlns:a="http://schemas.openxmlformats.org/drawingml/2006/main" xmlns:r="http://schemas.openxmlformats.org/officeDocument/2006/relationships" xmlns:p="http://schemas.openxmlformats.org/presentationml/2006/main">
   <p:cSld name="Slide 14">
     <p:bg>
@@ -17115,7 +17465,7 @@
 </p:sld>
 </file>
 
-<file path=ppt/slides/slide15.xml><?xml version="1.0" encoding="utf-8"?>
+<file path=ppt/slides/slide17.xml><?xml version="1.0" encoding="utf-8"?>
 <p:sld xmlns:a="http://schemas.openxmlformats.org/drawingml/2006/main" xmlns:r="http://schemas.openxmlformats.org/officeDocument/2006/relationships" xmlns:p="http://schemas.openxmlformats.org/presentationml/2006/main">
   <p:cSld name="Slide 15">
     <p:bg>
@@ -17393,6 +17743,13 @@
             <a:prstDash val="solid"/>
           </a:ln>
         </p:spPr>
+        <p:txBody>
+          <a:bodyPr/>
+          <a:lstStyle/>
+          <a:p>
+            <a:endParaRPr lang="en-US" dirty="0"/>
+          </a:p>
+        </p:txBody>
       </p:sp>
       <p:sp>
         <p:nvSpPr>
@@ -17458,7 +17815,7 @@
               <a:buNone/>
             </a:pPr>
             <a:r>
-              <a:rPr lang="en-US" sz="1000" dirty="0">
+              <a:rPr lang="en-US" sz="1100" dirty="0">
                 <a:solidFill>
                   <a:srgbClr val="00C8FF"/>
                 </a:solidFill>
@@ -17469,7 +17826,7 @@
               </a:rPr>
               <a:t>mantis-cipher-explorer.vercel.app</a:t>
             </a:r>
-            <a:endParaRPr lang="en-US" sz="1000" dirty="0"/>
+            <a:endParaRPr lang="en-US" sz="1100" dirty="0"/>
           </a:p>
         </p:txBody>
       </p:sp>
@@ -17562,7 +17919,7 @@
               <a:buNone/>
             </a:pPr>
             <a:r>
-              <a:rPr lang="en-US" sz="1000" dirty="0">
+              <a:rPr lang="en-US" sz="1100" dirty="0">
                 <a:solidFill>
                   <a:srgbClr val="FFD166"/>
                 </a:solidFill>
@@ -17573,7 +17930,7 @@
               </a:rPr>
               <a:t>github.com/Swarnadip-Kar/mantis-cipher-explorer</a:t>
             </a:r>
-            <a:endParaRPr lang="en-US" sz="1000" dirty="0"/>
+            <a:endParaRPr lang="en-US" sz="1100" dirty="0"/>
           </a:p>
         </p:txBody>
       </p:sp>
@@ -18611,7 +18968,7 @@
 </p:sld>
 </file>
 
-<file path=ppt/slides/slide16.xml><?xml version="1.0" encoding="utf-8"?>
+<file path=ppt/slides/slide18.xml><?xml version="1.0" encoding="utf-8"?>
 <p:sld xmlns:a="http://schemas.openxmlformats.org/drawingml/2006/main" xmlns:r="http://schemas.openxmlformats.org/officeDocument/2006/relationships" xmlns:p="http://schemas.openxmlformats.org/presentationml/2006/main">
   <p:cSld>
     <p:spTree>
@@ -18671,7 +19028,7 @@
 </p:sld>
 </file>
 
-<file path=ppt/slides/slide17.xml><?xml version="1.0" encoding="utf-8"?>
+<file path=ppt/slides/slide19.xml><?xml version="1.0" encoding="utf-8"?>
 <p:sld xmlns:a="http://schemas.openxmlformats.org/drawingml/2006/main" xmlns:r="http://schemas.openxmlformats.org/officeDocument/2006/relationships" xmlns:p="http://schemas.openxmlformats.org/presentationml/2006/main">
   <p:cSld name="Slide 16">
     <p:bg>
@@ -20534,1951 +20891,6 @@
 </p:sld>
 </file>
 
-<file path=ppt/slides/slide18.xml><?xml version="1.0" encoding="utf-8"?>
-<p:sld xmlns:a="http://schemas.openxmlformats.org/drawingml/2006/main" xmlns:r="http://schemas.openxmlformats.org/officeDocument/2006/relationships" xmlns:p="http://schemas.openxmlformats.org/presentationml/2006/main">
-  <p:cSld name="Slide 17">
-    <p:bg>
-      <p:bgPr>
-        <a:solidFill>
-          <a:srgbClr val="FFFFFF"/>
-        </a:solidFill>
-        <a:effectLst/>
-      </p:bgPr>
-    </p:bg>
-    <p:spTree>
-      <p:nvGrpSpPr>
-        <p:cNvPr id="1" name=""/>
-        <p:cNvGrpSpPr/>
-        <p:nvPr/>
-      </p:nvGrpSpPr>
-      <p:grpSpPr>
-        <a:xfrm>
-          <a:off x="0" y="0"/>
-          <a:ext cx="0" cy="0"/>
-          <a:chOff x="0" y="0"/>
-          <a:chExt cx="0" cy="0"/>
-        </a:xfrm>
-      </p:grpSpPr>
-      <p:sp>
-        <p:nvSpPr>
-          <p:cNvPr id="2" name="Shape 0"/>
-          <p:cNvSpPr/>
-          <p:nvPr/>
-        </p:nvSpPr>
-        <p:spPr>
-          <a:xfrm>
-            <a:off x="0" y="0"/>
-            <a:ext cx="164592" cy="5143500"/>
-          </a:xfrm>
-          <a:prstGeom prst="rect">
-            <a:avLst/>
-          </a:prstGeom>
-          <a:solidFill>
-            <a:srgbClr val="0A0E1A"/>
-          </a:solidFill>
-          <a:ln w="12700">
-            <a:solidFill>
-              <a:srgbClr val="0A0E1A"/>
-            </a:solidFill>
-            <a:prstDash val="solid"/>
-          </a:ln>
-        </p:spPr>
-      </p:sp>
-      <p:sp>
-        <p:nvSpPr>
-          <p:cNvPr id="3" name="Shape 1"/>
-          <p:cNvSpPr/>
-          <p:nvPr/>
-        </p:nvSpPr>
-        <p:spPr>
-          <a:xfrm>
-            <a:off x="164592" y="0"/>
-            <a:ext cx="73152" cy="5143500"/>
-          </a:xfrm>
-          <a:prstGeom prst="rect">
-            <a:avLst/>
-          </a:prstGeom>
-          <a:solidFill>
-            <a:srgbClr val="00E676"/>
-          </a:solidFill>
-          <a:ln w="12700">
-            <a:solidFill>
-              <a:srgbClr val="00E676"/>
-            </a:solidFill>
-            <a:prstDash val="solid"/>
-          </a:ln>
-        </p:spPr>
-      </p:sp>
-      <p:sp>
-        <p:nvSpPr>
-          <p:cNvPr id="4" name="Text 2"/>
-          <p:cNvSpPr/>
-          <p:nvPr/>
-        </p:nvSpPr>
-        <p:spPr>
-          <a:xfrm>
-            <a:off x="411480" y="182880"/>
-            <a:ext cx="8229600" cy="292608"/>
-          </a:xfrm>
-          <a:prstGeom prst="rect">
-            <a:avLst/>
-          </a:prstGeom>
-          <a:noFill/>
-          <a:ln/>
-        </p:spPr>
-        <p:txBody>
-          <a:bodyPr wrap="square" rtlCol="0" anchor="ctr"/>
-          <a:lstStyle/>
-          <a:p>
-            <a:pPr marL="0" indent="0">
-              <a:buNone/>
-            </a:pPr>
-            <a:r>
-              <a:rPr lang="en-US" sz="1000" b="1" kern="0" spc="300" dirty="0">
-                <a:solidFill>
-                  <a:srgbClr val="009945"/>
-                </a:solidFill>
-                <a:latin typeface="Calibri" pitchFamily="34" charset="0"/>
-                <a:ea typeface="Calibri" pitchFamily="34" charset="-122"/>
-                <a:cs typeface="Calibri" pitchFamily="34" charset="-120"/>
-              </a:rPr>
-              <a:t>APPLICATIONS</a:t>
-            </a:r>
-            <a:endParaRPr lang="en-US" sz="1000" dirty="0"/>
-          </a:p>
-        </p:txBody>
-      </p:sp>
-      <p:sp>
-        <p:nvSpPr>
-          <p:cNvPr id="5" name="Text 3"/>
-          <p:cNvSpPr/>
-          <p:nvPr/>
-        </p:nvSpPr>
-        <p:spPr>
-          <a:xfrm>
-            <a:off x="411480" y="475488"/>
-            <a:ext cx="8229600" cy="457200"/>
-          </a:xfrm>
-          <a:prstGeom prst="rect">
-            <a:avLst/>
-          </a:prstGeom>
-          <a:noFill/>
-          <a:ln/>
-        </p:spPr>
-        <p:txBody>
-          <a:bodyPr wrap="square" rtlCol="0" anchor="ctr"/>
-          <a:lstStyle/>
-          <a:p>
-            <a:pPr marL="0" indent="0">
-              <a:buNone/>
-            </a:pPr>
-            <a:r>
-              <a:rPr lang="en-US" sz="2800" b="1" dirty="0">
-                <a:solidFill>
-                  <a:srgbClr val="1A1A2E"/>
-                </a:solidFill>
-                <a:latin typeface="Georgia" pitchFamily="34" charset="0"/>
-                <a:ea typeface="Georgia" pitchFamily="34" charset="-122"/>
-                <a:cs typeface="Georgia" pitchFamily="34" charset="-120"/>
-              </a:rPr>
-              <a:t>Where MANTIS Shines</a:t>
-            </a:r>
-            <a:endParaRPr lang="en-US" sz="2800" dirty="0"/>
-          </a:p>
-        </p:txBody>
-      </p:sp>
-      <p:sp>
-        <p:nvSpPr>
-          <p:cNvPr id="6" name="Shape 4"/>
-          <p:cNvSpPr/>
-          <p:nvPr/>
-        </p:nvSpPr>
-        <p:spPr>
-          <a:xfrm>
-            <a:off x="411480" y="1024128"/>
-            <a:ext cx="2743200" cy="3931920"/>
-          </a:xfrm>
-          <a:prstGeom prst="rect">
-            <a:avLst/>
-          </a:prstGeom>
-          <a:solidFill>
-            <a:srgbClr val="F4F7FB"/>
-          </a:solidFill>
-          <a:ln w="12700">
-            <a:solidFill>
-              <a:srgbClr val="D0D8E8"/>
-            </a:solidFill>
-            <a:prstDash val="solid"/>
-          </a:ln>
-          <a:effectLst>
-            <a:outerShdw blurRad="101600" dist="38100" dir="8100000" algn="bl" rotWithShape="0">
-              <a:srgbClr val="000000">
-                <a:alpha val="15000"/>
-              </a:srgbClr>
-            </a:outerShdw>
-          </a:effectLst>
-        </p:spPr>
-      </p:sp>
-      <p:sp>
-        <p:nvSpPr>
-          <p:cNvPr id="7" name="Shape 5"/>
-          <p:cNvSpPr/>
-          <p:nvPr/>
-        </p:nvSpPr>
-        <p:spPr>
-          <a:xfrm>
-            <a:off x="411480" y="1024128"/>
-            <a:ext cx="2743200" cy="54864"/>
-          </a:xfrm>
-          <a:prstGeom prst="rect">
-            <a:avLst/>
-          </a:prstGeom>
-          <a:solidFill>
-            <a:srgbClr val="00C8FF"/>
-          </a:solidFill>
-          <a:ln w="12700">
-            <a:solidFill>
-              <a:srgbClr val="00C8FF"/>
-            </a:solidFill>
-            <a:prstDash val="solid"/>
-          </a:ln>
-        </p:spPr>
-      </p:sp>
-      <p:sp>
-        <p:nvSpPr>
-          <p:cNvPr id="8" name="Text 6"/>
-          <p:cNvSpPr/>
-          <p:nvPr/>
-        </p:nvSpPr>
-        <p:spPr>
-          <a:xfrm>
-            <a:off x="411480" y="1115568"/>
-            <a:ext cx="2743200" cy="594360"/>
-          </a:xfrm>
-          <a:prstGeom prst="rect">
-            <a:avLst/>
-          </a:prstGeom>
-          <a:noFill/>
-          <a:ln/>
-        </p:spPr>
-        <p:txBody>
-          <a:bodyPr wrap="square" rtlCol="0" anchor="ctr"/>
-          <a:lstStyle/>
-          <a:p>
-            <a:pPr marL="0" indent="0" algn="ctr">
-              <a:buNone/>
-            </a:pPr>
-            <a:r>
-              <a:rPr lang="en-US" sz="2800" dirty="0">
-                <a:solidFill>
-                  <a:srgbClr val="000000"/>
-                </a:solidFill>
-              </a:rPr>
-              <a:t>🖥️</a:t>
-            </a:r>
-            <a:endParaRPr lang="en-US" sz="2800" dirty="0"/>
-          </a:p>
-        </p:txBody>
-      </p:sp>
-      <p:sp>
-        <p:nvSpPr>
-          <p:cNvPr id="9" name="Text 7"/>
-          <p:cNvSpPr/>
-          <p:nvPr/>
-        </p:nvSpPr>
-        <p:spPr>
-          <a:xfrm>
-            <a:off x="502920" y="1719072"/>
-            <a:ext cx="2560320" cy="384048"/>
-          </a:xfrm>
-          <a:prstGeom prst="rect">
-            <a:avLst/>
-          </a:prstGeom>
-          <a:noFill/>
-          <a:ln/>
-        </p:spPr>
-        <p:txBody>
-          <a:bodyPr wrap="square" rtlCol="0" anchor="ctr"/>
-          <a:lstStyle/>
-          <a:p>
-            <a:pPr marL="0" indent="0" algn="ctr">
-              <a:buNone/>
-            </a:pPr>
-            <a:r>
-              <a:rPr lang="en-US" sz="1300" b="1" dirty="0">
-                <a:solidFill>
-                  <a:srgbClr val="1A1A2E"/>
-                </a:solidFill>
-                <a:latin typeface="Calibri" pitchFamily="34" charset="0"/>
-                <a:ea typeface="Calibri" pitchFamily="34" charset="-122"/>
-                <a:cs typeface="Calibri" pitchFamily="34" charset="-120"/>
-              </a:rPr>
-              <a:t>Memory Encryption</a:t>
-            </a:r>
-            <a:endParaRPr lang="en-US" sz="1300" dirty="0"/>
-          </a:p>
-        </p:txBody>
-      </p:sp>
-      <p:sp>
-        <p:nvSpPr>
-          <p:cNvPr id="10" name="Text 8"/>
-          <p:cNvSpPr/>
-          <p:nvPr/>
-        </p:nvSpPr>
-        <p:spPr>
-          <a:xfrm>
-            <a:off x="502920" y="2148840"/>
-            <a:ext cx="2560320" cy="1645920"/>
-          </a:xfrm>
-          <a:prstGeom prst="rect">
-            <a:avLst/>
-          </a:prstGeom>
-          <a:noFill/>
-          <a:ln/>
-        </p:spPr>
-        <p:txBody>
-          <a:bodyPr wrap="square" rtlCol="0" anchor="ctr"/>
-          <a:lstStyle/>
-          <a:p>
-            <a:pPr marL="0" indent="0">
-              <a:buNone/>
-            </a:pPr>
-            <a:r>
-              <a:rPr lang="en-US" sz="1050" dirty="0">
-                <a:solidFill>
-                  <a:srgbClr val="444466"/>
-                </a:solidFill>
-                <a:latin typeface="Calibri" pitchFamily="34" charset="0"/>
-                <a:ea typeface="Calibri" pitchFamily="34" charset="-122"/>
-                <a:cs typeface="Calibri" pitchFamily="34" charset="-120"/>
-              </a:rPr>
-              <a:t>Primary use case — IBM SecureBlue++, Intel SGX. Every cache-line read/write encrypted on the critical path. Memory address serves as the tweak, providing natural sector isolation without IV management overhead.</a:t>
-            </a:r>
-            <a:endParaRPr lang="en-US" sz="1050" dirty="0"/>
-          </a:p>
-        </p:txBody>
-      </p:sp>
-      <p:sp>
-        <p:nvSpPr>
-          <p:cNvPr id="11" name="Shape 9"/>
-          <p:cNvSpPr/>
-          <p:nvPr/>
-        </p:nvSpPr>
-        <p:spPr>
-          <a:xfrm>
-            <a:off x="502920" y="3858768"/>
-            <a:ext cx="2560320" cy="292608"/>
-          </a:xfrm>
-          <a:prstGeom prst="rect">
-            <a:avLst/>
-          </a:prstGeom>
-          <a:solidFill>
-            <a:srgbClr val="00C8FF">
-              <a:alpha val="15000"/>
-            </a:srgbClr>
-          </a:solidFill>
-          <a:ln w="12700">
-            <a:solidFill>
-              <a:srgbClr val="00C8FF"/>
-            </a:solidFill>
-            <a:prstDash val="solid"/>
-          </a:ln>
-        </p:spPr>
-      </p:sp>
-      <p:sp>
-        <p:nvSpPr>
-          <p:cNvPr id="12" name="Text 10"/>
-          <p:cNvSpPr/>
-          <p:nvPr/>
-        </p:nvSpPr>
-        <p:spPr>
-          <a:xfrm>
-            <a:off x="548640" y="3858768"/>
-            <a:ext cx="2468880" cy="292608"/>
-          </a:xfrm>
-          <a:prstGeom prst="rect">
-            <a:avLst/>
-          </a:prstGeom>
-          <a:noFill/>
-          <a:ln/>
-        </p:spPr>
-        <p:txBody>
-          <a:bodyPr wrap="square" rtlCol="0" anchor="ctr"/>
-          <a:lstStyle/>
-          <a:p>
-            <a:pPr marL="0" indent="0">
-              <a:buNone/>
-            </a:pPr>
-            <a:r>
-              <a:rPr lang="en-US" sz="1000" dirty="0">
-                <a:solidFill>
-                  <a:srgbClr val="0A0E1A"/>
-                </a:solidFill>
-                <a:latin typeface="Calibri" pitchFamily="34" charset="0"/>
-                <a:ea typeface="Calibri" pitchFamily="34" charset="-122"/>
-                <a:cs typeface="Calibri" pitchFamily="34" charset="-120"/>
-              </a:rPr>
-              <a:t>✓  Single-cycle latency</a:t>
-            </a:r>
-            <a:endParaRPr lang="en-US" sz="1000" dirty="0"/>
-          </a:p>
-        </p:txBody>
-      </p:sp>
-      <p:sp>
-        <p:nvSpPr>
-          <p:cNvPr id="13" name="Shape 11"/>
-          <p:cNvSpPr/>
-          <p:nvPr/>
-        </p:nvSpPr>
-        <p:spPr>
-          <a:xfrm>
-            <a:off x="502920" y="4206240"/>
-            <a:ext cx="2560320" cy="292608"/>
-          </a:xfrm>
-          <a:prstGeom prst="rect">
-            <a:avLst/>
-          </a:prstGeom>
-          <a:solidFill>
-            <a:srgbClr val="00C8FF">
-              <a:alpha val="15000"/>
-            </a:srgbClr>
-          </a:solidFill>
-          <a:ln w="12700">
-            <a:solidFill>
-              <a:srgbClr val="00C8FF"/>
-            </a:solidFill>
-            <a:prstDash val="solid"/>
-          </a:ln>
-        </p:spPr>
-      </p:sp>
-      <p:sp>
-        <p:nvSpPr>
-          <p:cNvPr id="14" name="Text 12"/>
-          <p:cNvSpPr/>
-          <p:nvPr/>
-        </p:nvSpPr>
-        <p:spPr>
-          <a:xfrm>
-            <a:off x="548640" y="4206240"/>
-            <a:ext cx="2468880" cy="292608"/>
-          </a:xfrm>
-          <a:prstGeom prst="rect">
-            <a:avLst/>
-          </a:prstGeom>
-          <a:noFill/>
-          <a:ln/>
-        </p:spPr>
-        <p:txBody>
-          <a:bodyPr wrap="square" rtlCol="0" anchor="ctr"/>
-          <a:lstStyle/>
-          <a:p>
-            <a:pPr marL="0" indent="0">
-              <a:buNone/>
-            </a:pPr>
-            <a:r>
-              <a:rPr lang="en-US" sz="1000" dirty="0">
-                <a:solidFill>
-                  <a:srgbClr val="0A0E1A"/>
-                </a:solidFill>
-                <a:latin typeface="Calibri" pitchFamily="34" charset="0"/>
-                <a:ea typeface="Calibri" pitchFamily="34" charset="-122"/>
-                <a:cs typeface="Calibri" pitchFamily="34" charset="-120"/>
-              </a:rPr>
-              <a:t>✓  Zero decrypt overhead</a:t>
-            </a:r>
-            <a:endParaRPr lang="en-US" sz="1000" dirty="0"/>
-          </a:p>
-        </p:txBody>
-      </p:sp>
-      <p:sp>
-        <p:nvSpPr>
-          <p:cNvPr id="15" name="Shape 13"/>
-          <p:cNvSpPr/>
-          <p:nvPr/>
-        </p:nvSpPr>
-        <p:spPr>
-          <a:xfrm>
-            <a:off x="502920" y="4553712"/>
-            <a:ext cx="2560320" cy="292608"/>
-          </a:xfrm>
-          <a:prstGeom prst="rect">
-            <a:avLst/>
-          </a:prstGeom>
-          <a:solidFill>
-            <a:srgbClr val="00C8FF">
-              <a:alpha val="15000"/>
-            </a:srgbClr>
-          </a:solidFill>
-          <a:ln w="12700">
-            <a:solidFill>
-              <a:srgbClr val="00C8FF"/>
-            </a:solidFill>
-            <a:prstDash val="solid"/>
-          </a:ln>
-        </p:spPr>
-      </p:sp>
-      <p:sp>
-        <p:nvSpPr>
-          <p:cNvPr id="16" name="Text 14"/>
-          <p:cNvSpPr/>
-          <p:nvPr/>
-        </p:nvSpPr>
-        <p:spPr>
-          <a:xfrm>
-            <a:off x="548640" y="4553712"/>
-            <a:ext cx="2468880" cy="292608"/>
-          </a:xfrm>
-          <a:prstGeom prst="rect">
-            <a:avLst/>
-          </a:prstGeom>
-          <a:noFill/>
-          <a:ln/>
-        </p:spPr>
-        <p:txBody>
-          <a:bodyPr wrap="square" rtlCol="0" anchor="ctr"/>
-          <a:lstStyle/>
-          <a:p>
-            <a:pPr marL="0" indent="0">
-              <a:buNone/>
-            </a:pPr>
-            <a:r>
-              <a:rPr lang="en-US" sz="1000" dirty="0">
-                <a:solidFill>
-                  <a:srgbClr val="0A0E1A"/>
-                </a:solidFill>
-                <a:latin typeface="Calibri" pitchFamily="34" charset="0"/>
-                <a:ea typeface="Calibri" pitchFamily="34" charset="-122"/>
-                <a:cs typeface="Calibri" pitchFamily="34" charset="-120"/>
-              </a:rPr>
-              <a:t>✓  Tweak = memory address</a:t>
-            </a:r>
-            <a:endParaRPr lang="en-US" sz="1000" dirty="0"/>
-          </a:p>
-        </p:txBody>
-      </p:sp>
-      <p:sp>
-        <p:nvSpPr>
-          <p:cNvPr id="17" name="Shape 15"/>
-          <p:cNvSpPr/>
-          <p:nvPr/>
-        </p:nvSpPr>
-        <p:spPr>
-          <a:xfrm>
-            <a:off x="3319272" y="1024128"/>
-            <a:ext cx="2743200" cy="3931920"/>
-          </a:xfrm>
-          <a:prstGeom prst="rect">
-            <a:avLst/>
-          </a:prstGeom>
-          <a:solidFill>
-            <a:srgbClr val="F4F7FB"/>
-          </a:solidFill>
-          <a:ln w="12700">
-            <a:solidFill>
-              <a:srgbClr val="D0D8E8"/>
-            </a:solidFill>
-            <a:prstDash val="solid"/>
-          </a:ln>
-          <a:effectLst>
-            <a:outerShdw blurRad="101600" dist="38100" dir="8100000" algn="bl" rotWithShape="0">
-              <a:srgbClr val="000000">
-                <a:alpha val="15000"/>
-              </a:srgbClr>
-            </a:outerShdw>
-          </a:effectLst>
-        </p:spPr>
-      </p:sp>
-      <p:sp>
-        <p:nvSpPr>
-          <p:cNvPr id="18" name="Shape 16"/>
-          <p:cNvSpPr/>
-          <p:nvPr/>
-        </p:nvSpPr>
-        <p:spPr>
-          <a:xfrm>
-            <a:off x="3319272" y="1024128"/>
-            <a:ext cx="2743200" cy="54864"/>
-          </a:xfrm>
-          <a:prstGeom prst="rect">
-            <a:avLst/>
-          </a:prstGeom>
-          <a:solidFill>
-            <a:srgbClr val="00E676"/>
-          </a:solidFill>
-          <a:ln w="12700">
-            <a:solidFill>
-              <a:srgbClr val="00E676"/>
-            </a:solidFill>
-            <a:prstDash val="solid"/>
-          </a:ln>
-        </p:spPr>
-      </p:sp>
-      <p:sp>
-        <p:nvSpPr>
-          <p:cNvPr id="19" name="Text 17"/>
-          <p:cNvSpPr/>
-          <p:nvPr/>
-        </p:nvSpPr>
-        <p:spPr>
-          <a:xfrm>
-            <a:off x="3319272" y="1115568"/>
-            <a:ext cx="2743200" cy="594360"/>
-          </a:xfrm>
-          <a:prstGeom prst="rect">
-            <a:avLst/>
-          </a:prstGeom>
-          <a:noFill/>
-          <a:ln/>
-        </p:spPr>
-        <p:txBody>
-          <a:bodyPr wrap="square" rtlCol="0" anchor="ctr"/>
-          <a:lstStyle/>
-          <a:p>
-            <a:pPr marL="0" indent="0" algn="ctr">
-              <a:buNone/>
-            </a:pPr>
-            <a:r>
-              <a:rPr lang="en-US" sz="2800" dirty="0">
-                <a:solidFill>
-                  <a:srgbClr val="000000"/>
-                </a:solidFill>
-              </a:rPr>
-              <a:t>📡</a:t>
-            </a:r>
-            <a:endParaRPr lang="en-US" sz="2800" dirty="0"/>
-          </a:p>
-        </p:txBody>
-      </p:sp>
-      <p:sp>
-        <p:nvSpPr>
-          <p:cNvPr id="20" name="Text 18"/>
-          <p:cNvSpPr/>
-          <p:nvPr/>
-        </p:nvSpPr>
-        <p:spPr>
-          <a:xfrm>
-            <a:off x="3410712" y="1719072"/>
-            <a:ext cx="2560320" cy="384048"/>
-          </a:xfrm>
-          <a:prstGeom prst="rect">
-            <a:avLst/>
-          </a:prstGeom>
-          <a:noFill/>
-          <a:ln/>
-        </p:spPr>
-        <p:txBody>
-          <a:bodyPr wrap="square" rtlCol="0" anchor="ctr"/>
-          <a:lstStyle/>
-          <a:p>
-            <a:pPr marL="0" indent="0" algn="ctr">
-              <a:buNone/>
-            </a:pPr>
-            <a:r>
-              <a:rPr lang="en-US" sz="1300" b="1" dirty="0">
-                <a:solidFill>
-                  <a:srgbClr val="1A1A2E"/>
-                </a:solidFill>
-                <a:latin typeface="Calibri" pitchFamily="34" charset="0"/>
-                <a:ea typeface="Calibri" pitchFamily="34" charset="-122"/>
-                <a:cs typeface="Calibri" pitchFamily="34" charset="-120"/>
-              </a:rPr>
-              <a:t>IoT &amp; Embedded Systems</a:t>
-            </a:r>
-            <a:endParaRPr lang="en-US" sz="1300" dirty="0"/>
-          </a:p>
-        </p:txBody>
-      </p:sp>
-      <p:sp>
-        <p:nvSpPr>
-          <p:cNvPr id="21" name="Text 19"/>
-          <p:cNvSpPr/>
-          <p:nvPr/>
-        </p:nvSpPr>
-        <p:spPr>
-          <a:xfrm>
-            <a:off x="3410712" y="2148840"/>
-            <a:ext cx="2560320" cy="1645920"/>
-          </a:xfrm>
-          <a:prstGeom prst="rect">
-            <a:avLst/>
-          </a:prstGeom>
-          <a:noFill/>
-          <a:ln/>
-        </p:spPr>
-        <p:txBody>
-          <a:bodyPr wrap="square" rtlCol="0" anchor="ctr"/>
-          <a:lstStyle/>
-          <a:p>
-            <a:pPr marL="0" indent="0">
-              <a:buNone/>
-            </a:pPr>
-            <a:r>
-              <a:rPr lang="en-US" sz="1050" dirty="0">
-                <a:solidFill>
-                  <a:srgbClr val="444466"/>
-                </a:solidFill>
-                <a:latin typeface="Calibri" pitchFamily="34" charset="0"/>
-                <a:ea typeface="Calibri" pitchFamily="34" charset="-122"/>
-                <a:cs typeface="Calibri" pitchFamily="34" charset="-120"/>
-              </a:rPr>
-              <a:t>MANTIS5 requires only 8,544 GE at 15.95 ns (UMC 180 nm). Marginal area over PRINCE while gaining a full tweak input. Ideal for sensor-address binding in embedded deployments.</a:t>
-            </a:r>
-            <a:endParaRPr lang="en-US" sz="1050" dirty="0"/>
-          </a:p>
-        </p:txBody>
-      </p:sp>
-      <p:sp>
-        <p:nvSpPr>
-          <p:cNvPr id="22" name="Shape 20"/>
-          <p:cNvSpPr/>
-          <p:nvPr/>
-        </p:nvSpPr>
-        <p:spPr>
-          <a:xfrm>
-            <a:off x="3410712" y="3858768"/>
-            <a:ext cx="2560320" cy="292608"/>
-          </a:xfrm>
-          <a:prstGeom prst="rect">
-            <a:avLst/>
-          </a:prstGeom>
-          <a:solidFill>
-            <a:srgbClr val="00E676">
-              <a:alpha val="15000"/>
-            </a:srgbClr>
-          </a:solidFill>
-          <a:ln w="12700">
-            <a:solidFill>
-              <a:srgbClr val="00E676"/>
-            </a:solidFill>
-            <a:prstDash val="solid"/>
-          </a:ln>
-        </p:spPr>
-      </p:sp>
-      <p:sp>
-        <p:nvSpPr>
-          <p:cNvPr id="23" name="Text 21"/>
-          <p:cNvSpPr/>
-          <p:nvPr/>
-        </p:nvSpPr>
-        <p:spPr>
-          <a:xfrm>
-            <a:off x="3456432" y="3858768"/>
-            <a:ext cx="2468880" cy="292608"/>
-          </a:xfrm>
-          <a:prstGeom prst="rect">
-            <a:avLst/>
-          </a:prstGeom>
-          <a:noFill/>
-          <a:ln/>
-        </p:spPr>
-        <p:txBody>
-          <a:bodyPr wrap="square" rtlCol="0" anchor="ctr"/>
-          <a:lstStyle/>
-          <a:p>
-            <a:pPr marL="0" indent="0">
-              <a:buNone/>
-            </a:pPr>
-            <a:r>
-              <a:rPr lang="en-US" sz="1000" dirty="0">
-                <a:solidFill>
-                  <a:srgbClr val="0A0E1A"/>
-                </a:solidFill>
-                <a:latin typeface="Calibri" pitchFamily="34" charset="0"/>
-                <a:ea typeface="Calibri" pitchFamily="34" charset="-122"/>
-                <a:cs typeface="Calibri" pitchFamily="34" charset="-120"/>
-              </a:rPr>
-              <a:t>✓  8,544 GE gate count</a:t>
-            </a:r>
-            <a:endParaRPr lang="en-US" sz="1000" dirty="0"/>
-          </a:p>
-        </p:txBody>
-      </p:sp>
-      <p:sp>
-        <p:nvSpPr>
-          <p:cNvPr id="24" name="Shape 22"/>
-          <p:cNvSpPr/>
-          <p:nvPr/>
-        </p:nvSpPr>
-        <p:spPr>
-          <a:xfrm>
-            <a:off x="3410712" y="4206240"/>
-            <a:ext cx="2560320" cy="292608"/>
-          </a:xfrm>
-          <a:prstGeom prst="rect">
-            <a:avLst/>
-          </a:prstGeom>
-          <a:solidFill>
-            <a:srgbClr val="00E676">
-              <a:alpha val="15000"/>
-            </a:srgbClr>
-          </a:solidFill>
-          <a:ln w="12700">
-            <a:solidFill>
-              <a:srgbClr val="00E676"/>
-            </a:solidFill>
-            <a:prstDash val="solid"/>
-          </a:ln>
-        </p:spPr>
-      </p:sp>
-      <p:sp>
-        <p:nvSpPr>
-          <p:cNvPr id="25" name="Text 23"/>
-          <p:cNvSpPr/>
-          <p:nvPr/>
-        </p:nvSpPr>
-        <p:spPr>
-          <a:xfrm>
-            <a:off x="3456432" y="4206240"/>
-            <a:ext cx="2468880" cy="292608"/>
-          </a:xfrm>
-          <a:prstGeom prst="rect">
-            <a:avLst/>
-          </a:prstGeom>
-          <a:noFill/>
-          <a:ln/>
-        </p:spPr>
-        <p:txBody>
-          <a:bodyPr wrap="square" rtlCol="0" anchor="ctr"/>
-          <a:lstStyle/>
-          <a:p>
-            <a:pPr marL="0" indent="0">
-              <a:buNone/>
-            </a:pPr>
-            <a:r>
-              <a:rPr lang="en-US" sz="1000" dirty="0">
-                <a:solidFill>
-                  <a:srgbClr val="0A0E1A"/>
-                </a:solidFill>
-                <a:latin typeface="Calibri" pitchFamily="34" charset="0"/>
-                <a:ea typeface="Calibri" pitchFamily="34" charset="-122"/>
-                <a:cs typeface="Calibri" pitchFamily="34" charset="-120"/>
-              </a:rPr>
-              <a:t>✓  15.95 ns latency</a:t>
-            </a:r>
-            <a:endParaRPr lang="en-US" sz="1000" dirty="0"/>
-          </a:p>
-        </p:txBody>
-      </p:sp>
-      <p:sp>
-        <p:nvSpPr>
-          <p:cNvPr id="26" name="Shape 24"/>
-          <p:cNvSpPr/>
-          <p:nvPr/>
-        </p:nvSpPr>
-        <p:spPr>
-          <a:xfrm>
-            <a:off x="3410712" y="4553712"/>
-            <a:ext cx="2560320" cy="292608"/>
-          </a:xfrm>
-          <a:prstGeom prst="rect">
-            <a:avLst/>
-          </a:prstGeom>
-          <a:solidFill>
-            <a:srgbClr val="00E676">
-              <a:alpha val="15000"/>
-            </a:srgbClr>
-          </a:solidFill>
-          <a:ln w="12700">
-            <a:solidFill>
-              <a:srgbClr val="00E676"/>
-            </a:solidFill>
-            <a:prstDash val="solid"/>
-          </a:ln>
-        </p:spPr>
-      </p:sp>
-      <p:sp>
-        <p:nvSpPr>
-          <p:cNvPr id="27" name="Text 25"/>
-          <p:cNvSpPr/>
-          <p:nvPr/>
-        </p:nvSpPr>
-        <p:spPr>
-          <a:xfrm>
-            <a:off x="3456432" y="4553712"/>
-            <a:ext cx="2468880" cy="292608"/>
-          </a:xfrm>
-          <a:prstGeom prst="rect">
-            <a:avLst/>
-          </a:prstGeom>
-          <a:noFill/>
-          <a:ln/>
-        </p:spPr>
-        <p:txBody>
-          <a:bodyPr wrap="square" rtlCol="0" anchor="ctr"/>
-          <a:lstStyle/>
-          <a:p>
-            <a:pPr marL="0" indent="0">
-              <a:buNone/>
-            </a:pPr>
-            <a:r>
-              <a:rPr lang="en-US" sz="1000" dirty="0">
-                <a:solidFill>
-                  <a:srgbClr val="0A0E1A"/>
-                </a:solidFill>
-                <a:latin typeface="Calibri" pitchFamily="34" charset="0"/>
-                <a:ea typeface="Calibri" pitchFamily="34" charset="-122"/>
-                <a:cs typeface="Calibri" pitchFamily="34" charset="-120"/>
-              </a:rPr>
-              <a:t>✓  Tweak binds sensor ID</a:t>
-            </a:r>
-            <a:endParaRPr lang="en-US" sz="1000" dirty="0"/>
-          </a:p>
-        </p:txBody>
-      </p:sp>
-      <p:sp>
-        <p:nvSpPr>
-          <p:cNvPr id="28" name="Shape 26"/>
-          <p:cNvSpPr/>
-          <p:nvPr/>
-        </p:nvSpPr>
-        <p:spPr>
-          <a:xfrm>
-            <a:off x="6227064" y="1024128"/>
-            <a:ext cx="2743200" cy="3931920"/>
-          </a:xfrm>
-          <a:prstGeom prst="rect">
-            <a:avLst/>
-          </a:prstGeom>
-          <a:solidFill>
-            <a:srgbClr val="F4F7FB"/>
-          </a:solidFill>
-          <a:ln w="12700">
-            <a:solidFill>
-              <a:srgbClr val="D0D8E8"/>
-            </a:solidFill>
-            <a:prstDash val="solid"/>
-          </a:ln>
-          <a:effectLst>
-            <a:outerShdw blurRad="101600" dist="38100" dir="8100000" algn="bl" rotWithShape="0">
-              <a:srgbClr val="000000">
-                <a:alpha val="15000"/>
-              </a:srgbClr>
-            </a:outerShdw>
-          </a:effectLst>
-        </p:spPr>
-      </p:sp>
-      <p:sp>
-        <p:nvSpPr>
-          <p:cNvPr id="29" name="Shape 27"/>
-          <p:cNvSpPr/>
-          <p:nvPr/>
-        </p:nvSpPr>
-        <p:spPr>
-          <a:xfrm>
-            <a:off x="6227064" y="1024128"/>
-            <a:ext cx="2743200" cy="54864"/>
-          </a:xfrm>
-          <a:prstGeom prst="rect">
-            <a:avLst/>
-          </a:prstGeom>
-          <a:solidFill>
-            <a:srgbClr val="FFD166"/>
-          </a:solidFill>
-          <a:ln w="12700">
-            <a:solidFill>
-              <a:srgbClr val="FFD166"/>
-            </a:solidFill>
-            <a:prstDash val="solid"/>
-          </a:ln>
-        </p:spPr>
-      </p:sp>
-      <p:sp>
-        <p:nvSpPr>
-          <p:cNvPr id="30" name="Text 28"/>
-          <p:cNvSpPr/>
-          <p:nvPr/>
-        </p:nvSpPr>
-        <p:spPr>
-          <a:xfrm>
-            <a:off x="6227064" y="1115568"/>
-            <a:ext cx="2743200" cy="594360"/>
-          </a:xfrm>
-          <a:prstGeom prst="rect">
-            <a:avLst/>
-          </a:prstGeom>
-          <a:noFill/>
-          <a:ln/>
-        </p:spPr>
-        <p:txBody>
-          <a:bodyPr wrap="square" rtlCol="0" anchor="ctr"/>
-          <a:lstStyle/>
-          <a:p>
-            <a:pPr marL="0" indent="0" algn="ctr">
-              <a:buNone/>
-            </a:pPr>
-            <a:r>
-              <a:rPr lang="en-US" sz="2800" dirty="0">
-                <a:solidFill>
-                  <a:srgbClr val="000000"/>
-                </a:solidFill>
-              </a:rPr>
-              <a:t>🏷️</a:t>
-            </a:r>
-            <a:endParaRPr lang="en-US" sz="2800" dirty="0"/>
-          </a:p>
-        </p:txBody>
-      </p:sp>
-      <p:sp>
-        <p:nvSpPr>
-          <p:cNvPr id="31" name="Text 29"/>
-          <p:cNvSpPr/>
-          <p:nvPr/>
-        </p:nvSpPr>
-        <p:spPr>
-          <a:xfrm>
-            <a:off x="6318504" y="1719072"/>
-            <a:ext cx="2560320" cy="384048"/>
-          </a:xfrm>
-          <a:prstGeom prst="rect">
-            <a:avLst/>
-          </a:prstGeom>
-          <a:noFill/>
-          <a:ln/>
-        </p:spPr>
-        <p:txBody>
-          <a:bodyPr wrap="square" rtlCol="0" anchor="ctr"/>
-          <a:lstStyle/>
-          <a:p>
-            <a:pPr marL="0" indent="0" algn="ctr">
-              <a:buNone/>
-            </a:pPr>
-            <a:r>
-              <a:rPr lang="en-US" sz="1300" b="1" dirty="0">
-                <a:solidFill>
-                  <a:srgbClr val="1A1A2E"/>
-                </a:solidFill>
-                <a:latin typeface="Calibri" pitchFamily="34" charset="0"/>
-                <a:ea typeface="Calibri" pitchFamily="34" charset="-122"/>
-                <a:cs typeface="Calibri" pitchFamily="34" charset="-120"/>
-              </a:rPr>
-              <a:t>vs PRESENT / AES</a:t>
-            </a:r>
-            <a:endParaRPr lang="en-US" sz="1300" dirty="0"/>
-          </a:p>
-        </p:txBody>
-      </p:sp>
-      <p:sp>
-        <p:nvSpPr>
-          <p:cNvPr id="32" name="Text 30"/>
-          <p:cNvSpPr/>
-          <p:nvPr/>
-        </p:nvSpPr>
-        <p:spPr>
-          <a:xfrm>
-            <a:off x="6318504" y="2148840"/>
-            <a:ext cx="2560320" cy="1645920"/>
-          </a:xfrm>
-          <a:prstGeom prst="rect">
-            <a:avLst/>
-          </a:prstGeom>
-          <a:noFill/>
-          <a:ln/>
-        </p:spPr>
-        <p:txBody>
-          <a:bodyPr wrap="square" rtlCol="0" anchor="ctr"/>
-          <a:lstStyle/>
-          <a:p>
-            <a:pPr marL="0" indent="0">
-              <a:buNone/>
-            </a:pPr>
-            <a:r>
-              <a:rPr lang="en-US" sz="1050" dirty="0">
-                <a:solidFill>
-                  <a:srgbClr val="444466"/>
-                </a:solidFill>
-                <a:latin typeface="Calibri" pitchFamily="34" charset="0"/>
-                <a:ea typeface="Calibri" pitchFamily="34" charset="-122"/>
-                <a:cs typeface="Calibri" pitchFamily="34" charset="-120"/>
-              </a:rPr>
-              <a:t>PRESENT (ISO/IEC 29192-2) targets passive RFID (1,570 GE). AES dominates general-purpose usage. MANTIS fills the gap: active processors needing low-latency decryption with tweak support.</a:t>
-            </a:r>
-            <a:endParaRPr lang="en-US" sz="1050" dirty="0"/>
-          </a:p>
-        </p:txBody>
-      </p:sp>
-      <p:sp>
-        <p:nvSpPr>
-          <p:cNvPr id="33" name="Shape 31"/>
-          <p:cNvSpPr/>
-          <p:nvPr/>
-        </p:nvSpPr>
-        <p:spPr>
-          <a:xfrm>
-            <a:off x="6318504" y="3858768"/>
-            <a:ext cx="2560320" cy="292608"/>
-          </a:xfrm>
-          <a:prstGeom prst="rect">
-            <a:avLst/>
-          </a:prstGeom>
-          <a:solidFill>
-            <a:srgbClr val="FFD166">
-              <a:alpha val="15000"/>
-            </a:srgbClr>
-          </a:solidFill>
-          <a:ln w="12700">
-            <a:solidFill>
-              <a:srgbClr val="FFD166"/>
-            </a:solidFill>
-            <a:prstDash val="solid"/>
-          </a:ln>
-        </p:spPr>
-      </p:sp>
-      <p:sp>
-        <p:nvSpPr>
-          <p:cNvPr id="34" name="Text 32"/>
-          <p:cNvSpPr/>
-          <p:nvPr/>
-        </p:nvSpPr>
-        <p:spPr>
-          <a:xfrm>
-            <a:off x="6364224" y="3858768"/>
-            <a:ext cx="2468880" cy="292608"/>
-          </a:xfrm>
-          <a:prstGeom prst="rect">
-            <a:avLst/>
-          </a:prstGeom>
-          <a:noFill/>
-          <a:ln/>
-        </p:spPr>
-        <p:txBody>
-          <a:bodyPr wrap="square" rtlCol="0" anchor="ctr"/>
-          <a:lstStyle/>
-          <a:p>
-            <a:pPr marL="0" indent="0">
-              <a:buNone/>
-            </a:pPr>
-            <a:r>
-              <a:rPr lang="en-US" sz="1000" dirty="0">
-                <a:solidFill>
-                  <a:srgbClr val="0A0E1A"/>
-                </a:solidFill>
-                <a:latin typeface="Calibri" pitchFamily="34" charset="0"/>
-                <a:ea typeface="Calibri" pitchFamily="34" charset="-122"/>
-                <a:cs typeface="Calibri" pitchFamily="34" charset="-120"/>
-              </a:rPr>
-              <a:t>✓  Active processor niche</a:t>
-            </a:r>
-            <a:endParaRPr lang="en-US" sz="1000" dirty="0"/>
-          </a:p>
-        </p:txBody>
-      </p:sp>
-      <p:sp>
-        <p:nvSpPr>
-          <p:cNvPr id="35" name="Shape 33"/>
-          <p:cNvSpPr/>
-          <p:nvPr/>
-        </p:nvSpPr>
-        <p:spPr>
-          <a:xfrm>
-            <a:off x="6318504" y="4206240"/>
-            <a:ext cx="2560320" cy="292608"/>
-          </a:xfrm>
-          <a:prstGeom prst="rect">
-            <a:avLst/>
-          </a:prstGeom>
-          <a:solidFill>
-            <a:srgbClr val="FFD166">
-              <a:alpha val="15000"/>
-            </a:srgbClr>
-          </a:solidFill>
-          <a:ln w="12700">
-            <a:solidFill>
-              <a:srgbClr val="FFD166"/>
-            </a:solidFill>
-            <a:prstDash val="solid"/>
-          </a:ln>
-        </p:spPr>
-      </p:sp>
-      <p:sp>
-        <p:nvSpPr>
-          <p:cNvPr id="36" name="Text 34"/>
-          <p:cNvSpPr/>
-          <p:nvPr/>
-        </p:nvSpPr>
-        <p:spPr>
-          <a:xfrm>
-            <a:off x="6364224" y="4206240"/>
-            <a:ext cx="2468880" cy="292608"/>
-          </a:xfrm>
-          <a:prstGeom prst="rect">
-            <a:avLst/>
-          </a:prstGeom>
-          <a:noFill/>
-          <a:ln/>
-        </p:spPr>
-        <p:txBody>
-          <a:bodyPr wrap="square" rtlCol="0" anchor="ctr"/>
-          <a:lstStyle/>
-          <a:p>
-            <a:pPr marL="0" indent="0">
-              <a:buNone/>
-            </a:pPr>
-            <a:r>
-              <a:rPr lang="en-US" sz="1000" dirty="0">
-                <a:solidFill>
-                  <a:srgbClr val="0A0E1A"/>
-                </a:solidFill>
-                <a:latin typeface="Calibri" pitchFamily="34" charset="0"/>
-                <a:ea typeface="Calibri" pitchFamily="34" charset="-122"/>
-                <a:cs typeface="Calibri" pitchFamily="34" charset="-120"/>
-              </a:rPr>
-              <a:t>✓  Tweak beats PRESENT</a:t>
-            </a:r>
-            <a:endParaRPr lang="en-US" sz="1000" dirty="0"/>
-          </a:p>
-        </p:txBody>
-      </p:sp>
-      <p:sp>
-        <p:nvSpPr>
-          <p:cNvPr id="37" name="Shape 35"/>
-          <p:cNvSpPr/>
-          <p:nvPr/>
-        </p:nvSpPr>
-        <p:spPr>
-          <a:xfrm>
-            <a:off x="6318504" y="4553712"/>
-            <a:ext cx="2560320" cy="292608"/>
-          </a:xfrm>
-          <a:prstGeom prst="rect">
-            <a:avLst/>
-          </a:prstGeom>
-          <a:solidFill>
-            <a:srgbClr val="FFD166">
-              <a:alpha val="15000"/>
-            </a:srgbClr>
-          </a:solidFill>
-          <a:ln w="12700">
-            <a:solidFill>
-              <a:srgbClr val="FFD166"/>
-            </a:solidFill>
-            <a:prstDash val="solid"/>
-          </a:ln>
-        </p:spPr>
-      </p:sp>
-      <p:sp>
-        <p:nvSpPr>
-          <p:cNvPr id="38" name="Text 36"/>
-          <p:cNvSpPr/>
-          <p:nvPr/>
-        </p:nvSpPr>
-        <p:spPr>
-          <a:xfrm>
-            <a:off x="6364224" y="4553712"/>
-            <a:ext cx="2468880" cy="292608"/>
-          </a:xfrm>
-          <a:prstGeom prst="rect">
-            <a:avLst/>
-          </a:prstGeom>
-          <a:noFill/>
-          <a:ln/>
-        </p:spPr>
-        <p:txBody>
-          <a:bodyPr wrap="square" rtlCol="0" anchor="ctr"/>
-          <a:lstStyle/>
-          <a:p>
-            <a:pPr marL="0" indent="0">
-              <a:buNone/>
-            </a:pPr>
-            <a:r>
-              <a:rPr lang="en-US" sz="1000" dirty="0">
-                <a:solidFill>
-                  <a:srgbClr val="0A0E1A"/>
-                </a:solidFill>
-                <a:latin typeface="Calibri" pitchFamily="34" charset="0"/>
-                <a:ea typeface="Calibri" pitchFamily="34" charset="-122"/>
-                <a:cs typeface="Calibri" pitchFamily="34" charset="-120"/>
-              </a:rPr>
-              <a:t>✓  Better latency than AES</a:t>
-            </a:r>
-            <a:endParaRPr lang="en-US" sz="1000" dirty="0"/>
-          </a:p>
-        </p:txBody>
-      </p:sp>
-    </p:spTree>
-  </p:cSld>
-  <p:clrMapOvr>
-    <a:masterClrMapping/>
-  </p:clrMapOvr>
-</p:sld>
-</file>
-
-<file path=ppt/slides/slide19.xml><?xml version="1.0" encoding="utf-8"?>
-<p:sld xmlns:a="http://schemas.openxmlformats.org/drawingml/2006/main" xmlns:r="http://schemas.openxmlformats.org/officeDocument/2006/relationships" xmlns:p="http://schemas.openxmlformats.org/presentationml/2006/main">
-  <p:cSld name="Slide 18">
-    <p:bg>
-      <p:bgPr>
-        <a:solidFill>
-          <a:srgbClr val="0A0E1A"/>
-        </a:solidFill>
-        <a:effectLst/>
-      </p:bgPr>
-    </p:bg>
-    <p:spTree>
-      <p:nvGrpSpPr>
-        <p:cNvPr id="1" name=""/>
-        <p:cNvGrpSpPr/>
-        <p:nvPr/>
-      </p:nvGrpSpPr>
-      <p:grpSpPr>
-        <a:xfrm>
-          <a:off x="0" y="0"/>
-          <a:ext cx="0" cy="0"/>
-          <a:chOff x="0" y="0"/>
-          <a:chExt cx="0" cy="0"/>
-        </a:xfrm>
-      </p:grpSpPr>
-      <p:sp>
-        <p:nvSpPr>
-          <p:cNvPr id="2" name="Shape 0"/>
-          <p:cNvSpPr/>
-          <p:nvPr/>
-        </p:nvSpPr>
-        <p:spPr>
-          <a:xfrm>
-            <a:off x="0" y="4800600"/>
-            <a:ext cx="9144000" cy="342900"/>
-          </a:xfrm>
-          <a:prstGeom prst="rect">
-            <a:avLst/>
-          </a:prstGeom>
-          <a:solidFill>
-            <a:srgbClr val="0E7FA8"/>
-          </a:solidFill>
-          <a:ln w="12700">
-            <a:solidFill>
-              <a:srgbClr val="0E7FA8"/>
-            </a:solidFill>
-            <a:prstDash val="solid"/>
-          </a:ln>
-        </p:spPr>
-      </p:sp>
-      <p:sp>
-        <p:nvSpPr>
-          <p:cNvPr id="3" name="Text 1"/>
-          <p:cNvSpPr/>
-          <p:nvPr/>
-        </p:nvSpPr>
-        <p:spPr>
-          <a:xfrm>
-            <a:off x="0" y="4800600"/>
-            <a:ext cx="9144000" cy="342900"/>
-          </a:xfrm>
-          <a:prstGeom prst="rect">
-            <a:avLst/>
-          </a:prstGeom>
-          <a:noFill/>
-          <a:ln/>
-        </p:spPr>
-        <p:txBody>
-          <a:bodyPr wrap="square" rtlCol="0" anchor="ctr"/>
-          <a:lstStyle/>
-          <a:p>
-            <a:pPr marL="0" indent="0" algn="ctr">
-              <a:buNone/>
-            </a:pPr>
-            <a:r>
-              <a:rPr lang="en-US" sz="1000" dirty="0">
-                <a:solidFill>
-                  <a:srgbClr val="FFFFFF"/>
-                </a:solidFill>
-                <a:latin typeface="Calibri" pitchFamily="34" charset="0"/>
-                <a:ea typeface="Calibri" pitchFamily="34" charset="-122"/>
-                <a:cs typeface="Calibri" pitchFamily="34" charset="-120"/>
-              </a:rPr>
-              <a:t>CSL505 Cryptography  ·  IIT Bhilai  ·  Winter 2026</a:t>
-            </a:r>
-            <a:endParaRPr lang="en-US" sz="1000" dirty="0"/>
-          </a:p>
-        </p:txBody>
-      </p:sp>
-      <p:sp>
-        <p:nvSpPr>
-          <p:cNvPr id="4" name="Shape 2"/>
-          <p:cNvSpPr/>
-          <p:nvPr/>
-        </p:nvSpPr>
-        <p:spPr>
-          <a:xfrm>
-            <a:off x="0" y="0"/>
-            <a:ext cx="9144000" cy="54864"/>
-          </a:xfrm>
-          <a:prstGeom prst="rect">
-            <a:avLst/>
-          </a:prstGeom>
-          <a:solidFill>
-            <a:srgbClr val="00C8FF"/>
-          </a:solidFill>
-          <a:ln w="12700">
-            <a:solidFill>
-              <a:srgbClr val="00C8FF"/>
-            </a:solidFill>
-            <a:prstDash val="solid"/>
-          </a:ln>
-        </p:spPr>
-      </p:sp>
-      <p:sp>
-        <p:nvSpPr>
-          <p:cNvPr id="5" name="Text 3"/>
-          <p:cNvSpPr/>
-          <p:nvPr/>
-        </p:nvSpPr>
-        <p:spPr>
-          <a:xfrm>
-            <a:off x="457200" y="164592"/>
-            <a:ext cx="8229600" cy="292608"/>
-          </a:xfrm>
-          <a:prstGeom prst="rect">
-            <a:avLst/>
-          </a:prstGeom>
-          <a:noFill/>
-          <a:ln/>
-        </p:spPr>
-        <p:txBody>
-          <a:bodyPr wrap="square" rtlCol="0" anchor="ctr"/>
-          <a:lstStyle/>
-          <a:p>
-            <a:pPr marL="0" indent="0">
-              <a:buNone/>
-            </a:pPr>
-            <a:r>
-              <a:rPr lang="en-US" sz="1000" b="1" kern="0" spc="300" dirty="0">
-                <a:solidFill>
-                  <a:srgbClr val="00C8FF"/>
-                </a:solidFill>
-                <a:latin typeface="Calibri" pitchFamily="34" charset="0"/>
-                <a:ea typeface="Calibri" pitchFamily="34" charset="-122"/>
-                <a:cs typeface="Calibri" pitchFamily="34" charset="-120"/>
-              </a:rPr>
-              <a:t>CONCLUSION</a:t>
-            </a:r>
-            <a:endParaRPr lang="en-US" sz="1000" dirty="0"/>
-          </a:p>
-        </p:txBody>
-      </p:sp>
-      <p:sp>
-        <p:nvSpPr>
-          <p:cNvPr id="6" name="Text 4"/>
-          <p:cNvSpPr/>
-          <p:nvPr/>
-        </p:nvSpPr>
-        <p:spPr>
-          <a:xfrm>
-            <a:off x="457200" y="475488"/>
-            <a:ext cx="8229600" cy="502920"/>
-          </a:xfrm>
-          <a:prstGeom prst="rect">
-            <a:avLst/>
-          </a:prstGeom>
-          <a:noFill/>
-          <a:ln/>
-        </p:spPr>
-        <p:txBody>
-          <a:bodyPr wrap="square" rtlCol="0" anchor="ctr"/>
-          <a:lstStyle/>
-          <a:p>
-            <a:pPr marL="0" indent="0">
-              <a:buNone/>
-            </a:pPr>
-            <a:r>
-              <a:rPr lang="en-US" sz="3000" b="1" dirty="0">
-                <a:solidFill>
-                  <a:srgbClr val="FFFFFF"/>
-                </a:solidFill>
-                <a:latin typeface="Georgia" pitchFamily="34" charset="0"/>
-                <a:ea typeface="Georgia" pitchFamily="34" charset="-122"/>
-                <a:cs typeface="Georgia" pitchFamily="34" charset="-120"/>
-              </a:rPr>
-              <a:t>Summary &amp; Takeaways</a:t>
-            </a:r>
-            <a:endParaRPr lang="en-US" sz="3000" dirty="0"/>
-          </a:p>
-        </p:txBody>
-      </p:sp>
-      <p:sp>
-        <p:nvSpPr>
-          <p:cNvPr id="7" name="Text 5"/>
-          <p:cNvSpPr/>
-          <p:nvPr/>
-        </p:nvSpPr>
-        <p:spPr>
-          <a:xfrm>
-            <a:off x="365760" y="1143000"/>
-            <a:ext cx="457200" cy="457200"/>
-          </a:xfrm>
-          <a:prstGeom prst="rect">
-            <a:avLst/>
-          </a:prstGeom>
-          <a:noFill/>
-          <a:ln/>
-        </p:spPr>
-        <p:txBody>
-          <a:bodyPr wrap="square" rtlCol="0" anchor="ctr"/>
-          <a:lstStyle/>
-          <a:p>
-            <a:pPr marL="0" indent="0" algn="ctr">
-              <a:buNone/>
-            </a:pPr>
-            <a:r>
-              <a:rPr lang="en-US" sz="1600" dirty="0">
-                <a:solidFill>
-                  <a:srgbClr val="000000"/>
-                </a:solidFill>
-              </a:rPr>
-              <a:t>✅</a:t>
-            </a:r>
-            <a:endParaRPr lang="en-US" sz="1600" dirty="0"/>
-          </a:p>
-        </p:txBody>
-      </p:sp>
-      <p:sp>
-        <p:nvSpPr>
-          <p:cNvPr id="8" name="Text 6"/>
-          <p:cNvSpPr/>
-          <p:nvPr/>
-        </p:nvSpPr>
-        <p:spPr>
-          <a:xfrm>
-            <a:off x="914400" y="1161288"/>
-            <a:ext cx="7772400" cy="457200"/>
-          </a:xfrm>
-          <a:prstGeom prst="rect">
-            <a:avLst/>
-          </a:prstGeom>
-          <a:noFill/>
-          <a:ln/>
-        </p:spPr>
-        <p:txBody>
-          <a:bodyPr wrap="square" rtlCol="0" anchor="ctr"/>
-          <a:lstStyle/>
-          <a:p>
-            <a:pPr marL="0" indent="0">
-              <a:buNone/>
-            </a:pPr>
-            <a:r>
-              <a:rPr lang="en-US" sz="1200" dirty="0">
-                <a:solidFill>
-                  <a:srgbClr val="B0C4E0"/>
-                </a:solidFill>
-                <a:latin typeface="Calibri" pitchFamily="34" charset="0"/>
-                <a:ea typeface="Calibri" pitchFamily="34" charset="-122"/>
-                <a:cs typeface="Calibri" pitchFamily="34" charset="-120"/>
-              </a:rPr>
-              <a:t>Complete MANTISᵣ specification: S-box, PermuteCells, MixColumns, tweak schedule, FX-construction key schedule.</a:t>
-            </a:r>
-            <a:endParaRPr lang="en-US" sz="1200" dirty="0"/>
-          </a:p>
-        </p:txBody>
-      </p:sp>
-      <p:sp>
-        <p:nvSpPr>
-          <p:cNvPr id="9" name="Text 7"/>
-          <p:cNvSpPr/>
-          <p:nvPr/>
-        </p:nvSpPr>
-        <p:spPr>
-          <a:xfrm>
-            <a:off x="365760" y="1709928"/>
-            <a:ext cx="457200" cy="457200"/>
-          </a:xfrm>
-          <a:prstGeom prst="rect">
-            <a:avLst/>
-          </a:prstGeom>
-          <a:noFill/>
-          <a:ln/>
-        </p:spPr>
-        <p:txBody>
-          <a:bodyPr wrap="square" rtlCol="0" anchor="ctr"/>
-          <a:lstStyle/>
-          <a:p>
-            <a:pPr marL="0" indent="0" algn="ctr">
-              <a:buNone/>
-            </a:pPr>
-            <a:r>
-              <a:rPr lang="en-US" sz="1600" dirty="0">
-                <a:solidFill>
-                  <a:srgbClr val="000000"/>
-                </a:solidFill>
-              </a:rPr>
-              <a:t>✅</a:t>
-            </a:r>
-            <a:endParaRPr lang="en-US" sz="1600" dirty="0"/>
-          </a:p>
-        </p:txBody>
-      </p:sp>
-      <p:sp>
-        <p:nvSpPr>
-          <p:cNvPr id="10" name="Text 8"/>
-          <p:cNvSpPr/>
-          <p:nvPr/>
-        </p:nvSpPr>
-        <p:spPr>
-          <a:xfrm>
-            <a:off x="914400" y="1728216"/>
-            <a:ext cx="7772400" cy="457200"/>
-          </a:xfrm>
-          <a:prstGeom prst="rect">
-            <a:avLst/>
-          </a:prstGeom>
-          <a:noFill/>
-          <a:ln/>
-        </p:spPr>
-        <p:txBody>
-          <a:bodyPr wrap="square" rtlCol="0" anchor="ctr"/>
-          <a:lstStyle/>
-          <a:p>
-            <a:pPr marL="0" indent="0">
-              <a:buNone/>
-            </a:pPr>
-            <a:r>
-              <a:rPr lang="en-US" sz="1200" dirty="0">
-                <a:solidFill>
-                  <a:srgbClr val="B0C4E0"/>
-                </a:solidFill>
-                <a:latin typeface="Calibri" pitchFamily="34" charset="0"/>
-                <a:ea typeface="Calibri" pitchFamily="34" charset="-122"/>
-                <a:cs typeface="Calibri" pitchFamily="34" charset="-120"/>
-              </a:rPr>
-              <a:t>Worked example for MANTIS5 verified against official test vectors [BJK+16]; MANTIS6–8 also confirmed.</a:t>
-            </a:r>
-            <a:endParaRPr lang="en-US" sz="1200" dirty="0"/>
-          </a:p>
-        </p:txBody>
-      </p:sp>
-      <p:sp>
-        <p:nvSpPr>
-          <p:cNvPr id="11" name="Text 9"/>
-          <p:cNvSpPr/>
-          <p:nvPr/>
-        </p:nvSpPr>
-        <p:spPr>
-          <a:xfrm>
-            <a:off x="365760" y="2276856"/>
-            <a:ext cx="457200" cy="457200"/>
-          </a:xfrm>
-          <a:prstGeom prst="rect">
-            <a:avLst/>
-          </a:prstGeom>
-          <a:noFill/>
-          <a:ln/>
-        </p:spPr>
-        <p:txBody>
-          <a:bodyPr wrap="square" rtlCol="0" anchor="ctr"/>
-          <a:lstStyle/>
-          <a:p>
-            <a:pPr marL="0" indent="0" algn="ctr">
-              <a:buNone/>
-            </a:pPr>
-            <a:r>
-              <a:rPr lang="en-US" sz="1600" dirty="0">
-                <a:solidFill>
-                  <a:srgbClr val="000000"/>
-                </a:solidFill>
-              </a:rPr>
-              <a:t>✅</a:t>
-            </a:r>
-            <a:endParaRPr lang="en-US" sz="1600" dirty="0"/>
-          </a:p>
-        </p:txBody>
-      </p:sp>
-      <p:sp>
-        <p:nvSpPr>
-          <p:cNvPr id="12" name="Text 10"/>
-          <p:cNvSpPr/>
-          <p:nvPr/>
-        </p:nvSpPr>
-        <p:spPr>
-          <a:xfrm>
-            <a:off x="914400" y="2295144"/>
-            <a:ext cx="7772400" cy="457200"/>
-          </a:xfrm>
-          <a:prstGeom prst="rect">
-            <a:avLst/>
-          </a:prstGeom>
-          <a:noFill/>
-          <a:ln/>
-        </p:spPr>
-        <p:txBody>
-          <a:bodyPr wrap="square" rtlCol="0" anchor="ctr"/>
-          <a:lstStyle/>
-          <a:p>
-            <a:pPr marL="0" indent="0">
-              <a:buNone/>
-            </a:pPr>
-            <a:r>
-              <a:rPr lang="en-US" sz="1200" dirty="0">
-                <a:solidFill>
-                  <a:srgbClr val="B0C4E0"/>
-                </a:solidFill>
-                <a:latin typeface="Calibri" pitchFamily="34" charset="0"/>
-                <a:ea typeface="Calibri" pitchFamily="34" charset="-122"/>
-                <a:cs typeface="Calibri" pitchFamily="34" charset="-120"/>
-              </a:rPr>
-              <a:t>Differential analysis: DDT, active S-boxes (orig 204 vs novel 213), avalanche ~32 bits, trail prob ≤ 2⁻⁴²⁶ (novel).</a:t>
-            </a:r>
-            <a:endParaRPr lang="en-US" sz="1200" dirty="0"/>
-          </a:p>
-        </p:txBody>
-      </p:sp>
-      <p:sp>
-        <p:nvSpPr>
-          <p:cNvPr id="13" name="Text 11"/>
-          <p:cNvSpPr/>
-          <p:nvPr/>
-        </p:nvSpPr>
-        <p:spPr>
-          <a:xfrm>
-            <a:off x="365760" y="2843784"/>
-            <a:ext cx="457200" cy="457200"/>
-          </a:xfrm>
-          <a:prstGeom prst="rect">
-            <a:avLst/>
-          </a:prstGeom>
-          <a:noFill/>
-          <a:ln/>
-        </p:spPr>
-        <p:txBody>
-          <a:bodyPr wrap="square" rtlCol="0" anchor="ctr"/>
-          <a:lstStyle/>
-          <a:p>
-            <a:pPr marL="0" indent="0" algn="ctr">
-              <a:buNone/>
-            </a:pPr>
-            <a:r>
-              <a:rPr lang="en-US" sz="1600" dirty="0">
-                <a:solidFill>
-                  <a:srgbClr val="000000"/>
-                </a:solidFill>
-              </a:rPr>
-              <a:t>✅</a:t>
-            </a:r>
-            <a:endParaRPr lang="en-US" sz="1600" dirty="0"/>
-          </a:p>
-        </p:txBody>
-      </p:sp>
-      <p:sp>
-        <p:nvSpPr>
-          <p:cNvPr id="14" name="Text 12"/>
-          <p:cNvSpPr/>
-          <p:nvPr/>
-        </p:nvSpPr>
-        <p:spPr>
-          <a:xfrm>
-            <a:off x="914400" y="2862072"/>
-            <a:ext cx="7772400" cy="457200"/>
-          </a:xfrm>
-          <a:prstGeom prst="rect">
-            <a:avLst/>
-          </a:prstGeom>
-          <a:noFill/>
-          <a:ln/>
-        </p:spPr>
-        <p:txBody>
-          <a:bodyPr wrap="square" rtlCol="0" anchor="ctr"/>
-          <a:lstStyle/>
-          <a:p>
-            <a:pPr marL="0" indent="0">
-              <a:buNone/>
-            </a:pPr>
-            <a:r>
-              <a:rPr lang="en-US" sz="1200" dirty="0">
-                <a:solidFill>
-                  <a:srgbClr val="B0C4E0"/>
-                </a:solidFill>
-                <a:latin typeface="Calibri" pitchFamily="34" charset="0"/>
-                <a:ea typeface="Calibri" pitchFamily="34" charset="-122"/>
-                <a:cs typeface="Calibri" pitchFamily="34" charset="-120"/>
-              </a:rPr>
-              <a:t>Integral distinguisher (2⁶ data, 2¹⁹·⁷ time, 2¹⁰ memory) on 5-round MANTIS. 3 structural weaknesses noted.</a:t>
-            </a:r>
-            <a:endParaRPr lang="en-US" sz="1200" dirty="0"/>
-          </a:p>
-        </p:txBody>
-      </p:sp>
-      <p:sp>
-        <p:nvSpPr>
-          <p:cNvPr id="15" name="Shape 13"/>
-          <p:cNvSpPr/>
-          <p:nvPr/>
-        </p:nvSpPr>
-        <p:spPr>
-          <a:xfrm>
-            <a:off x="365760" y="3374136"/>
-            <a:ext cx="8412480" cy="566928"/>
-          </a:xfrm>
-          <a:prstGeom prst="rect">
-            <a:avLst/>
-          </a:prstGeom>
-          <a:solidFill>
-            <a:srgbClr val="FFD166">
-              <a:alpha val="12000"/>
-            </a:srgbClr>
-          </a:solidFill>
-          <a:ln w="12700">
-            <a:solidFill>
-              <a:srgbClr val="FFD166"/>
-            </a:solidFill>
-            <a:prstDash val="solid"/>
-          </a:ln>
-        </p:spPr>
-      </p:sp>
-      <p:sp>
-        <p:nvSpPr>
-          <p:cNvPr id="16" name="Text 14"/>
-          <p:cNvSpPr/>
-          <p:nvPr/>
-        </p:nvSpPr>
-        <p:spPr>
-          <a:xfrm>
-            <a:off x="365760" y="3410712"/>
-            <a:ext cx="457200" cy="457200"/>
-          </a:xfrm>
-          <a:prstGeom prst="rect">
-            <a:avLst/>
-          </a:prstGeom>
-          <a:noFill/>
-          <a:ln/>
-        </p:spPr>
-        <p:txBody>
-          <a:bodyPr wrap="square" rtlCol="0" anchor="ctr"/>
-          <a:lstStyle/>
-          <a:p>
-            <a:pPr marL="0" indent="0" algn="ctr">
-              <a:buNone/>
-            </a:pPr>
-            <a:r>
-              <a:rPr lang="en-US" sz="1600" dirty="0">
-                <a:solidFill>
-                  <a:srgbClr val="000000"/>
-                </a:solidFill>
-              </a:rPr>
-              <a:t>⭐</a:t>
-            </a:r>
-            <a:endParaRPr lang="en-US" sz="1600" dirty="0"/>
-          </a:p>
-        </p:txBody>
-      </p:sp>
-      <p:sp>
-        <p:nvSpPr>
-          <p:cNvPr id="17" name="Text 15"/>
-          <p:cNvSpPr/>
-          <p:nvPr/>
-        </p:nvSpPr>
-        <p:spPr>
-          <a:xfrm>
-            <a:off x="914400" y="3429000"/>
-            <a:ext cx="7772400" cy="457200"/>
-          </a:xfrm>
-          <a:prstGeom prst="rect">
-            <a:avLst/>
-          </a:prstGeom>
-          <a:noFill/>
-          <a:ln/>
-        </p:spPr>
-        <p:txBody>
-          <a:bodyPr wrap="square" rtlCol="0" anchor="ctr"/>
-          <a:lstStyle/>
-          <a:p>
-            <a:pPr marL="0" indent="0">
-              <a:buNone/>
-            </a:pPr>
-            <a:r>
-              <a:rPr lang="en-US" sz="1200" dirty="0">
-                <a:solidFill>
-                  <a:srgbClr val="FFD166"/>
-                </a:solidFill>
-                <a:latin typeface="Calibri" pitchFamily="34" charset="0"/>
-                <a:ea typeface="Calibri" pitchFamily="34" charset="-122"/>
-                <a:cs typeface="Calibri" pitchFamily="34" charset="-120"/>
-              </a:rPr>
-              <a:t>Novel variant: LFSR-seeded constants + rotation sub-keys + arbitrary r ≥ 1 · Cipher Explorer deployed at vercel.app</a:t>
-            </a:r>
-            <a:endParaRPr lang="en-US" sz="1200" dirty="0"/>
-          </a:p>
-        </p:txBody>
-      </p:sp>
-      <p:sp>
-        <p:nvSpPr>
-          <p:cNvPr id="18" name="Text 16"/>
-          <p:cNvSpPr/>
-          <p:nvPr/>
-        </p:nvSpPr>
-        <p:spPr>
-          <a:xfrm>
-            <a:off x="365760" y="3977640"/>
-            <a:ext cx="457200" cy="457200"/>
-          </a:xfrm>
-          <a:prstGeom prst="rect">
-            <a:avLst/>
-          </a:prstGeom>
-          <a:noFill/>
-          <a:ln/>
-        </p:spPr>
-        <p:txBody>
-          <a:bodyPr wrap="square" rtlCol="0" anchor="ctr"/>
-          <a:lstStyle/>
-          <a:p>
-            <a:pPr marL="0" indent="0" algn="ctr">
-              <a:buNone/>
-            </a:pPr>
-            <a:r>
-              <a:rPr lang="en-US" sz="1600" dirty="0">
-                <a:solidFill>
-                  <a:srgbClr val="000000"/>
-                </a:solidFill>
-              </a:rPr>
-              <a:t>🌐</a:t>
-            </a:r>
-            <a:endParaRPr lang="en-US" sz="1600" dirty="0"/>
-          </a:p>
-        </p:txBody>
-      </p:sp>
-      <p:sp>
-        <p:nvSpPr>
-          <p:cNvPr id="19" name="Text 17"/>
-          <p:cNvSpPr/>
-          <p:nvPr/>
-        </p:nvSpPr>
-        <p:spPr>
-          <a:xfrm>
-            <a:off x="914400" y="3995928"/>
-            <a:ext cx="7772400" cy="457200"/>
-          </a:xfrm>
-          <a:prstGeom prst="rect">
-            <a:avLst/>
-          </a:prstGeom>
-          <a:noFill/>
-          <a:ln/>
-        </p:spPr>
-        <p:txBody>
-          <a:bodyPr wrap="square" rtlCol="0" anchor="ctr"/>
-          <a:lstStyle/>
-          <a:p>
-            <a:pPr marL="0" indent="0">
-              <a:buNone/>
-            </a:pPr>
-            <a:r>
-              <a:rPr lang="en-US" sz="1200" dirty="0">
-                <a:solidFill>
-                  <a:srgbClr val="B0C4E0"/>
-                </a:solidFill>
-                <a:latin typeface="Calibri" pitchFamily="34" charset="0"/>
-                <a:ea typeface="Calibri" pitchFamily="34" charset="-122"/>
-                <a:cs typeface="Calibri" pitchFamily="34" charset="-120"/>
-              </a:rPr>
-              <a:t>MANTIS = best balance of latency, area, and tweakability for active-processor memory encryption.</a:t>
-            </a:r>
-            <a:endParaRPr lang="en-US" sz="1200" dirty="0"/>
-          </a:p>
-        </p:txBody>
-      </p:sp>
-    </p:spTree>
-  </p:cSld>
-  <p:clrMapOvr>
-    <a:masterClrMapping/>
-  </p:clrMapOvr>
-</p:sld>
-</file>
-
 <file path=ppt/slides/slide2.xml><?xml version="1.0" encoding="utf-8"?>
 <p:sld xmlns:a="http://schemas.openxmlformats.org/drawingml/2006/main" xmlns:r="http://schemas.openxmlformats.org/officeDocument/2006/relationships" xmlns:p="http://schemas.openxmlformats.org/presentationml/2006/main">
   <p:cSld name="Slide 2">
@@ -23206,6 +21618,1951 @@
               <a:t>MANTIS proposed by Beierle et al. at CRYPTO 2016 as part of the SKINNY cipher family [BJK+16]</a:t>
             </a:r>
             <a:endParaRPr lang="en-US" sz="900" dirty="0"/>
+          </a:p>
+        </p:txBody>
+      </p:sp>
+    </p:spTree>
+  </p:cSld>
+  <p:clrMapOvr>
+    <a:masterClrMapping/>
+  </p:clrMapOvr>
+</p:sld>
+</file>
+
+<file path=ppt/slides/slide20.xml><?xml version="1.0" encoding="utf-8"?>
+<p:sld xmlns:a="http://schemas.openxmlformats.org/drawingml/2006/main" xmlns:r="http://schemas.openxmlformats.org/officeDocument/2006/relationships" xmlns:p="http://schemas.openxmlformats.org/presentationml/2006/main">
+  <p:cSld name="Slide 17">
+    <p:bg>
+      <p:bgPr>
+        <a:solidFill>
+          <a:srgbClr val="FFFFFF"/>
+        </a:solidFill>
+        <a:effectLst/>
+      </p:bgPr>
+    </p:bg>
+    <p:spTree>
+      <p:nvGrpSpPr>
+        <p:cNvPr id="1" name=""/>
+        <p:cNvGrpSpPr/>
+        <p:nvPr/>
+      </p:nvGrpSpPr>
+      <p:grpSpPr>
+        <a:xfrm>
+          <a:off x="0" y="0"/>
+          <a:ext cx="0" cy="0"/>
+          <a:chOff x="0" y="0"/>
+          <a:chExt cx="0" cy="0"/>
+        </a:xfrm>
+      </p:grpSpPr>
+      <p:sp>
+        <p:nvSpPr>
+          <p:cNvPr id="2" name="Shape 0"/>
+          <p:cNvSpPr/>
+          <p:nvPr/>
+        </p:nvSpPr>
+        <p:spPr>
+          <a:xfrm>
+            <a:off x="0" y="0"/>
+            <a:ext cx="164592" cy="5143500"/>
+          </a:xfrm>
+          <a:prstGeom prst="rect">
+            <a:avLst/>
+          </a:prstGeom>
+          <a:solidFill>
+            <a:srgbClr val="0A0E1A"/>
+          </a:solidFill>
+          <a:ln w="12700">
+            <a:solidFill>
+              <a:srgbClr val="0A0E1A"/>
+            </a:solidFill>
+            <a:prstDash val="solid"/>
+          </a:ln>
+        </p:spPr>
+      </p:sp>
+      <p:sp>
+        <p:nvSpPr>
+          <p:cNvPr id="3" name="Shape 1"/>
+          <p:cNvSpPr/>
+          <p:nvPr/>
+        </p:nvSpPr>
+        <p:spPr>
+          <a:xfrm>
+            <a:off x="164592" y="0"/>
+            <a:ext cx="73152" cy="5143500"/>
+          </a:xfrm>
+          <a:prstGeom prst="rect">
+            <a:avLst/>
+          </a:prstGeom>
+          <a:solidFill>
+            <a:srgbClr val="00E676"/>
+          </a:solidFill>
+          <a:ln w="12700">
+            <a:solidFill>
+              <a:srgbClr val="00E676"/>
+            </a:solidFill>
+            <a:prstDash val="solid"/>
+          </a:ln>
+        </p:spPr>
+      </p:sp>
+      <p:sp>
+        <p:nvSpPr>
+          <p:cNvPr id="4" name="Text 2"/>
+          <p:cNvSpPr/>
+          <p:nvPr/>
+        </p:nvSpPr>
+        <p:spPr>
+          <a:xfrm>
+            <a:off x="411480" y="182880"/>
+            <a:ext cx="8229600" cy="292608"/>
+          </a:xfrm>
+          <a:prstGeom prst="rect">
+            <a:avLst/>
+          </a:prstGeom>
+          <a:noFill/>
+          <a:ln/>
+        </p:spPr>
+        <p:txBody>
+          <a:bodyPr wrap="square" rtlCol="0" anchor="ctr"/>
+          <a:lstStyle/>
+          <a:p>
+            <a:pPr marL="0" indent="0">
+              <a:buNone/>
+            </a:pPr>
+            <a:r>
+              <a:rPr lang="en-US" sz="1000" b="1" kern="0" spc="300" dirty="0">
+                <a:solidFill>
+                  <a:srgbClr val="009945"/>
+                </a:solidFill>
+                <a:latin typeface="Calibri" pitchFamily="34" charset="0"/>
+                <a:ea typeface="Calibri" pitchFamily="34" charset="-122"/>
+                <a:cs typeface="Calibri" pitchFamily="34" charset="-120"/>
+              </a:rPr>
+              <a:t>APPLICATIONS</a:t>
+            </a:r>
+            <a:endParaRPr lang="en-US" sz="1000" dirty="0"/>
+          </a:p>
+        </p:txBody>
+      </p:sp>
+      <p:sp>
+        <p:nvSpPr>
+          <p:cNvPr id="5" name="Text 3"/>
+          <p:cNvSpPr/>
+          <p:nvPr/>
+        </p:nvSpPr>
+        <p:spPr>
+          <a:xfrm>
+            <a:off x="411480" y="475488"/>
+            <a:ext cx="8229600" cy="457200"/>
+          </a:xfrm>
+          <a:prstGeom prst="rect">
+            <a:avLst/>
+          </a:prstGeom>
+          <a:noFill/>
+          <a:ln/>
+        </p:spPr>
+        <p:txBody>
+          <a:bodyPr wrap="square" rtlCol="0" anchor="ctr"/>
+          <a:lstStyle/>
+          <a:p>
+            <a:pPr marL="0" indent="0">
+              <a:buNone/>
+            </a:pPr>
+            <a:r>
+              <a:rPr lang="en-US" sz="2800" b="1" dirty="0">
+                <a:solidFill>
+                  <a:srgbClr val="1A1A2E"/>
+                </a:solidFill>
+                <a:latin typeface="Georgia" pitchFamily="34" charset="0"/>
+                <a:ea typeface="Georgia" pitchFamily="34" charset="-122"/>
+                <a:cs typeface="Georgia" pitchFamily="34" charset="-120"/>
+              </a:rPr>
+              <a:t>Where MANTIS Shines</a:t>
+            </a:r>
+            <a:endParaRPr lang="en-US" sz="2800" dirty="0"/>
+          </a:p>
+        </p:txBody>
+      </p:sp>
+      <p:sp>
+        <p:nvSpPr>
+          <p:cNvPr id="6" name="Shape 4"/>
+          <p:cNvSpPr/>
+          <p:nvPr/>
+        </p:nvSpPr>
+        <p:spPr>
+          <a:xfrm>
+            <a:off x="411480" y="1024128"/>
+            <a:ext cx="2743200" cy="3931920"/>
+          </a:xfrm>
+          <a:prstGeom prst="rect">
+            <a:avLst/>
+          </a:prstGeom>
+          <a:solidFill>
+            <a:srgbClr val="F4F7FB"/>
+          </a:solidFill>
+          <a:ln w="12700">
+            <a:solidFill>
+              <a:srgbClr val="D0D8E8"/>
+            </a:solidFill>
+            <a:prstDash val="solid"/>
+          </a:ln>
+          <a:effectLst>
+            <a:outerShdw blurRad="101600" dist="38100" dir="8100000" algn="bl" rotWithShape="0">
+              <a:srgbClr val="000000">
+                <a:alpha val="15000"/>
+              </a:srgbClr>
+            </a:outerShdw>
+          </a:effectLst>
+        </p:spPr>
+      </p:sp>
+      <p:sp>
+        <p:nvSpPr>
+          <p:cNvPr id="7" name="Shape 5"/>
+          <p:cNvSpPr/>
+          <p:nvPr/>
+        </p:nvSpPr>
+        <p:spPr>
+          <a:xfrm>
+            <a:off x="411480" y="1024128"/>
+            <a:ext cx="2743200" cy="54864"/>
+          </a:xfrm>
+          <a:prstGeom prst="rect">
+            <a:avLst/>
+          </a:prstGeom>
+          <a:solidFill>
+            <a:srgbClr val="00C8FF"/>
+          </a:solidFill>
+          <a:ln w="12700">
+            <a:solidFill>
+              <a:srgbClr val="00C8FF"/>
+            </a:solidFill>
+            <a:prstDash val="solid"/>
+          </a:ln>
+        </p:spPr>
+      </p:sp>
+      <p:sp>
+        <p:nvSpPr>
+          <p:cNvPr id="8" name="Text 6"/>
+          <p:cNvSpPr/>
+          <p:nvPr/>
+        </p:nvSpPr>
+        <p:spPr>
+          <a:xfrm>
+            <a:off x="411480" y="1115568"/>
+            <a:ext cx="2743200" cy="594360"/>
+          </a:xfrm>
+          <a:prstGeom prst="rect">
+            <a:avLst/>
+          </a:prstGeom>
+          <a:noFill/>
+          <a:ln/>
+        </p:spPr>
+        <p:txBody>
+          <a:bodyPr wrap="square" rtlCol="0" anchor="ctr"/>
+          <a:lstStyle/>
+          <a:p>
+            <a:pPr marL="0" indent="0" algn="ctr">
+              <a:buNone/>
+            </a:pPr>
+            <a:r>
+              <a:rPr lang="en-US" sz="2800" dirty="0">
+                <a:solidFill>
+                  <a:srgbClr val="000000"/>
+                </a:solidFill>
+              </a:rPr>
+              <a:t>🖥️</a:t>
+            </a:r>
+            <a:endParaRPr lang="en-US" sz="2800" dirty="0"/>
+          </a:p>
+        </p:txBody>
+      </p:sp>
+      <p:sp>
+        <p:nvSpPr>
+          <p:cNvPr id="9" name="Text 7"/>
+          <p:cNvSpPr/>
+          <p:nvPr/>
+        </p:nvSpPr>
+        <p:spPr>
+          <a:xfrm>
+            <a:off x="502920" y="1719072"/>
+            <a:ext cx="2560320" cy="384048"/>
+          </a:xfrm>
+          <a:prstGeom prst="rect">
+            <a:avLst/>
+          </a:prstGeom>
+          <a:noFill/>
+          <a:ln/>
+        </p:spPr>
+        <p:txBody>
+          <a:bodyPr wrap="square" rtlCol="0" anchor="ctr"/>
+          <a:lstStyle/>
+          <a:p>
+            <a:pPr marL="0" indent="0" algn="ctr">
+              <a:buNone/>
+            </a:pPr>
+            <a:r>
+              <a:rPr lang="en-US" sz="1300" b="1" dirty="0">
+                <a:solidFill>
+                  <a:srgbClr val="1A1A2E"/>
+                </a:solidFill>
+                <a:latin typeface="Calibri" pitchFamily="34" charset="0"/>
+                <a:ea typeface="Calibri" pitchFamily="34" charset="-122"/>
+                <a:cs typeface="Calibri" pitchFamily="34" charset="-120"/>
+              </a:rPr>
+              <a:t>Memory Encryption</a:t>
+            </a:r>
+            <a:endParaRPr lang="en-US" sz="1300" dirty="0"/>
+          </a:p>
+        </p:txBody>
+      </p:sp>
+      <p:sp>
+        <p:nvSpPr>
+          <p:cNvPr id="10" name="Text 8"/>
+          <p:cNvSpPr/>
+          <p:nvPr/>
+        </p:nvSpPr>
+        <p:spPr>
+          <a:xfrm>
+            <a:off x="502920" y="2148840"/>
+            <a:ext cx="2560320" cy="1645920"/>
+          </a:xfrm>
+          <a:prstGeom prst="rect">
+            <a:avLst/>
+          </a:prstGeom>
+          <a:noFill/>
+          <a:ln/>
+        </p:spPr>
+        <p:txBody>
+          <a:bodyPr wrap="square" rtlCol="0" anchor="ctr"/>
+          <a:lstStyle/>
+          <a:p>
+            <a:pPr marL="0" indent="0">
+              <a:buNone/>
+            </a:pPr>
+            <a:r>
+              <a:rPr lang="en-US" sz="1050" dirty="0">
+                <a:solidFill>
+                  <a:srgbClr val="444466"/>
+                </a:solidFill>
+                <a:latin typeface="Calibri" pitchFamily="34" charset="0"/>
+                <a:ea typeface="Calibri" pitchFamily="34" charset="-122"/>
+                <a:cs typeface="Calibri" pitchFamily="34" charset="-120"/>
+              </a:rPr>
+              <a:t>Primary use case — IBM SecureBlue++, Intel SGX. Every cache-line read/write encrypted on the critical path. Memory address serves as the tweak, providing natural sector isolation without IV management overhead.</a:t>
+            </a:r>
+            <a:endParaRPr lang="en-US" sz="1050" dirty="0"/>
+          </a:p>
+        </p:txBody>
+      </p:sp>
+      <p:sp>
+        <p:nvSpPr>
+          <p:cNvPr id="11" name="Shape 9"/>
+          <p:cNvSpPr/>
+          <p:nvPr/>
+        </p:nvSpPr>
+        <p:spPr>
+          <a:xfrm>
+            <a:off x="502920" y="3858768"/>
+            <a:ext cx="2560320" cy="292608"/>
+          </a:xfrm>
+          <a:prstGeom prst="rect">
+            <a:avLst/>
+          </a:prstGeom>
+          <a:solidFill>
+            <a:srgbClr val="00C8FF">
+              <a:alpha val="15000"/>
+            </a:srgbClr>
+          </a:solidFill>
+          <a:ln w="12700">
+            <a:solidFill>
+              <a:srgbClr val="00C8FF"/>
+            </a:solidFill>
+            <a:prstDash val="solid"/>
+          </a:ln>
+        </p:spPr>
+      </p:sp>
+      <p:sp>
+        <p:nvSpPr>
+          <p:cNvPr id="12" name="Text 10"/>
+          <p:cNvSpPr/>
+          <p:nvPr/>
+        </p:nvSpPr>
+        <p:spPr>
+          <a:xfrm>
+            <a:off x="548640" y="3858768"/>
+            <a:ext cx="2468880" cy="292608"/>
+          </a:xfrm>
+          <a:prstGeom prst="rect">
+            <a:avLst/>
+          </a:prstGeom>
+          <a:noFill/>
+          <a:ln/>
+        </p:spPr>
+        <p:txBody>
+          <a:bodyPr wrap="square" rtlCol="0" anchor="ctr"/>
+          <a:lstStyle/>
+          <a:p>
+            <a:pPr marL="0" indent="0">
+              <a:buNone/>
+            </a:pPr>
+            <a:r>
+              <a:rPr lang="en-US" sz="1000" dirty="0">
+                <a:solidFill>
+                  <a:srgbClr val="0A0E1A"/>
+                </a:solidFill>
+                <a:latin typeface="Calibri" pitchFamily="34" charset="0"/>
+                <a:ea typeface="Calibri" pitchFamily="34" charset="-122"/>
+                <a:cs typeface="Calibri" pitchFamily="34" charset="-120"/>
+              </a:rPr>
+              <a:t>✓  Single-cycle latency</a:t>
+            </a:r>
+            <a:endParaRPr lang="en-US" sz="1000" dirty="0"/>
+          </a:p>
+        </p:txBody>
+      </p:sp>
+      <p:sp>
+        <p:nvSpPr>
+          <p:cNvPr id="13" name="Shape 11"/>
+          <p:cNvSpPr/>
+          <p:nvPr/>
+        </p:nvSpPr>
+        <p:spPr>
+          <a:xfrm>
+            <a:off x="502920" y="4206240"/>
+            <a:ext cx="2560320" cy="292608"/>
+          </a:xfrm>
+          <a:prstGeom prst="rect">
+            <a:avLst/>
+          </a:prstGeom>
+          <a:solidFill>
+            <a:srgbClr val="00C8FF">
+              <a:alpha val="15000"/>
+            </a:srgbClr>
+          </a:solidFill>
+          <a:ln w="12700">
+            <a:solidFill>
+              <a:srgbClr val="00C8FF"/>
+            </a:solidFill>
+            <a:prstDash val="solid"/>
+          </a:ln>
+        </p:spPr>
+      </p:sp>
+      <p:sp>
+        <p:nvSpPr>
+          <p:cNvPr id="14" name="Text 12"/>
+          <p:cNvSpPr/>
+          <p:nvPr/>
+        </p:nvSpPr>
+        <p:spPr>
+          <a:xfrm>
+            <a:off x="548640" y="4206240"/>
+            <a:ext cx="2468880" cy="292608"/>
+          </a:xfrm>
+          <a:prstGeom prst="rect">
+            <a:avLst/>
+          </a:prstGeom>
+          <a:noFill/>
+          <a:ln/>
+        </p:spPr>
+        <p:txBody>
+          <a:bodyPr wrap="square" rtlCol="0" anchor="ctr"/>
+          <a:lstStyle/>
+          <a:p>
+            <a:pPr marL="0" indent="0">
+              <a:buNone/>
+            </a:pPr>
+            <a:r>
+              <a:rPr lang="en-US" sz="1000" dirty="0">
+                <a:solidFill>
+                  <a:srgbClr val="0A0E1A"/>
+                </a:solidFill>
+                <a:latin typeface="Calibri" pitchFamily="34" charset="0"/>
+                <a:ea typeface="Calibri" pitchFamily="34" charset="-122"/>
+                <a:cs typeface="Calibri" pitchFamily="34" charset="-120"/>
+              </a:rPr>
+              <a:t>✓  Zero decrypt overhead</a:t>
+            </a:r>
+            <a:endParaRPr lang="en-US" sz="1000" dirty="0"/>
+          </a:p>
+        </p:txBody>
+      </p:sp>
+      <p:sp>
+        <p:nvSpPr>
+          <p:cNvPr id="15" name="Shape 13"/>
+          <p:cNvSpPr/>
+          <p:nvPr/>
+        </p:nvSpPr>
+        <p:spPr>
+          <a:xfrm>
+            <a:off x="502920" y="4553712"/>
+            <a:ext cx="2560320" cy="292608"/>
+          </a:xfrm>
+          <a:prstGeom prst="rect">
+            <a:avLst/>
+          </a:prstGeom>
+          <a:solidFill>
+            <a:srgbClr val="00C8FF">
+              <a:alpha val="15000"/>
+            </a:srgbClr>
+          </a:solidFill>
+          <a:ln w="12700">
+            <a:solidFill>
+              <a:srgbClr val="00C8FF"/>
+            </a:solidFill>
+            <a:prstDash val="solid"/>
+          </a:ln>
+        </p:spPr>
+      </p:sp>
+      <p:sp>
+        <p:nvSpPr>
+          <p:cNvPr id="16" name="Text 14"/>
+          <p:cNvSpPr/>
+          <p:nvPr/>
+        </p:nvSpPr>
+        <p:spPr>
+          <a:xfrm>
+            <a:off x="548640" y="4553712"/>
+            <a:ext cx="2468880" cy="292608"/>
+          </a:xfrm>
+          <a:prstGeom prst="rect">
+            <a:avLst/>
+          </a:prstGeom>
+          <a:noFill/>
+          <a:ln/>
+        </p:spPr>
+        <p:txBody>
+          <a:bodyPr wrap="square" rtlCol="0" anchor="ctr"/>
+          <a:lstStyle/>
+          <a:p>
+            <a:pPr marL="0" indent="0">
+              <a:buNone/>
+            </a:pPr>
+            <a:r>
+              <a:rPr lang="en-US" sz="1000" dirty="0">
+                <a:solidFill>
+                  <a:srgbClr val="0A0E1A"/>
+                </a:solidFill>
+                <a:latin typeface="Calibri" pitchFamily="34" charset="0"/>
+                <a:ea typeface="Calibri" pitchFamily="34" charset="-122"/>
+                <a:cs typeface="Calibri" pitchFamily="34" charset="-120"/>
+              </a:rPr>
+              <a:t>✓  Tweak = memory address</a:t>
+            </a:r>
+            <a:endParaRPr lang="en-US" sz="1000" dirty="0"/>
+          </a:p>
+        </p:txBody>
+      </p:sp>
+      <p:sp>
+        <p:nvSpPr>
+          <p:cNvPr id="17" name="Shape 15"/>
+          <p:cNvSpPr/>
+          <p:nvPr/>
+        </p:nvSpPr>
+        <p:spPr>
+          <a:xfrm>
+            <a:off x="3319272" y="1024128"/>
+            <a:ext cx="2743200" cy="3931920"/>
+          </a:xfrm>
+          <a:prstGeom prst="rect">
+            <a:avLst/>
+          </a:prstGeom>
+          <a:solidFill>
+            <a:srgbClr val="F4F7FB"/>
+          </a:solidFill>
+          <a:ln w="12700">
+            <a:solidFill>
+              <a:srgbClr val="D0D8E8"/>
+            </a:solidFill>
+            <a:prstDash val="solid"/>
+          </a:ln>
+          <a:effectLst>
+            <a:outerShdw blurRad="101600" dist="38100" dir="8100000" algn="bl" rotWithShape="0">
+              <a:srgbClr val="000000">
+                <a:alpha val="15000"/>
+              </a:srgbClr>
+            </a:outerShdw>
+          </a:effectLst>
+        </p:spPr>
+      </p:sp>
+      <p:sp>
+        <p:nvSpPr>
+          <p:cNvPr id="18" name="Shape 16"/>
+          <p:cNvSpPr/>
+          <p:nvPr/>
+        </p:nvSpPr>
+        <p:spPr>
+          <a:xfrm>
+            <a:off x="3319272" y="1024128"/>
+            <a:ext cx="2743200" cy="54864"/>
+          </a:xfrm>
+          <a:prstGeom prst="rect">
+            <a:avLst/>
+          </a:prstGeom>
+          <a:solidFill>
+            <a:srgbClr val="00E676"/>
+          </a:solidFill>
+          <a:ln w="12700">
+            <a:solidFill>
+              <a:srgbClr val="00E676"/>
+            </a:solidFill>
+            <a:prstDash val="solid"/>
+          </a:ln>
+        </p:spPr>
+      </p:sp>
+      <p:sp>
+        <p:nvSpPr>
+          <p:cNvPr id="19" name="Text 17"/>
+          <p:cNvSpPr/>
+          <p:nvPr/>
+        </p:nvSpPr>
+        <p:spPr>
+          <a:xfrm>
+            <a:off x="3319272" y="1115568"/>
+            <a:ext cx="2743200" cy="594360"/>
+          </a:xfrm>
+          <a:prstGeom prst="rect">
+            <a:avLst/>
+          </a:prstGeom>
+          <a:noFill/>
+          <a:ln/>
+        </p:spPr>
+        <p:txBody>
+          <a:bodyPr wrap="square" rtlCol="0" anchor="ctr"/>
+          <a:lstStyle/>
+          <a:p>
+            <a:pPr marL="0" indent="0" algn="ctr">
+              <a:buNone/>
+            </a:pPr>
+            <a:r>
+              <a:rPr lang="en-US" sz="2800" dirty="0">
+                <a:solidFill>
+                  <a:srgbClr val="000000"/>
+                </a:solidFill>
+              </a:rPr>
+              <a:t>📡</a:t>
+            </a:r>
+            <a:endParaRPr lang="en-US" sz="2800" dirty="0"/>
+          </a:p>
+        </p:txBody>
+      </p:sp>
+      <p:sp>
+        <p:nvSpPr>
+          <p:cNvPr id="20" name="Text 18"/>
+          <p:cNvSpPr/>
+          <p:nvPr/>
+        </p:nvSpPr>
+        <p:spPr>
+          <a:xfrm>
+            <a:off x="3410712" y="1719072"/>
+            <a:ext cx="2560320" cy="384048"/>
+          </a:xfrm>
+          <a:prstGeom prst="rect">
+            <a:avLst/>
+          </a:prstGeom>
+          <a:noFill/>
+          <a:ln/>
+        </p:spPr>
+        <p:txBody>
+          <a:bodyPr wrap="square" rtlCol="0" anchor="ctr"/>
+          <a:lstStyle/>
+          <a:p>
+            <a:pPr marL="0" indent="0" algn="ctr">
+              <a:buNone/>
+            </a:pPr>
+            <a:r>
+              <a:rPr lang="en-US" sz="1300" b="1" dirty="0">
+                <a:solidFill>
+                  <a:srgbClr val="1A1A2E"/>
+                </a:solidFill>
+                <a:latin typeface="Calibri" pitchFamily="34" charset="0"/>
+                <a:ea typeface="Calibri" pitchFamily="34" charset="-122"/>
+                <a:cs typeface="Calibri" pitchFamily="34" charset="-120"/>
+              </a:rPr>
+              <a:t>IoT &amp; Embedded Systems</a:t>
+            </a:r>
+            <a:endParaRPr lang="en-US" sz="1300" dirty="0"/>
+          </a:p>
+        </p:txBody>
+      </p:sp>
+      <p:sp>
+        <p:nvSpPr>
+          <p:cNvPr id="21" name="Text 19"/>
+          <p:cNvSpPr/>
+          <p:nvPr/>
+        </p:nvSpPr>
+        <p:spPr>
+          <a:xfrm>
+            <a:off x="3410712" y="2148840"/>
+            <a:ext cx="2560320" cy="1645920"/>
+          </a:xfrm>
+          <a:prstGeom prst="rect">
+            <a:avLst/>
+          </a:prstGeom>
+          <a:noFill/>
+          <a:ln/>
+        </p:spPr>
+        <p:txBody>
+          <a:bodyPr wrap="square" rtlCol="0" anchor="ctr"/>
+          <a:lstStyle/>
+          <a:p>
+            <a:pPr marL="0" indent="0">
+              <a:buNone/>
+            </a:pPr>
+            <a:r>
+              <a:rPr lang="en-US" sz="1050" dirty="0">
+                <a:solidFill>
+                  <a:srgbClr val="444466"/>
+                </a:solidFill>
+                <a:latin typeface="Calibri" pitchFamily="34" charset="0"/>
+                <a:ea typeface="Calibri" pitchFamily="34" charset="-122"/>
+                <a:cs typeface="Calibri" pitchFamily="34" charset="-120"/>
+              </a:rPr>
+              <a:t>MANTIS5 requires only 8,544 GE at 15.95 ns (UMC 180 nm). Marginal area over PRINCE while gaining a full tweak input. Ideal for sensor-address binding in embedded deployments.</a:t>
+            </a:r>
+            <a:endParaRPr lang="en-US" sz="1050" dirty="0"/>
+          </a:p>
+        </p:txBody>
+      </p:sp>
+      <p:sp>
+        <p:nvSpPr>
+          <p:cNvPr id="22" name="Shape 20"/>
+          <p:cNvSpPr/>
+          <p:nvPr/>
+        </p:nvSpPr>
+        <p:spPr>
+          <a:xfrm>
+            <a:off x="3410712" y="3858768"/>
+            <a:ext cx="2560320" cy="292608"/>
+          </a:xfrm>
+          <a:prstGeom prst="rect">
+            <a:avLst/>
+          </a:prstGeom>
+          <a:solidFill>
+            <a:srgbClr val="00E676">
+              <a:alpha val="15000"/>
+            </a:srgbClr>
+          </a:solidFill>
+          <a:ln w="12700">
+            <a:solidFill>
+              <a:srgbClr val="00E676"/>
+            </a:solidFill>
+            <a:prstDash val="solid"/>
+          </a:ln>
+        </p:spPr>
+      </p:sp>
+      <p:sp>
+        <p:nvSpPr>
+          <p:cNvPr id="23" name="Text 21"/>
+          <p:cNvSpPr/>
+          <p:nvPr/>
+        </p:nvSpPr>
+        <p:spPr>
+          <a:xfrm>
+            <a:off x="3456432" y="3858768"/>
+            <a:ext cx="2468880" cy="292608"/>
+          </a:xfrm>
+          <a:prstGeom prst="rect">
+            <a:avLst/>
+          </a:prstGeom>
+          <a:noFill/>
+          <a:ln/>
+        </p:spPr>
+        <p:txBody>
+          <a:bodyPr wrap="square" rtlCol="0" anchor="ctr"/>
+          <a:lstStyle/>
+          <a:p>
+            <a:pPr marL="0" indent="0">
+              <a:buNone/>
+            </a:pPr>
+            <a:r>
+              <a:rPr lang="en-US" sz="1000" dirty="0">
+                <a:solidFill>
+                  <a:srgbClr val="0A0E1A"/>
+                </a:solidFill>
+                <a:latin typeface="Calibri" pitchFamily="34" charset="0"/>
+                <a:ea typeface="Calibri" pitchFamily="34" charset="-122"/>
+                <a:cs typeface="Calibri" pitchFamily="34" charset="-120"/>
+              </a:rPr>
+              <a:t>✓  8,544 GE gate count</a:t>
+            </a:r>
+            <a:endParaRPr lang="en-US" sz="1000" dirty="0"/>
+          </a:p>
+        </p:txBody>
+      </p:sp>
+      <p:sp>
+        <p:nvSpPr>
+          <p:cNvPr id="24" name="Shape 22"/>
+          <p:cNvSpPr/>
+          <p:nvPr/>
+        </p:nvSpPr>
+        <p:spPr>
+          <a:xfrm>
+            <a:off x="3410712" y="4206240"/>
+            <a:ext cx="2560320" cy="292608"/>
+          </a:xfrm>
+          <a:prstGeom prst="rect">
+            <a:avLst/>
+          </a:prstGeom>
+          <a:solidFill>
+            <a:srgbClr val="00E676">
+              <a:alpha val="15000"/>
+            </a:srgbClr>
+          </a:solidFill>
+          <a:ln w="12700">
+            <a:solidFill>
+              <a:srgbClr val="00E676"/>
+            </a:solidFill>
+            <a:prstDash val="solid"/>
+          </a:ln>
+        </p:spPr>
+      </p:sp>
+      <p:sp>
+        <p:nvSpPr>
+          <p:cNvPr id="25" name="Text 23"/>
+          <p:cNvSpPr/>
+          <p:nvPr/>
+        </p:nvSpPr>
+        <p:spPr>
+          <a:xfrm>
+            <a:off x="3456432" y="4206240"/>
+            <a:ext cx="2468880" cy="292608"/>
+          </a:xfrm>
+          <a:prstGeom prst="rect">
+            <a:avLst/>
+          </a:prstGeom>
+          <a:noFill/>
+          <a:ln/>
+        </p:spPr>
+        <p:txBody>
+          <a:bodyPr wrap="square" rtlCol="0" anchor="ctr"/>
+          <a:lstStyle/>
+          <a:p>
+            <a:pPr marL="0" indent="0">
+              <a:buNone/>
+            </a:pPr>
+            <a:r>
+              <a:rPr lang="en-US" sz="1000" dirty="0">
+                <a:solidFill>
+                  <a:srgbClr val="0A0E1A"/>
+                </a:solidFill>
+                <a:latin typeface="Calibri" pitchFamily="34" charset="0"/>
+                <a:ea typeface="Calibri" pitchFamily="34" charset="-122"/>
+                <a:cs typeface="Calibri" pitchFamily="34" charset="-120"/>
+              </a:rPr>
+              <a:t>✓  15.95 ns latency</a:t>
+            </a:r>
+            <a:endParaRPr lang="en-US" sz="1000" dirty="0"/>
+          </a:p>
+        </p:txBody>
+      </p:sp>
+      <p:sp>
+        <p:nvSpPr>
+          <p:cNvPr id="26" name="Shape 24"/>
+          <p:cNvSpPr/>
+          <p:nvPr/>
+        </p:nvSpPr>
+        <p:spPr>
+          <a:xfrm>
+            <a:off x="3410712" y="4553712"/>
+            <a:ext cx="2560320" cy="292608"/>
+          </a:xfrm>
+          <a:prstGeom prst="rect">
+            <a:avLst/>
+          </a:prstGeom>
+          <a:solidFill>
+            <a:srgbClr val="00E676">
+              <a:alpha val="15000"/>
+            </a:srgbClr>
+          </a:solidFill>
+          <a:ln w="12700">
+            <a:solidFill>
+              <a:srgbClr val="00E676"/>
+            </a:solidFill>
+            <a:prstDash val="solid"/>
+          </a:ln>
+        </p:spPr>
+      </p:sp>
+      <p:sp>
+        <p:nvSpPr>
+          <p:cNvPr id="27" name="Text 25"/>
+          <p:cNvSpPr/>
+          <p:nvPr/>
+        </p:nvSpPr>
+        <p:spPr>
+          <a:xfrm>
+            <a:off x="3456432" y="4553712"/>
+            <a:ext cx="2468880" cy="292608"/>
+          </a:xfrm>
+          <a:prstGeom prst="rect">
+            <a:avLst/>
+          </a:prstGeom>
+          <a:noFill/>
+          <a:ln/>
+        </p:spPr>
+        <p:txBody>
+          <a:bodyPr wrap="square" rtlCol="0" anchor="ctr"/>
+          <a:lstStyle/>
+          <a:p>
+            <a:pPr marL="0" indent="0">
+              <a:buNone/>
+            </a:pPr>
+            <a:r>
+              <a:rPr lang="en-US" sz="1000" dirty="0">
+                <a:solidFill>
+                  <a:srgbClr val="0A0E1A"/>
+                </a:solidFill>
+                <a:latin typeface="Calibri" pitchFamily="34" charset="0"/>
+                <a:ea typeface="Calibri" pitchFamily="34" charset="-122"/>
+                <a:cs typeface="Calibri" pitchFamily="34" charset="-120"/>
+              </a:rPr>
+              <a:t>✓  Tweak binds sensor ID</a:t>
+            </a:r>
+            <a:endParaRPr lang="en-US" sz="1000" dirty="0"/>
+          </a:p>
+        </p:txBody>
+      </p:sp>
+      <p:sp>
+        <p:nvSpPr>
+          <p:cNvPr id="28" name="Shape 26"/>
+          <p:cNvSpPr/>
+          <p:nvPr/>
+        </p:nvSpPr>
+        <p:spPr>
+          <a:xfrm>
+            <a:off x="6227064" y="1024128"/>
+            <a:ext cx="2743200" cy="3931920"/>
+          </a:xfrm>
+          <a:prstGeom prst="rect">
+            <a:avLst/>
+          </a:prstGeom>
+          <a:solidFill>
+            <a:srgbClr val="F4F7FB"/>
+          </a:solidFill>
+          <a:ln w="12700">
+            <a:solidFill>
+              <a:srgbClr val="D0D8E8"/>
+            </a:solidFill>
+            <a:prstDash val="solid"/>
+          </a:ln>
+          <a:effectLst>
+            <a:outerShdw blurRad="101600" dist="38100" dir="8100000" algn="bl" rotWithShape="0">
+              <a:srgbClr val="000000">
+                <a:alpha val="15000"/>
+              </a:srgbClr>
+            </a:outerShdw>
+          </a:effectLst>
+        </p:spPr>
+      </p:sp>
+      <p:sp>
+        <p:nvSpPr>
+          <p:cNvPr id="29" name="Shape 27"/>
+          <p:cNvSpPr/>
+          <p:nvPr/>
+        </p:nvSpPr>
+        <p:spPr>
+          <a:xfrm>
+            <a:off x="6227064" y="1024128"/>
+            <a:ext cx="2743200" cy="54864"/>
+          </a:xfrm>
+          <a:prstGeom prst="rect">
+            <a:avLst/>
+          </a:prstGeom>
+          <a:solidFill>
+            <a:srgbClr val="FFD166"/>
+          </a:solidFill>
+          <a:ln w="12700">
+            <a:solidFill>
+              <a:srgbClr val="FFD166"/>
+            </a:solidFill>
+            <a:prstDash val="solid"/>
+          </a:ln>
+        </p:spPr>
+      </p:sp>
+      <p:sp>
+        <p:nvSpPr>
+          <p:cNvPr id="30" name="Text 28"/>
+          <p:cNvSpPr/>
+          <p:nvPr/>
+        </p:nvSpPr>
+        <p:spPr>
+          <a:xfrm>
+            <a:off x="6227064" y="1115568"/>
+            <a:ext cx="2743200" cy="594360"/>
+          </a:xfrm>
+          <a:prstGeom prst="rect">
+            <a:avLst/>
+          </a:prstGeom>
+          <a:noFill/>
+          <a:ln/>
+        </p:spPr>
+        <p:txBody>
+          <a:bodyPr wrap="square" rtlCol="0" anchor="ctr"/>
+          <a:lstStyle/>
+          <a:p>
+            <a:pPr marL="0" indent="0" algn="ctr">
+              <a:buNone/>
+            </a:pPr>
+            <a:r>
+              <a:rPr lang="en-US" sz="2800" dirty="0">
+                <a:solidFill>
+                  <a:srgbClr val="000000"/>
+                </a:solidFill>
+              </a:rPr>
+              <a:t>🏷️</a:t>
+            </a:r>
+            <a:endParaRPr lang="en-US" sz="2800" dirty="0"/>
+          </a:p>
+        </p:txBody>
+      </p:sp>
+      <p:sp>
+        <p:nvSpPr>
+          <p:cNvPr id="31" name="Text 29"/>
+          <p:cNvSpPr/>
+          <p:nvPr/>
+        </p:nvSpPr>
+        <p:spPr>
+          <a:xfrm>
+            <a:off x="6318504" y="1719072"/>
+            <a:ext cx="2560320" cy="384048"/>
+          </a:xfrm>
+          <a:prstGeom prst="rect">
+            <a:avLst/>
+          </a:prstGeom>
+          <a:noFill/>
+          <a:ln/>
+        </p:spPr>
+        <p:txBody>
+          <a:bodyPr wrap="square" rtlCol="0" anchor="ctr"/>
+          <a:lstStyle/>
+          <a:p>
+            <a:pPr marL="0" indent="0" algn="ctr">
+              <a:buNone/>
+            </a:pPr>
+            <a:r>
+              <a:rPr lang="en-US" sz="1300" b="1" dirty="0">
+                <a:solidFill>
+                  <a:srgbClr val="1A1A2E"/>
+                </a:solidFill>
+                <a:latin typeface="Calibri" pitchFamily="34" charset="0"/>
+                <a:ea typeface="Calibri" pitchFamily="34" charset="-122"/>
+                <a:cs typeface="Calibri" pitchFamily="34" charset="-120"/>
+              </a:rPr>
+              <a:t>vs PRESENT / AES</a:t>
+            </a:r>
+            <a:endParaRPr lang="en-US" sz="1300" dirty="0"/>
+          </a:p>
+        </p:txBody>
+      </p:sp>
+      <p:sp>
+        <p:nvSpPr>
+          <p:cNvPr id="32" name="Text 30"/>
+          <p:cNvSpPr/>
+          <p:nvPr/>
+        </p:nvSpPr>
+        <p:spPr>
+          <a:xfrm>
+            <a:off x="6318504" y="2148840"/>
+            <a:ext cx="2560320" cy="1645920"/>
+          </a:xfrm>
+          <a:prstGeom prst="rect">
+            <a:avLst/>
+          </a:prstGeom>
+          <a:noFill/>
+          <a:ln/>
+        </p:spPr>
+        <p:txBody>
+          <a:bodyPr wrap="square" rtlCol="0" anchor="ctr"/>
+          <a:lstStyle/>
+          <a:p>
+            <a:pPr marL="0" indent="0">
+              <a:buNone/>
+            </a:pPr>
+            <a:r>
+              <a:rPr lang="en-US" sz="1050" dirty="0">
+                <a:solidFill>
+                  <a:srgbClr val="444466"/>
+                </a:solidFill>
+                <a:latin typeface="Calibri" pitchFamily="34" charset="0"/>
+                <a:ea typeface="Calibri" pitchFamily="34" charset="-122"/>
+                <a:cs typeface="Calibri" pitchFamily="34" charset="-120"/>
+              </a:rPr>
+              <a:t>PRESENT (ISO/IEC 29192-2) targets passive RFID (1,570 GE). AES dominates general-purpose usage. MANTIS fills the gap: active processors needing low-latency decryption with tweak support.</a:t>
+            </a:r>
+            <a:endParaRPr lang="en-US" sz="1050" dirty="0"/>
+          </a:p>
+        </p:txBody>
+      </p:sp>
+      <p:sp>
+        <p:nvSpPr>
+          <p:cNvPr id="33" name="Shape 31"/>
+          <p:cNvSpPr/>
+          <p:nvPr/>
+        </p:nvSpPr>
+        <p:spPr>
+          <a:xfrm>
+            <a:off x="6318504" y="3858768"/>
+            <a:ext cx="2560320" cy="292608"/>
+          </a:xfrm>
+          <a:prstGeom prst="rect">
+            <a:avLst/>
+          </a:prstGeom>
+          <a:solidFill>
+            <a:srgbClr val="FFD166">
+              <a:alpha val="15000"/>
+            </a:srgbClr>
+          </a:solidFill>
+          <a:ln w="12700">
+            <a:solidFill>
+              <a:srgbClr val="FFD166"/>
+            </a:solidFill>
+            <a:prstDash val="solid"/>
+          </a:ln>
+        </p:spPr>
+      </p:sp>
+      <p:sp>
+        <p:nvSpPr>
+          <p:cNvPr id="34" name="Text 32"/>
+          <p:cNvSpPr/>
+          <p:nvPr/>
+        </p:nvSpPr>
+        <p:spPr>
+          <a:xfrm>
+            <a:off x="6364224" y="3858768"/>
+            <a:ext cx="2468880" cy="292608"/>
+          </a:xfrm>
+          <a:prstGeom prst="rect">
+            <a:avLst/>
+          </a:prstGeom>
+          <a:noFill/>
+          <a:ln/>
+        </p:spPr>
+        <p:txBody>
+          <a:bodyPr wrap="square" rtlCol="0" anchor="ctr"/>
+          <a:lstStyle/>
+          <a:p>
+            <a:pPr marL="0" indent="0">
+              <a:buNone/>
+            </a:pPr>
+            <a:r>
+              <a:rPr lang="en-US" sz="1000" dirty="0">
+                <a:solidFill>
+                  <a:srgbClr val="0A0E1A"/>
+                </a:solidFill>
+                <a:latin typeface="Calibri" pitchFamily="34" charset="0"/>
+                <a:ea typeface="Calibri" pitchFamily="34" charset="-122"/>
+                <a:cs typeface="Calibri" pitchFamily="34" charset="-120"/>
+              </a:rPr>
+              <a:t>✓  Active processor niche</a:t>
+            </a:r>
+            <a:endParaRPr lang="en-US" sz="1000" dirty="0"/>
+          </a:p>
+        </p:txBody>
+      </p:sp>
+      <p:sp>
+        <p:nvSpPr>
+          <p:cNvPr id="35" name="Shape 33"/>
+          <p:cNvSpPr/>
+          <p:nvPr/>
+        </p:nvSpPr>
+        <p:spPr>
+          <a:xfrm>
+            <a:off x="6318504" y="4206240"/>
+            <a:ext cx="2560320" cy="292608"/>
+          </a:xfrm>
+          <a:prstGeom prst="rect">
+            <a:avLst/>
+          </a:prstGeom>
+          <a:solidFill>
+            <a:srgbClr val="FFD166">
+              <a:alpha val="15000"/>
+            </a:srgbClr>
+          </a:solidFill>
+          <a:ln w="12700">
+            <a:solidFill>
+              <a:srgbClr val="FFD166"/>
+            </a:solidFill>
+            <a:prstDash val="solid"/>
+          </a:ln>
+        </p:spPr>
+      </p:sp>
+      <p:sp>
+        <p:nvSpPr>
+          <p:cNvPr id="36" name="Text 34"/>
+          <p:cNvSpPr/>
+          <p:nvPr/>
+        </p:nvSpPr>
+        <p:spPr>
+          <a:xfrm>
+            <a:off x="6364224" y="4206240"/>
+            <a:ext cx="2468880" cy="292608"/>
+          </a:xfrm>
+          <a:prstGeom prst="rect">
+            <a:avLst/>
+          </a:prstGeom>
+          <a:noFill/>
+          <a:ln/>
+        </p:spPr>
+        <p:txBody>
+          <a:bodyPr wrap="square" rtlCol="0" anchor="ctr"/>
+          <a:lstStyle/>
+          <a:p>
+            <a:pPr marL="0" indent="0">
+              <a:buNone/>
+            </a:pPr>
+            <a:r>
+              <a:rPr lang="en-US" sz="1000" dirty="0">
+                <a:solidFill>
+                  <a:srgbClr val="0A0E1A"/>
+                </a:solidFill>
+                <a:latin typeface="Calibri" pitchFamily="34" charset="0"/>
+                <a:ea typeface="Calibri" pitchFamily="34" charset="-122"/>
+                <a:cs typeface="Calibri" pitchFamily="34" charset="-120"/>
+              </a:rPr>
+              <a:t>✓  Tweak beats PRESENT</a:t>
+            </a:r>
+            <a:endParaRPr lang="en-US" sz="1000" dirty="0"/>
+          </a:p>
+        </p:txBody>
+      </p:sp>
+      <p:sp>
+        <p:nvSpPr>
+          <p:cNvPr id="37" name="Shape 35"/>
+          <p:cNvSpPr/>
+          <p:nvPr/>
+        </p:nvSpPr>
+        <p:spPr>
+          <a:xfrm>
+            <a:off x="6318504" y="4553712"/>
+            <a:ext cx="2560320" cy="292608"/>
+          </a:xfrm>
+          <a:prstGeom prst="rect">
+            <a:avLst/>
+          </a:prstGeom>
+          <a:solidFill>
+            <a:srgbClr val="FFD166">
+              <a:alpha val="15000"/>
+            </a:srgbClr>
+          </a:solidFill>
+          <a:ln w="12700">
+            <a:solidFill>
+              <a:srgbClr val="FFD166"/>
+            </a:solidFill>
+            <a:prstDash val="solid"/>
+          </a:ln>
+        </p:spPr>
+      </p:sp>
+      <p:sp>
+        <p:nvSpPr>
+          <p:cNvPr id="38" name="Text 36"/>
+          <p:cNvSpPr/>
+          <p:nvPr/>
+        </p:nvSpPr>
+        <p:spPr>
+          <a:xfrm>
+            <a:off x="6364224" y="4553712"/>
+            <a:ext cx="2468880" cy="292608"/>
+          </a:xfrm>
+          <a:prstGeom prst="rect">
+            <a:avLst/>
+          </a:prstGeom>
+          <a:noFill/>
+          <a:ln/>
+        </p:spPr>
+        <p:txBody>
+          <a:bodyPr wrap="square" rtlCol="0" anchor="ctr"/>
+          <a:lstStyle/>
+          <a:p>
+            <a:pPr marL="0" indent="0">
+              <a:buNone/>
+            </a:pPr>
+            <a:r>
+              <a:rPr lang="en-US" sz="1000" dirty="0">
+                <a:solidFill>
+                  <a:srgbClr val="0A0E1A"/>
+                </a:solidFill>
+                <a:latin typeface="Calibri" pitchFamily="34" charset="0"/>
+                <a:ea typeface="Calibri" pitchFamily="34" charset="-122"/>
+                <a:cs typeface="Calibri" pitchFamily="34" charset="-120"/>
+              </a:rPr>
+              <a:t>✓  Better latency than AES</a:t>
+            </a:r>
+            <a:endParaRPr lang="en-US" sz="1000" dirty="0"/>
+          </a:p>
+        </p:txBody>
+      </p:sp>
+    </p:spTree>
+  </p:cSld>
+  <p:clrMapOvr>
+    <a:masterClrMapping/>
+  </p:clrMapOvr>
+</p:sld>
+</file>
+
+<file path=ppt/slides/slide21.xml><?xml version="1.0" encoding="utf-8"?>
+<p:sld xmlns:a="http://schemas.openxmlformats.org/drawingml/2006/main" xmlns:r="http://schemas.openxmlformats.org/officeDocument/2006/relationships" xmlns:p="http://schemas.openxmlformats.org/presentationml/2006/main">
+  <p:cSld name="Slide 18">
+    <p:bg>
+      <p:bgPr>
+        <a:solidFill>
+          <a:srgbClr val="0A0E1A"/>
+        </a:solidFill>
+        <a:effectLst/>
+      </p:bgPr>
+    </p:bg>
+    <p:spTree>
+      <p:nvGrpSpPr>
+        <p:cNvPr id="1" name=""/>
+        <p:cNvGrpSpPr/>
+        <p:nvPr/>
+      </p:nvGrpSpPr>
+      <p:grpSpPr>
+        <a:xfrm>
+          <a:off x="0" y="0"/>
+          <a:ext cx="0" cy="0"/>
+          <a:chOff x="0" y="0"/>
+          <a:chExt cx="0" cy="0"/>
+        </a:xfrm>
+      </p:grpSpPr>
+      <p:sp>
+        <p:nvSpPr>
+          <p:cNvPr id="2" name="Shape 0"/>
+          <p:cNvSpPr/>
+          <p:nvPr/>
+        </p:nvSpPr>
+        <p:spPr>
+          <a:xfrm>
+            <a:off x="0" y="4800600"/>
+            <a:ext cx="9144000" cy="342900"/>
+          </a:xfrm>
+          <a:prstGeom prst="rect">
+            <a:avLst/>
+          </a:prstGeom>
+          <a:solidFill>
+            <a:srgbClr val="0E7FA8"/>
+          </a:solidFill>
+          <a:ln w="12700">
+            <a:solidFill>
+              <a:srgbClr val="0E7FA8"/>
+            </a:solidFill>
+            <a:prstDash val="solid"/>
+          </a:ln>
+        </p:spPr>
+      </p:sp>
+      <p:sp>
+        <p:nvSpPr>
+          <p:cNvPr id="3" name="Text 1"/>
+          <p:cNvSpPr/>
+          <p:nvPr/>
+        </p:nvSpPr>
+        <p:spPr>
+          <a:xfrm>
+            <a:off x="0" y="4800600"/>
+            <a:ext cx="9144000" cy="342900"/>
+          </a:xfrm>
+          <a:prstGeom prst="rect">
+            <a:avLst/>
+          </a:prstGeom>
+          <a:noFill/>
+          <a:ln/>
+        </p:spPr>
+        <p:txBody>
+          <a:bodyPr wrap="square" rtlCol="0" anchor="ctr"/>
+          <a:lstStyle/>
+          <a:p>
+            <a:pPr marL="0" indent="0" algn="ctr">
+              <a:buNone/>
+            </a:pPr>
+            <a:r>
+              <a:rPr lang="en-US" sz="1000" dirty="0">
+                <a:solidFill>
+                  <a:srgbClr val="FFFFFF"/>
+                </a:solidFill>
+                <a:latin typeface="Calibri" pitchFamily="34" charset="0"/>
+                <a:ea typeface="Calibri" pitchFamily="34" charset="-122"/>
+                <a:cs typeface="Calibri" pitchFamily="34" charset="-120"/>
+              </a:rPr>
+              <a:t>CSL505 Cryptography  ·  IIT Bhilai  ·  Winter 2026</a:t>
+            </a:r>
+            <a:endParaRPr lang="en-US" sz="1000" dirty="0"/>
+          </a:p>
+        </p:txBody>
+      </p:sp>
+      <p:sp>
+        <p:nvSpPr>
+          <p:cNvPr id="4" name="Shape 2"/>
+          <p:cNvSpPr/>
+          <p:nvPr/>
+        </p:nvSpPr>
+        <p:spPr>
+          <a:xfrm>
+            <a:off x="0" y="0"/>
+            <a:ext cx="9144000" cy="54864"/>
+          </a:xfrm>
+          <a:prstGeom prst="rect">
+            <a:avLst/>
+          </a:prstGeom>
+          <a:solidFill>
+            <a:srgbClr val="00C8FF"/>
+          </a:solidFill>
+          <a:ln w="12700">
+            <a:solidFill>
+              <a:srgbClr val="00C8FF"/>
+            </a:solidFill>
+            <a:prstDash val="solid"/>
+          </a:ln>
+        </p:spPr>
+      </p:sp>
+      <p:sp>
+        <p:nvSpPr>
+          <p:cNvPr id="5" name="Text 3"/>
+          <p:cNvSpPr/>
+          <p:nvPr/>
+        </p:nvSpPr>
+        <p:spPr>
+          <a:xfrm>
+            <a:off x="457200" y="164592"/>
+            <a:ext cx="8229600" cy="292608"/>
+          </a:xfrm>
+          <a:prstGeom prst="rect">
+            <a:avLst/>
+          </a:prstGeom>
+          <a:noFill/>
+          <a:ln/>
+        </p:spPr>
+        <p:txBody>
+          <a:bodyPr wrap="square" rtlCol="0" anchor="ctr"/>
+          <a:lstStyle/>
+          <a:p>
+            <a:pPr marL="0" indent="0">
+              <a:buNone/>
+            </a:pPr>
+            <a:r>
+              <a:rPr lang="en-US" sz="1000" b="1" kern="0" spc="300" dirty="0">
+                <a:solidFill>
+                  <a:srgbClr val="00C8FF"/>
+                </a:solidFill>
+                <a:latin typeface="Calibri" pitchFamily="34" charset="0"/>
+                <a:ea typeface="Calibri" pitchFamily="34" charset="-122"/>
+                <a:cs typeface="Calibri" pitchFamily="34" charset="-120"/>
+              </a:rPr>
+              <a:t>CONCLUSION</a:t>
+            </a:r>
+            <a:endParaRPr lang="en-US" sz="1000" dirty="0"/>
+          </a:p>
+        </p:txBody>
+      </p:sp>
+      <p:sp>
+        <p:nvSpPr>
+          <p:cNvPr id="6" name="Text 4"/>
+          <p:cNvSpPr/>
+          <p:nvPr/>
+        </p:nvSpPr>
+        <p:spPr>
+          <a:xfrm>
+            <a:off x="457200" y="475488"/>
+            <a:ext cx="8229600" cy="502920"/>
+          </a:xfrm>
+          <a:prstGeom prst="rect">
+            <a:avLst/>
+          </a:prstGeom>
+          <a:noFill/>
+          <a:ln/>
+        </p:spPr>
+        <p:txBody>
+          <a:bodyPr wrap="square" rtlCol="0" anchor="ctr"/>
+          <a:lstStyle/>
+          <a:p>
+            <a:pPr marL="0" indent="0">
+              <a:buNone/>
+            </a:pPr>
+            <a:r>
+              <a:rPr lang="en-US" sz="3000" b="1" dirty="0">
+                <a:solidFill>
+                  <a:srgbClr val="FFFFFF"/>
+                </a:solidFill>
+                <a:latin typeface="Georgia" pitchFamily="34" charset="0"/>
+                <a:ea typeface="Georgia" pitchFamily="34" charset="-122"/>
+                <a:cs typeface="Georgia" pitchFamily="34" charset="-120"/>
+              </a:rPr>
+              <a:t>Summary &amp; Takeaways</a:t>
+            </a:r>
+            <a:endParaRPr lang="en-US" sz="3000" dirty="0"/>
+          </a:p>
+        </p:txBody>
+      </p:sp>
+      <p:sp>
+        <p:nvSpPr>
+          <p:cNvPr id="7" name="Text 5"/>
+          <p:cNvSpPr/>
+          <p:nvPr/>
+        </p:nvSpPr>
+        <p:spPr>
+          <a:xfrm>
+            <a:off x="365760" y="1143000"/>
+            <a:ext cx="457200" cy="457200"/>
+          </a:xfrm>
+          <a:prstGeom prst="rect">
+            <a:avLst/>
+          </a:prstGeom>
+          <a:noFill/>
+          <a:ln/>
+        </p:spPr>
+        <p:txBody>
+          <a:bodyPr wrap="square" rtlCol="0" anchor="ctr"/>
+          <a:lstStyle/>
+          <a:p>
+            <a:pPr marL="0" indent="0" algn="ctr">
+              <a:buNone/>
+            </a:pPr>
+            <a:r>
+              <a:rPr lang="en-US" sz="1600" dirty="0">
+                <a:solidFill>
+                  <a:srgbClr val="000000"/>
+                </a:solidFill>
+              </a:rPr>
+              <a:t>✅</a:t>
+            </a:r>
+            <a:endParaRPr lang="en-US" sz="1600" dirty="0"/>
+          </a:p>
+        </p:txBody>
+      </p:sp>
+      <p:sp>
+        <p:nvSpPr>
+          <p:cNvPr id="8" name="Text 6"/>
+          <p:cNvSpPr/>
+          <p:nvPr/>
+        </p:nvSpPr>
+        <p:spPr>
+          <a:xfrm>
+            <a:off x="914400" y="1161288"/>
+            <a:ext cx="7772400" cy="457200"/>
+          </a:xfrm>
+          <a:prstGeom prst="rect">
+            <a:avLst/>
+          </a:prstGeom>
+          <a:noFill/>
+          <a:ln/>
+        </p:spPr>
+        <p:txBody>
+          <a:bodyPr wrap="square" rtlCol="0" anchor="ctr"/>
+          <a:lstStyle/>
+          <a:p>
+            <a:pPr marL="0" indent="0">
+              <a:buNone/>
+            </a:pPr>
+            <a:r>
+              <a:rPr lang="en-US" sz="1200" dirty="0">
+                <a:solidFill>
+                  <a:srgbClr val="B0C4E0"/>
+                </a:solidFill>
+                <a:latin typeface="Calibri" pitchFamily="34" charset="0"/>
+                <a:ea typeface="Calibri" pitchFamily="34" charset="-122"/>
+                <a:cs typeface="Calibri" pitchFamily="34" charset="-120"/>
+              </a:rPr>
+              <a:t>Complete MANTISᵣ specification: S-box, PermuteCells, MixColumns, tweak schedule, FX-construction key schedule.</a:t>
+            </a:r>
+            <a:endParaRPr lang="en-US" sz="1200" dirty="0"/>
+          </a:p>
+        </p:txBody>
+      </p:sp>
+      <p:sp>
+        <p:nvSpPr>
+          <p:cNvPr id="9" name="Text 7"/>
+          <p:cNvSpPr/>
+          <p:nvPr/>
+        </p:nvSpPr>
+        <p:spPr>
+          <a:xfrm>
+            <a:off x="365760" y="1709928"/>
+            <a:ext cx="457200" cy="457200"/>
+          </a:xfrm>
+          <a:prstGeom prst="rect">
+            <a:avLst/>
+          </a:prstGeom>
+          <a:noFill/>
+          <a:ln/>
+        </p:spPr>
+        <p:txBody>
+          <a:bodyPr wrap="square" rtlCol="0" anchor="ctr"/>
+          <a:lstStyle/>
+          <a:p>
+            <a:pPr marL="0" indent="0" algn="ctr">
+              <a:buNone/>
+            </a:pPr>
+            <a:r>
+              <a:rPr lang="en-US" sz="1600" dirty="0">
+                <a:solidFill>
+                  <a:srgbClr val="000000"/>
+                </a:solidFill>
+              </a:rPr>
+              <a:t>✅</a:t>
+            </a:r>
+            <a:endParaRPr lang="en-US" sz="1600" dirty="0"/>
+          </a:p>
+        </p:txBody>
+      </p:sp>
+      <p:sp>
+        <p:nvSpPr>
+          <p:cNvPr id="10" name="Text 8"/>
+          <p:cNvSpPr/>
+          <p:nvPr/>
+        </p:nvSpPr>
+        <p:spPr>
+          <a:xfrm>
+            <a:off x="914400" y="1728216"/>
+            <a:ext cx="7772400" cy="457200"/>
+          </a:xfrm>
+          <a:prstGeom prst="rect">
+            <a:avLst/>
+          </a:prstGeom>
+          <a:noFill/>
+          <a:ln/>
+        </p:spPr>
+        <p:txBody>
+          <a:bodyPr wrap="square" rtlCol="0" anchor="ctr"/>
+          <a:lstStyle/>
+          <a:p>
+            <a:pPr marL="0" indent="0">
+              <a:buNone/>
+            </a:pPr>
+            <a:r>
+              <a:rPr lang="en-US" sz="1200" dirty="0">
+                <a:solidFill>
+                  <a:srgbClr val="B0C4E0"/>
+                </a:solidFill>
+                <a:latin typeface="Calibri" pitchFamily="34" charset="0"/>
+                <a:ea typeface="Calibri" pitchFamily="34" charset="-122"/>
+                <a:cs typeface="Calibri" pitchFamily="34" charset="-120"/>
+              </a:rPr>
+              <a:t>Worked example for MANTIS5 verified against official test vectors [BJK+16]; MANTIS6–8 also confirmed.</a:t>
+            </a:r>
+            <a:endParaRPr lang="en-US" sz="1200" dirty="0"/>
+          </a:p>
+        </p:txBody>
+      </p:sp>
+      <p:sp>
+        <p:nvSpPr>
+          <p:cNvPr id="11" name="Text 9"/>
+          <p:cNvSpPr/>
+          <p:nvPr/>
+        </p:nvSpPr>
+        <p:spPr>
+          <a:xfrm>
+            <a:off x="365760" y="2276856"/>
+            <a:ext cx="457200" cy="457200"/>
+          </a:xfrm>
+          <a:prstGeom prst="rect">
+            <a:avLst/>
+          </a:prstGeom>
+          <a:noFill/>
+          <a:ln/>
+        </p:spPr>
+        <p:txBody>
+          <a:bodyPr wrap="square" rtlCol="0" anchor="ctr"/>
+          <a:lstStyle/>
+          <a:p>
+            <a:pPr marL="0" indent="0" algn="ctr">
+              <a:buNone/>
+            </a:pPr>
+            <a:r>
+              <a:rPr lang="en-US" sz="1600" dirty="0">
+                <a:solidFill>
+                  <a:srgbClr val="000000"/>
+                </a:solidFill>
+              </a:rPr>
+              <a:t>✅</a:t>
+            </a:r>
+            <a:endParaRPr lang="en-US" sz="1600" dirty="0"/>
+          </a:p>
+        </p:txBody>
+      </p:sp>
+      <p:sp>
+        <p:nvSpPr>
+          <p:cNvPr id="12" name="Text 10"/>
+          <p:cNvSpPr/>
+          <p:nvPr/>
+        </p:nvSpPr>
+        <p:spPr>
+          <a:xfrm>
+            <a:off x="914400" y="2295144"/>
+            <a:ext cx="7772400" cy="457200"/>
+          </a:xfrm>
+          <a:prstGeom prst="rect">
+            <a:avLst/>
+          </a:prstGeom>
+          <a:noFill/>
+          <a:ln/>
+        </p:spPr>
+        <p:txBody>
+          <a:bodyPr wrap="square" rtlCol="0" anchor="ctr"/>
+          <a:lstStyle/>
+          <a:p>
+            <a:pPr marL="0" indent="0">
+              <a:buNone/>
+            </a:pPr>
+            <a:r>
+              <a:rPr lang="en-US" sz="1200" dirty="0">
+                <a:solidFill>
+                  <a:srgbClr val="B0C4E0"/>
+                </a:solidFill>
+                <a:latin typeface="Calibri" pitchFamily="34" charset="0"/>
+                <a:ea typeface="Calibri" pitchFamily="34" charset="-122"/>
+                <a:cs typeface="Calibri" pitchFamily="34" charset="-120"/>
+              </a:rPr>
+              <a:t>Differential analysis: DDT, active S-boxes (orig 204 vs novel 213), avalanche ~32 bits, trail prob ≤ 2⁻⁴²⁶ (novel).</a:t>
+            </a:r>
+            <a:endParaRPr lang="en-US" sz="1200" dirty="0"/>
+          </a:p>
+        </p:txBody>
+      </p:sp>
+      <p:sp>
+        <p:nvSpPr>
+          <p:cNvPr id="13" name="Text 11"/>
+          <p:cNvSpPr/>
+          <p:nvPr/>
+        </p:nvSpPr>
+        <p:spPr>
+          <a:xfrm>
+            <a:off x="365760" y="2843784"/>
+            <a:ext cx="457200" cy="457200"/>
+          </a:xfrm>
+          <a:prstGeom prst="rect">
+            <a:avLst/>
+          </a:prstGeom>
+          <a:noFill/>
+          <a:ln/>
+        </p:spPr>
+        <p:txBody>
+          <a:bodyPr wrap="square" rtlCol="0" anchor="ctr"/>
+          <a:lstStyle/>
+          <a:p>
+            <a:pPr marL="0" indent="0" algn="ctr">
+              <a:buNone/>
+            </a:pPr>
+            <a:r>
+              <a:rPr lang="en-US" sz="1600" dirty="0">
+                <a:solidFill>
+                  <a:srgbClr val="000000"/>
+                </a:solidFill>
+              </a:rPr>
+              <a:t>✅</a:t>
+            </a:r>
+            <a:endParaRPr lang="en-US" sz="1600" dirty="0"/>
+          </a:p>
+        </p:txBody>
+      </p:sp>
+      <p:sp>
+        <p:nvSpPr>
+          <p:cNvPr id="14" name="Text 12"/>
+          <p:cNvSpPr/>
+          <p:nvPr/>
+        </p:nvSpPr>
+        <p:spPr>
+          <a:xfrm>
+            <a:off x="914400" y="2862072"/>
+            <a:ext cx="7772400" cy="457200"/>
+          </a:xfrm>
+          <a:prstGeom prst="rect">
+            <a:avLst/>
+          </a:prstGeom>
+          <a:noFill/>
+          <a:ln/>
+        </p:spPr>
+        <p:txBody>
+          <a:bodyPr wrap="square" rtlCol="0" anchor="ctr"/>
+          <a:lstStyle/>
+          <a:p>
+            <a:pPr marL="0" indent="0">
+              <a:buNone/>
+            </a:pPr>
+            <a:r>
+              <a:rPr lang="en-US" sz="1200" dirty="0">
+                <a:solidFill>
+                  <a:srgbClr val="B0C4E0"/>
+                </a:solidFill>
+                <a:latin typeface="Calibri" pitchFamily="34" charset="0"/>
+                <a:ea typeface="Calibri" pitchFamily="34" charset="-122"/>
+                <a:cs typeface="Calibri" pitchFamily="34" charset="-120"/>
+              </a:rPr>
+              <a:t>Integral distinguisher (2⁶ data, 2¹⁹·⁷ time, 2¹⁰ memory) on 5-round MANTIS. 3 structural weaknesses noted.</a:t>
+            </a:r>
+            <a:endParaRPr lang="en-US" sz="1200" dirty="0"/>
+          </a:p>
+        </p:txBody>
+      </p:sp>
+      <p:sp>
+        <p:nvSpPr>
+          <p:cNvPr id="15" name="Shape 13"/>
+          <p:cNvSpPr/>
+          <p:nvPr/>
+        </p:nvSpPr>
+        <p:spPr>
+          <a:xfrm>
+            <a:off x="365760" y="3374136"/>
+            <a:ext cx="8412480" cy="566928"/>
+          </a:xfrm>
+          <a:prstGeom prst="rect">
+            <a:avLst/>
+          </a:prstGeom>
+          <a:solidFill>
+            <a:srgbClr val="FFD166">
+              <a:alpha val="12000"/>
+            </a:srgbClr>
+          </a:solidFill>
+          <a:ln w="12700">
+            <a:solidFill>
+              <a:srgbClr val="FFD166"/>
+            </a:solidFill>
+            <a:prstDash val="solid"/>
+          </a:ln>
+        </p:spPr>
+      </p:sp>
+      <p:sp>
+        <p:nvSpPr>
+          <p:cNvPr id="16" name="Text 14"/>
+          <p:cNvSpPr/>
+          <p:nvPr/>
+        </p:nvSpPr>
+        <p:spPr>
+          <a:xfrm>
+            <a:off x="365760" y="3410712"/>
+            <a:ext cx="457200" cy="457200"/>
+          </a:xfrm>
+          <a:prstGeom prst="rect">
+            <a:avLst/>
+          </a:prstGeom>
+          <a:noFill/>
+          <a:ln/>
+        </p:spPr>
+        <p:txBody>
+          <a:bodyPr wrap="square" rtlCol="0" anchor="ctr"/>
+          <a:lstStyle/>
+          <a:p>
+            <a:pPr marL="0" indent="0" algn="ctr">
+              <a:buNone/>
+            </a:pPr>
+            <a:r>
+              <a:rPr lang="en-US" sz="1600" dirty="0">
+                <a:solidFill>
+                  <a:srgbClr val="000000"/>
+                </a:solidFill>
+              </a:rPr>
+              <a:t>⭐</a:t>
+            </a:r>
+            <a:endParaRPr lang="en-US" sz="1600" dirty="0"/>
+          </a:p>
+        </p:txBody>
+      </p:sp>
+      <p:sp>
+        <p:nvSpPr>
+          <p:cNvPr id="17" name="Text 15"/>
+          <p:cNvSpPr/>
+          <p:nvPr/>
+        </p:nvSpPr>
+        <p:spPr>
+          <a:xfrm>
+            <a:off x="914400" y="3429000"/>
+            <a:ext cx="7772400" cy="457200"/>
+          </a:xfrm>
+          <a:prstGeom prst="rect">
+            <a:avLst/>
+          </a:prstGeom>
+          <a:noFill/>
+          <a:ln/>
+        </p:spPr>
+        <p:txBody>
+          <a:bodyPr wrap="square" rtlCol="0" anchor="ctr"/>
+          <a:lstStyle/>
+          <a:p>
+            <a:pPr marL="0" indent="0">
+              <a:buNone/>
+            </a:pPr>
+            <a:r>
+              <a:rPr lang="en-US" sz="1200" dirty="0">
+                <a:solidFill>
+                  <a:srgbClr val="FFD166"/>
+                </a:solidFill>
+                <a:latin typeface="Calibri" pitchFamily="34" charset="0"/>
+                <a:ea typeface="Calibri" pitchFamily="34" charset="-122"/>
+                <a:cs typeface="Calibri" pitchFamily="34" charset="-120"/>
+              </a:rPr>
+              <a:t>Novel variant: LFSR-seeded constants + rotation sub-keys + arbitrary r ≥ 1 · Cipher Explorer deployed at vercel.app</a:t>
+            </a:r>
+            <a:endParaRPr lang="en-US" sz="1200" dirty="0"/>
+          </a:p>
+        </p:txBody>
+      </p:sp>
+      <p:sp>
+        <p:nvSpPr>
+          <p:cNvPr id="18" name="Text 16"/>
+          <p:cNvSpPr/>
+          <p:nvPr/>
+        </p:nvSpPr>
+        <p:spPr>
+          <a:xfrm>
+            <a:off x="365760" y="3977640"/>
+            <a:ext cx="457200" cy="457200"/>
+          </a:xfrm>
+          <a:prstGeom prst="rect">
+            <a:avLst/>
+          </a:prstGeom>
+          <a:noFill/>
+          <a:ln/>
+        </p:spPr>
+        <p:txBody>
+          <a:bodyPr wrap="square" rtlCol="0" anchor="ctr"/>
+          <a:lstStyle/>
+          <a:p>
+            <a:pPr marL="0" indent="0" algn="ctr">
+              <a:buNone/>
+            </a:pPr>
+            <a:r>
+              <a:rPr lang="en-US" sz="1600" dirty="0">
+                <a:solidFill>
+                  <a:srgbClr val="000000"/>
+                </a:solidFill>
+              </a:rPr>
+              <a:t>🌐</a:t>
+            </a:r>
+            <a:endParaRPr lang="en-US" sz="1600" dirty="0"/>
+          </a:p>
+        </p:txBody>
+      </p:sp>
+      <p:sp>
+        <p:nvSpPr>
+          <p:cNvPr id="19" name="Text 17"/>
+          <p:cNvSpPr/>
+          <p:nvPr/>
+        </p:nvSpPr>
+        <p:spPr>
+          <a:xfrm>
+            <a:off x="914400" y="3995928"/>
+            <a:ext cx="7772400" cy="457200"/>
+          </a:xfrm>
+          <a:prstGeom prst="rect">
+            <a:avLst/>
+          </a:prstGeom>
+          <a:noFill/>
+          <a:ln/>
+        </p:spPr>
+        <p:txBody>
+          <a:bodyPr wrap="square" rtlCol="0" anchor="ctr"/>
+          <a:lstStyle/>
+          <a:p>
+            <a:pPr marL="0" indent="0">
+              <a:buNone/>
+            </a:pPr>
+            <a:r>
+              <a:rPr lang="en-US" sz="1200" dirty="0">
+                <a:solidFill>
+                  <a:srgbClr val="B0C4E0"/>
+                </a:solidFill>
+                <a:latin typeface="Calibri" pitchFamily="34" charset="0"/>
+                <a:ea typeface="Calibri" pitchFamily="34" charset="-122"/>
+                <a:cs typeface="Calibri" pitchFamily="34" charset="-120"/>
+              </a:rPr>
+              <a:t>MANTIS = best balance of latency, area, and tweakability for active-processor memory encryption.</a:t>
+            </a:r>
+            <a:endParaRPr lang="en-US" sz="1200" dirty="0"/>
           </a:p>
         </p:txBody>
       </p:sp>

--- a/Paper and Presentation/MANTIS_Presentation (3).pptx
+++ b/Paper and Presentation/MANTIS_Presentation (3).pptx
@@ -5,7 +5,7 @@
     <p:sldMasterId id="2147483648" r:id="rId1"/>
   </p:sldMasterIdLst>
   <p:notesMasterIdLst>
-    <p:notesMasterId r:id="rId23"/>
+    <p:notesMasterId r:id="rId22"/>
   </p:notesMasterIdLst>
   <p:sldIdLst>
     <p:sldId id="256" r:id="rId2"/>
@@ -23,12 +23,11 @@
     <p:sldId id="275" r:id="rId14"/>
     <p:sldId id="268" r:id="rId15"/>
     <p:sldId id="276" r:id="rId16"/>
-    <p:sldId id="269" r:id="rId17"/>
-    <p:sldId id="270" r:id="rId18"/>
-    <p:sldId id="274" r:id="rId19"/>
-    <p:sldId id="271" r:id="rId20"/>
-    <p:sldId id="272" r:id="rId21"/>
-    <p:sldId id="273" r:id="rId22"/>
+    <p:sldId id="270" r:id="rId17"/>
+    <p:sldId id="274" r:id="rId18"/>
+    <p:sldId id="271" r:id="rId19"/>
+    <p:sldId id="272" r:id="rId20"/>
+    <p:sldId id="273" r:id="rId21"/>
   </p:sldIdLst>
   <p:sldSz cx="9144000" cy="5143500" type="screen16x9"/>
   <p:notesSz cx="5143500" cy="9144000"/>
@@ -1042,7 +1041,7 @@
           <a:p>
             <a:fld id="{F7021451-1387-4CA6-816F-3879F97B5CBC}" type="slidenum">
               <a:rPr lang="en-US"/>
-              <a:t>17</a:t>
+              <a:t>18</a:t>
             </a:fld>
             <a:endParaRPr lang="en-US"/>
           </a:p>
@@ -1295,90 +1294,6 @@
             <a:fld id="{F7021451-1387-4CA6-816F-3879F97B5CBC}" type="slidenum">
               <a:rPr lang="en-US"/>
               <a:t>2</a:t>
-            </a:fld>
-            <a:endParaRPr lang="en-US"/>
-          </a:p>
-        </p:txBody>
-      </p:sp>
-    </p:spTree>
-    <p:extLst>
-      <p:ext uri="{BB962C8B-B14F-4D97-AF65-F5344CB8AC3E}">
-        <p14:creationId xmlns:p14="http://schemas.microsoft.com/office/powerpoint/2010/main" val="1024086991"/>
-      </p:ext>
-    </p:extLst>
-  </p:cSld>
-  <p:clrMapOvr>
-    <a:masterClrMapping/>
-  </p:clrMapOvr>
-</p:notes>
-</file>
-
-<file path=ppt/notesSlides/notesSlide20.xml><?xml version="1.0" encoding="utf-8"?>
-<p:notes xmlns:a="http://schemas.openxmlformats.org/drawingml/2006/main" xmlns:r="http://schemas.openxmlformats.org/officeDocument/2006/relationships" xmlns:p="http://schemas.openxmlformats.org/presentationml/2006/main">
-  <p:cSld>
-    <p:spTree>
-      <p:nvGrpSpPr>
-        <p:cNvPr id="1" name=""/>
-        <p:cNvGrpSpPr/>
-        <p:nvPr/>
-      </p:nvGrpSpPr>
-      <p:grpSpPr>
-        <a:xfrm>
-          <a:off x="0" y="0"/>
-          <a:ext cx="0" cy="0"/>
-          <a:chOff x="0" y="0"/>
-          <a:chExt cx="0" cy="0"/>
-        </a:xfrm>
-      </p:grpSpPr>
-      <p:sp>
-        <p:nvSpPr>
-          <p:cNvPr id="2" name="Slide Image Placeholder 1"/>
-          <p:cNvSpPr>
-            <a:spLocks noGrp="1" noRot="1" noChangeAspect="1"/>
-          </p:cNvSpPr>
-          <p:nvPr>
-            <p:ph type="sldImg"/>
-          </p:nvPr>
-        </p:nvSpPr>
-        <p:spPr/>
-      </p:sp>
-      <p:sp>
-        <p:nvSpPr>
-          <p:cNvPr id="3" name="Notes Placeholder 2"/>
-          <p:cNvSpPr>
-            <a:spLocks noGrp="1"/>
-          </p:cNvSpPr>
-          <p:nvPr>
-            <p:ph type="body" idx="1"/>
-          </p:nvPr>
-        </p:nvSpPr>
-        <p:spPr/>
-        <p:txBody>
-          <a:bodyPr/>
-          <a:lstStyle/>
-          <a:p>
-            <a:endParaRPr lang="en-US" dirty="0"/>
-          </a:p>
-        </p:txBody>
-      </p:sp>
-      <p:sp>
-        <p:nvSpPr>
-          <p:cNvPr id="4" name="Slide Number Placeholder 3"/>
-          <p:cNvSpPr>
-            <a:spLocks noGrp="1"/>
-          </p:cNvSpPr>
-          <p:nvPr>
-            <p:ph type="sldNum" sz="quarter" idx="10"/>
-          </p:nvPr>
-        </p:nvSpPr>
-        <p:spPr/>
-        <p:txBody>
-          <a:bodyPr/>
-          <a:lstStyle/>
-          <a:p>
-            <a:fld id="{F7021451-1387-4CA6-816F-3879F97B5CBC}" type="slidenum">
-              <a:rPr lang="en-US"/>
-              <a:t>21</a:t>
             </a:fld>
             <a:endParaRPr lang="en-US"/>
           </a:p>
@@ -16646,827 +16561,6 @@
 
 <file path=ppt/slides/slide16.xml><?xml version="1.0" encoding="utf-8"?>
 <p:sld xmlns:a="http://schemas.openxmlformats.org/drawingml/2006/main" xmlns:r="http://schemas.openxmlformats.org/officeDocument/2006/relationships" xmlns:p="http://schemas.openxmlformats.org/presentationml/2006/main">
-  <p:cSld name="Slide 14">
-    <p:bg>
-      <p:bgPr>
-        <a:solidFill>
-          <a:srgbClr val="FFFFFF"/>
-        </a:solidFill>
-        <a:effectLst/>
-      </p:bgPr>
-    </p:bg>
-    <p:spTree>
-      <p:nvGrpSpPr>
-        <p:cNvPr id="1" name=""/>
-        <p:cNvGrpSpPr/>
-        <p:nvPr/>
-      </p:nvGrpSpPr>
-      <p:grpSpPr>
-        <a:xfrm>
-          <a:off x="0" y="0"/>
-          <a:ext cx="0" cy="0"/>
-          <a:chOff x="0" y="0"/>
-          <a:chExt cx="0" cy="0"/>
-        </a:xfrm>
-      </p:grpSpPr>
-      <p:sp>
-        <p:nvSpPr>
-          <p:cNvPr id="2" name="Shape 0"/>
-          <p:cNvSpPr/>
-          <p:nvPr/>
-        </p:nvSpPr>
-        <p:spPr>
-          <a:xfrm>
-            <a:off x="0" y="0"/>
-            <a:ext cx="164592" cy="5143500"/>
-          </a:xfrm>
-          <a:prstGeom prst="rect">
-            <a:avLst/>
-          </a:prstGeom>
-          <a:solidFill>
-            <a:srgbClr val="0A0E1A"/>
-          </a:solidFill>
-          <a:ln w="12700">
-            <a:solidFill>
-              <a:srgbClr val="0A0E1A"/>
-            </a:solidFill>
-            <a:prstDash val="solid"/>
-          </a:ln>
-        </p:spPr>
-      </p:sp>
-      <p:sp>
-        <p:nvSpPr>
-          <p:cNvPr id="3" name="Shape 1"/>
-          <p:cNvSpPr/>
-          <p:nvPr/>
-        </p:nvSpPr>
-        <p:spPr>
-          <a:xfrm>
-            <a:off x="164592" y="0"/>
-            <a:ext cx="73152" cy="5143500"/>
-          </a:xfrm>
-          <a:prstGeom prst="rect">
-            <a:avLst/>
-          </a:prstGeom>
-          <a:solidFill>
-            <a:srgbClr val="FF4444"/>
-          </a:solidFill>
-          <a:ln w="12700">
-            <a:solidFill>
-              <a:srgbClr val="FF4444"/>
-            </a:solidFill>
-            <a:prstDash val="solid"/>
-          </a:ln>
-        </p:spPr>
-      </p:sp>
-      <p:sp>
-        <p:nvSpPr>
-          <p:cNvPr id="4" name="Text 2"/>
-          <p:cNvSpPr/>
-          <p:nvPr/>
-        </p:nvSpPr>
-        <p:spPr>
-          <a:xfrm>
-            <a:off x="411480" y="182880"/>
-            <a:ext cx="8229600" cy="292608"/>
-          </a:xfrm>
-          <a:prstGeom prst="rect">
-            <a:avLst/>
-          </a:prstGeom>
-          <a:noFill/>
-          <a:ln/>
-        </p:spPr>
-        <p:txBody>
-          <a:bodyPr wrap="square" rtlCol="0" anchor="ctr"/>
-          <a:lstStyle/>
-          <a:p>
-            <a:pPr marL="0" indent="0">
-              <a:buNone/>
-            </a:pPr>
-            <a:r>
-              <a:rPr lang="en-US" sz="1000" b="1" kern="0" spc="300" dirty="0">
-                <a:solidFill>
-                  <a:srgbClr val="CC2222"/>
-                </a:solidFill>
-                <a:latin typeface="Calibri" pitchFamily="34" charset="0"/>
-                <a:ea typeface="Calibri" pitchFamily="34" charset="-122"/>
-                <a:cs typeface="Calibri" pitchFamily="34" charset="-120"/>
-              </a:rPr>
-              <a:t>STRUCTURAL WEAKNESSES</a:t>
-            </a:r>
-            <a:endParaRPr lang="en-US" sz="1000" dirty="0"/>
-          </a:p>
-        </p:txBody>
-      </p:sp>
-      <p:sp>
-        <p:nvSpPr>
-          <p:cNvPr id="5" name="Text 3"/>
-          <p:cNvSpPr/>
-          <p:nvPr/>
-        </p:nvSpPr>
-        <p:spPr>
-          <a:xfrm>
-            <a:off x="411480" y="475488"/>
-            <a:ext cx="8229600" cy="457200"/>
-          </a:xfrm>
-          <a:prstGeom prst="rect">
-            <a:avLst/>
-          </a:prstGeom>
-          <a:noFill/>
-          <a:ln/>
-        </p:spPr>
-        <p:txBody>
-          <a:bodyPr wrap="square" rtlCol="0" anchor="ctr"/>
-          <a:lstStyle/>
-          <a:p>
-            <a:pPr marL="0" indent="0">
-              <a:buNone/>
-            </a:pPr>
-            <a:r>
-              <a:rPr lang="en-US" sz="2600" b="1" dirty="0">
-                <a:solidFill>
-                  <a:srgbClr val="1A1A2E"/>
-                </a:solidFill>
-                <a:latin typeface="Georgia" pitchFamily="34" charset="0"/>
-                <a:ea typeface="Georgia" pitchFamily="34" charset="-122"/>
-                <a:cs typeface="Georgia" pitchFamily="34" charset="-120"/>
-              </a:rPr>
-              <a:t>Known Limitations of MANTIS</a:t>
-            </a:r>
-            <a:endParaRPr lang="en-US" sz="2600" dirty="0"/>
-          </a:p>
-        </p:txBody>
-      </p:sp>
-      <p:sp>
-        <p:nvSpPr>
-          <p:cNvPr id="6" name="Shape 4"/>
-          <p:cNvSpPr/>
-          <p:nvPr/>
-        </p:nvSpPr>
-        <p:spPr>
-          <a:xfrm>
-            <a:off x="411480" y="1024128"/>
-            <a:ext cx="8503920" cy="1207008"/>
-          </a:xfrm>
-          <a:prstGeom prst="rect">
-            <a:avLst/>
-          </a:prstGeom>
-          <a:solidFill>
-            <a:srgbClr val="F4F7FB"/>
-          </a:solidFill>
-          <a:ln w="12700">
-            <a:solidFill>
-              <a:srgbClr val="D0D8E8"/>
-            </a:solidFill>
-            <a:prstDash val="solid"/>
-          </a:ln>
-          <a:effectLst>
-            <a:outerShdw blurRad="101600" dist="38100" dir="8100000" algn="bl" rotWithShape="0">
-              <a:srgbClr val="000000">
-                <a:alpha val="15000"/>
-              </a:srgbClr>
-            </a:outerShdw>
-          </a:effectLst>
-        </p:spPr>
-      </p:sp>
-      <p:sp>
-        <p:nvSpPr>
-          <p:cNvPr id="7" name="Shape 5"/>
-          <p:cNvSpPr/>
-          <p:nvPr/>
-        </p:nvSpPr>
-        <p:spPr>
-          <a:xfrm>
-            <a:off x="502920" y="1188720"/>
-            <a:ext cx="640080" cy="640080"/>
-          </a:xfrm>
-          <a:prstGeom prst="ellipse">
-            <a:avLst/>
-          </a:prstGeom>
-          <a:solidFill>
-            <a:srgbClr val="FF4444"/>
-          </a:solidFill>
-          <a:ln w="12700">
-            <a:solidFill>
-              <a:srgbClr val="FF4444"/>
-            </a:solidFill>
-            <a:prstDash val="solid"/>
-          </a:ln>
-        </p:spPr>
-      </p:sp>
-      <p:sp>
-        <p:nvSpPr>
-          <p:cNvPr id="8" name="Text 6"/>
-          <p:cNvSpPr/>
-          <p:nvPr/>
-        </p:nvSpPr>
-        <p:spPr>
-          <a:xfrm>
-            <a:off x="502920" y="1188720"/>
-            <a:ext cx="640080" cy="640080"/>
-          </a:xfrm>
-          <a:prstGeom prst="rect">
-            <a:avLst/>
-          </a:prstGeom>
-          <a:noFill/>
-          <a:ln/>
-        </p:spPr>
-        <p:txBody>
-          <a:bodyPr wrap="square" rtlCol="0" anchor="ctr"/>
-          <a:lstStyle/>
-          <a:p>
-            <a:pPr marL="0" indent="0" algn="ctr">
-              <a:buNone/>
-            </a:pPr>
-            <a:r>
-              <a:rPr lang="en-US" sz="1600" b="1" dirty="0">
-                <a:solidFill>
-                  <a:srgbClr val="0A0E1A"/>
-                </a:solidFill>
-                <a:latin typeface="Calibri" pitchFamily="34" charset="0"/>
-                <a:ea typeface="Calibri" pitchFamily="34" charset="-122"/>
-                <a:cs typeface="Calibri" pitchFamily="34" charset="-120"/>
-              </a:rPr>
-              <a:t>1</a:t>
-            </a:r>
-            <a:endParaRPr lang="en-US" sz="1600" dirty="0"/>
-          </a:p>
-        </p:txBody>
-      </p:sp>
-      <p:sp>
-        <p:nvSpPr>
-          <p:cNvPr id="9" name="Text 7"/>
-          <p:cNvSpPr/>
-          <p:nvPr/>
-        </p:nvSpPr>
-        <p:spPr>
-          <a:xfrm>
-            <a:off x="1261872" y="1097280"/>
-            <a:ext cx="7498080" cy="329184"/>
-          </a:xfrm>
-          <a:prstGeom prst="rect">
-            <a:avLst/>
-          </a:prstGeom>
-          <a:noFill/>
-          <a:ln/>
-        </p:spPr>
-        <p:txBody>
-          <a:bodyPr wrap="square" rtlCol="0" anchor="ctr"/>
-          <a:lstStyle/>
-          <a:p>
-            <a:pPr marL="0" indent="0">
-              <a:buNone/>
-            </a:pPr>
-            <a:r>
-              <a:rPr lang="en-US" sz="1300" b="1" dirty="0">
-                <a:solidFill>
-                  <a:srgbClr val="1A1A2E"/>
-                </a:solidFill>
-                <a:latin typeface="Calibri" pitchFamily="34" charset="0"/>
-                <a:ea typeface="Calibri" pitchFamily="34" charset="-122"/>
-                <a:cs typeface="Calibri" pitchFamily="34" charset="-120"/>
-              </a:rPr>
-              <a:t>Related-Key Distinguisher</a:t>
-            </a:r>
-            <a:endParaRPr lang="en-US" sz="1300" dirty="0"/>
-          </a:p>
-        </p:txBody>
-      </p:sp>
-      <p:sp>
-        <p:nvSpPr>
-          <p:cNvPr id="10" name="Text 8"/>
-          <p:cNvSpPr/>
-          <p:nvPr/>
-        </p:nvSpPr>
-        <p:spPr>
-          <a:xfrm>
-            <a:off x="1261872" y="1426464"/>
-            <a:ext cx="7406640" cy="749808"/>
-          </a:xfrm>
-          <a:prstGeom prst="rect">
-            <a:avLst/>
-          </a:prstGeom>
-          <a:noFill/>
-          <a:ln/>
-        </p:spPr>
-        <p:txBody>
-          <a:bodyPr wrap="square" rtlCol="0" anchor="ctr"/>
-          <a:lstStyle/>
-          <a:p>
-            <a:pPr marL="0" indent="0">
-              <a:buNone/>
-            </a:pPr>
-            <a:r>
-              <a:rPr lang="en-US" sz="1050" dirty="0">
-                <a:solidFill>
-                  <a:srgbClr val="444466"/>
-                </a:solidFill>
-                <a:latin typeface="Calibri" pitchFamily="34" charset="0"/>
-                <a:ea typeface="Calibri" pitchFamily="34" charset="-122"/>
-                <a:cs typeface="Calibri" pitchFamily="34" charset="-120"/>
-              </a:rPr>
-              <a:t>The α-reflection property implies a probability-one distinguisher in the related-key model.</a:t>
-            </a:r>
-            <a:endParaRPr lang="en-US" sz="1050" dirty="0"/>
-          </a:p>
-          <a:p>
-            <a:pPr marL="0" indent="0">
-              <a:buNone/>
-            </a:pPr>
-            <a:endParaRPr lang="en-US" sz="1050" dirty="0"/>
-          </a:p>
-          <a:p>
-            <a:pPr marL="0" indent="0">
-              <a:buNone/>
-            </a:pPr>
-            <a:r>
-              <a:rPr lang="en-US" sz="1050" dirty="0">
-                <a:solidFill>
-                  <a:srgbClr val="444466"/>
-                </a:solidFill>
-                <a:latin typeface="Calibri" pitchFamily="34" charset="0"/>
-                <a:ea typeface="Calibri" pitchFamily="34" charset="-122"/>
-                <a:cs typeface="Calibri" pitchFamily="34" charset="-120"/>
-              </a:rPr>
-              <a:t>For keys (k₀,k′₀,k₁) and (k′₀,k₀,k₁⊕α): encryption under one ≡ decryption under the other.</a:t>
-            </a:r>
-            <a:endParaRPr lang="en-US" sz="1050" dirty="0"/>
-          </a:p>
-          <a:p>
-            <a:pPr marL="0" indent="0">
-              <a:buNone/>
-            </a:pPr>
-            <a:endParaRPr lang="en-US" sz="1050" dirty="0"/>
-          </a:p>
-          <a:p>
-            <a:pPr marL="0" indent="0">
-              <a:buNone/>
-            </a:pPr>
-            <a:r>
-              <a:rPr lang="en-US" sz="1050" dirty="0">
-                <a:solidFill>
-                  <a:srgbClr val="444466"/>
-                </a:solidFill>
-                <a:latin typeface="Calibri" pitchFamily="34" charset="0"/>
-                <a:ea typeface="Calibri" pitchFamily="34" charset="-122"/>
-                <a:cs typeface="Calibri" pitchFamily="34" charset="-120"/>
-              </a:rPr>
-              <a:t>Designers explicitly state MANTIS does not claim strong related-key security.</a:t>
-            </a:r>
-            <a:endParaRPr lang="en-US" sz="1050" dirty="0"/>
-          </a:p>
-        </p:txBody>
-      </p:sp>
-      <p:sp>
-        <p:nvSpPr>
-          <p:cNvPr id="11" name="Shape 9"/>
-          <p:cNvSpPr/>
-          <p:nvPr/>
-        </p:nvSpPr>
-        <p:spPr>
-          <a:xfrm>
-            <a:off x="411480" y="2322576"/>
-            <a:ext cx="8503920" cy="1207008"/>
-          </a:xfrm>
-          <a:prstGeom prst="rect">
-            <a:avLst/>
-          </a:prstGeom>
-          <a:solidFill>
-            <a:srgbClr val="F4F7FB"/>
-          </a:solidFill>
-          <a:ln w="12700">
-            <a:solidFill>
-              <a:srgbClr val="D0D8E8"/>
-            </a:solidFill>
-            <a:prstDash val="solid"/>
-          </a:ln>
-          <a:effectLst>
-            <a:outerShdw blurRad="101600" dist="38100" dir="8100000" algn="bl" rotWithShape="0">
-              <a:srgbClr val="000000">
-                <a:alpha val="15000"/>
-              </a:srgbClr>
-            </a:outerShdw>
-          </a:effectLst>
-        </p:spPr>
-      </p:sp>
-      <p:sp>
-        <p:nvSpPr>
-          <p:cNvPr id="12" name="Shape 10"/>
-          <p:cNvSpPr/>
-          <p:nvPr/>
-        </p:nvSpPr>
-        <p:spPr>
-          <a:xfrm>
-            <a:off x="502920" y="2487168"/>
-            <a:ext cx="640080" cy="640080"/>
-          </a:xfrm>
-          <a:prstGeom prst="ellipse">
-            <a:avLst/>
-          </a:prstGeom>
-          <a:solidFill>
-            <a:srgbClr val="FFD166"/>
-          </a:solidFill>
-          <a:ln w="12700">
-            <a:solidFill>
-              <a:srgbClr val="FFD166"/>
-            </a:solidFill>
-            <a:prstDash val="solid"/>
-          </a:ln>
-        </p:spPr>
-      </p:sp>
-      <p:sp>
-        <p:nvSpPr>
-          <p:cNvPr id="13" name="Text 11"/>
-          <p:cNvSpPr/>
-          <p:nvPr/>
-        </p:nvSpPr>
-        <p:spPr>
-          <a:xfrm>
-            <a:off x="502920" y="2487168"/>
-            <a:ext cx="640080" cy="640080"/>
-          </a:xfrm>
-          <a:prstGeom prst="rect">
-            <a:avLst/>
-          </a:prstGeom>
-          <a:noFill/>
-          <a:ln/>
-        </p:spPr>
-        <p:txBody>
-          <a:bodyPr wrap="square" rtlCol="0" anchor="ctr"/>
-          <a:lstStyle/>
-          <a:p>
-            <a:pPr marL="0" indent="0" algn="ctr">
-              <a:buNone/>
-            </a:pPr>
-            <a:r>
-              <a:rPr lang="en-US" sz="1600" b="1" dirty="0">
-                <a:solidFill>
-                  <a:srgbClr val="0A0E1A"/>
-                </a:solidFill>
-                <a:latin typeface="Calibri" pitchFamily="34" charset="0"/>
-                <a:ea typeface="Calibri" pitchFamily="34" charset="-122"/>
-                <a:cs typeface="Calibri" pitchFamily="34" charset="-120"/>
-              </a:rPr>
-              <a:t>2</a:t>
-            </a:r>
-            <a:endParaRPr lang="en-US" sz="1600" dirty="0"/>
-          </a:p>
-        </p:txBody>
-      </p:sp>
-      <p:sp>
-        <p:nvSpPr>
-          <p:cNvPr id="14" name="Text 12"/>
-          <p:cNvSpPr/>
-          <p:nvPr/>
-        </p:nvSpPr>
-        <p:spPr>
-          <a:xfrm>
-            <a:off x="1261872" y="2395728"/>
-            <a:ext cx="7498080" cy="329184"/>
-          </a:xfrm>
-          <a:prstGeom prst="rect">
-            <a:avLst/>
-          </a:prstGeom>
-          <a:noFill/>
-          <a:ln/>
-        </p:spPr>
-        <p:txBody>
-          <a:bodyPr wrap="square" rtlCol="0" anchor="ctr"/>
-          <a:lstStyle/>
-          <a:p>
-            <a:pPr marL="0" indent="0">
-              <a:buNone/>
-            </a:pPr>
-            <a:r>
-              <a:rPr lang="en-US" sz="1300" b="1" dirty="0">
-                <a:solidFill>
-                  <a:srgbClr val="1A1A2E"/>
-                </a:solidFill>
-                <a:latin typeface="Calibri" pitchFamily="34" charset="0"/>
-                <a:ea typeface="Calibri" pitchFamily="34" charset="-122"/>
-                <a:cs typeface="Calibri" pitchFamily="34" charset="-120"/>
-              </a:rPr>
-              <a:t>Reduced-Round Integral Distinguishers</a:t>
-            </a:r>
-            <a:endParaRPr lang="en-US" sz="1300" dirty="0"/>
-          </a:p>
-        </p:txBody>
-      </p:sp>
-      <p:sp>
-        <p:nvSpPr>
-          <p:cNvPr id="15" name="Text 13"/>
-          <p:cNvSpPr/>
-          <p:nvPr/>
-        </p:nvSpPr>
-        <p:spPr>
-          <a:xfrm>
-            <a:off x="1261872" y="2724912"/>
-            <a:ext cx="7406640" cy="749808"/>
-          </a:xfrm>
-          <a:prstGeom prst="rect">
-            <a:avLst/>
-          </a:prstGeom>
-          <a:noFill/>
-          <a:ln/>
-        </p:spPr>
-        <p:txBody>
-          <a:bodyPr wrap="square" rtlCol="0" anchor="ctr"/>
-          <a:lstStyle/>
-          <a:p>
-            <a:pPr marL="0" indent="0">
-              <a:buNone/>
-            </a:pPr>
-            <a:r>
-              <a:rPr lang="en-US" sz="1050" dirty="0">
-                <a:solidFill>
-                  <a:srgbClr val="444466"/>
-                </a:solidFill>
-                <a:latin typeface="Calibri" pitchFamily="34" charset="0"/>
-                <a:ea typeface="Calibri" pitchFamily="34" charset="-122"/>
-                <a:cs typeface="Calibri" pitchFamily="34" charset="-120"/>
-              </a:rPr>
-              <a:t>Lightweight diffusion enables integral properties to survive multiple rounds.</a:t>
-            </a:r>
-            <a:endParaRPr lang="en-US" sz="1050" dirty="0"/>
-          </a:p>
-          <a:p>
-            <a:pPr marL="0" indent="0">
-              <a:buNone/>
-            </a:pPr>
-            <a:endParaRPr lang="en-US" sz="1050" dirty="0"/>
-          </a:p>
-          <a:p>
-            <a:pPr marL="0" indent="0">
-              <a:buNone/>
-            </a:pPr>
-            <a:r>
-              <a:rPr lang="en-US" sz="1050" dirty="0">
-                <a:solidFill>
-                  <a:srgbClr val="444466"/>
-                </a:solidFill>
-                <a:latin typeface="Calibri" pitchFamily="34" charset="0"/>
-                <a:ea typeface="Calibri" pitchFamily="34" charset="-122"/>
-                <a:cs typeface="Calibri" pitchFamily="34" charset="-120"/>
-              </a:rPr>
-              <a:t>Balanced nibble relations remain observable for ~4 rounds before becoming unknown.</a:t>
-            </a:r>
-            <a:endParaRPr lang="en-US" sz="1050" dirty="0"/>
-          </a:p>
-          <a:p>
-            <a:pPr marL="0" indent="0">
-              <a:buNone/>
-            </a:pPr>
-            <a:endParaRPr lang="en-US" sz="1050" dirty="0"/>
-          </a:p>
-          <a:p>
-            <a:pPr marL="0" indent="0">
-              <a:buNone/>
-            </a:pPr>
-            <a:r>
-              <a:rPr lang="en-US" sz="1050" dirty="0">
-                <a:solidFill>
-                  <a:srgbClr val="444466"/>
-                </a:solidFill>
-                <a:latin typeface="Calibri" pitchFamily="34" charset="0"/>
-                <a:ea typeface="Calibri" pitchFamily="34" charset="-122"/>
-                <a:cs typeface="Calibri" pitchFamily="34" charset="-120"/>
-              </a:rPr>
-              <a:t>MANTIS5 has a smaller security margin against integral-style distinguishers.</a:t>
-            </a:r>
-            <a:endParaRPr lang="en-US" sz="1050" dirty="0"/>
-          </a:p>
-        </p:txBody>
-      </p:sp>
-      <p:sp>
-        <p:nvSpPr>
-          <p:cNvPr id="16" name="Shape 14"/>
-          <p:cNvSpPr/>
-          <p:nvPr/>
-        </p:nvSpPr>
-        <p:spPr>
-          <a:xfrm>
-            <a:off x="411480" y="3621024"/>
-            <a:ext cx="8503920" cy="1207008"/>
-          </a:xfrm>
-          <a:prstGeom prst="rect">
-            <a:avLst/>
-          </a:prstGeom>
-          <a:solidFill>
-            <a:srgbClr val="F4F7FB"/>
-          </a:solidFill>
-          <a:ln w="12700">
-            <a:solidFill>
-              <a:srgbClr val="D0D8E8"/>
-            </a:solidFill>
-            <a:prstDash val="solid"/>
-          </a:ln>
-          <a:effectLst>
-            <a:outerShdw blurRad="101600" dist="38100" dir="8100000" algn="bl" rotWithShape="0">
-              <a:srgbClr val="000000">
-                <a:alpha val="15000"/>
-              </a:srgbClr>
-            </a:outerShdw>
-          </a:effectLst>
-        </p:spPr>
-      </p:sp>
-      <p:sp>
-        <p:nvSpPr>
-          <p:cNvPr id="17" name="Shape 15"/>
-          <p:cNvSpPr/>
-          <p:nvPr/>
-        </p:nvSpPr>
-        <p:spPr>
-          <a:xfrm>
-            <a:off x="502920" y="3785616"/>
-            <a:ext cx="640080" cy="640080"/>
-          </a:xfrm>
-          <a:prstGeom prst="ellipse">
-            <a:avLst/>
-          </a:prstGeom>
-          <a:solidFill>
-            <a:srgbClr val="00C8FF"/>
-          </a:solidFill>
-          <a:ln w="12700">
-            <a:solidFill>
-              <a:srgbClr val="00C8FF"/>
-            </a:solidFill>
-            <a:prstDash val="solid"/>
-          </a:ln>
-        </p:spPr>
-      </p:sp>
-      <p:sp>
-        <p:nvSpPr>
-          <p:cNvPr id="18" name="Text 16"/>
-          <p:cNvSpPr/>
-          <p:nvPr/>
-        </p:nvSpPr>
-        <p:spPr>
-          <a:xfrm>
-            <a:off x="502920" y="3785616"/>
-            <a:ext cx="640080" cy="640080"/>
-          </a:xfrm>
-          <a:prstGeom prst="rect">
-            <a:avLst/>
-          </a:prstGeom>
-          <a:noFill/>
-          <a:ln/>
-        </p:spPr>
-        <p:txBody>
-          <a:bodyPr wrap="square" rtlCol="0" anchor="ctr"/>
-          <a:lstStyle/>
-          <a:p>
-            <a:pPr marL="0" indent="0" algn="ctr">
-              <a:buNone/>
-            </a:pPr>
-            <a:r>
-              <a:rPr lang="en-US" sz="1600" b="1" dirty="0">
-                <a:solidFill>
-                  <a:srgbClr val="0A0E1A"/>
-                </a:solidFill>
-                <a:latin typeface="Calibri" pitchFamily="34" charset="0"/>
-                <a:ea typeface="Calibri" pitchFamily="34" charset="-122"/>
-                <a:cs typeface="Calibri" pitchFamily="34" charset="-120"/>
-              </a:rPr>
-              <a:t>3</a:t>
-            </a:r>
-            <a:endParaRPr lang="en-US" sz="1600" dirty="0"/>
-          </a:p>
-        </p:txBody>
-      </p:sp>
-      <p:sp>
-        <p:nvSpPr>
-          <p:cNvPr id="19" name="Text 17"/>
-          <p:cNvSpPr/>
-          <p:nvPr/>
-        </p:nvSpPr>
-        <p:spPr>
-          <a:xfrm>
-            <a:off x="1261872" y="3694176"/>
-            <a:ext cx="7498080" cy="329184"/>
-          </a:xfrm>
-          <a:prstGeom prst="rect">
-            <a:avLst/>
-          </a:prstGeom>
-          <a:noFill/>
-          <a:ln/>
-        </p:spPr>
-        <p:txBody>
-          <a:bodyPr wrap="square" rtlCol="0" anchor="ctr"/>
-          <a:lstStyle/>
-          <a:p>
-            <a:pPr marL="0" indent="0">
-              <a:buNone/>
-            </a:pPr>
-            <a:r>
-              <a:rPr lang="en-US" sz="1300" b="1" dirty="0">
-                <a:solidFill>
-                  <a:srgbClr val="1A1A2E"/>
-                </a:solidFill>
-                <a:latin typeface="Calibri" pitchFamily="34" charset="0"/>
-                <a:ea typeface="Calibri" pitchFamily="34" charset="-122"/>
-                <a:cs typeface="Calibri" pitchFamily="34" charset="-120"/>
-              </a:rPr>
-              <a:t>Birthday-Bound Block Size</a:t>
-            </a:r>
-            <a:endParaRPr lang="en-US" sz="1300" dirty="0"/>
-          </a:p>
-        </p:txBody>
-      </p:sp>
-      <p:sp>
-        <p:nvSpPr>
-          <p:cNvPr id="20" name="Text 18"/>
-          <p:cNvSpPr/>
-          <p:nvPr/>
-        </p:nvSpPr>
-        <p:spPr>
-          <a:xfrm>
-            <a:off x="1261872" y="4023360"/>
-            <a:ext cx="7406640" cy="749808"/>
-          </a:xfrm>
-          <a:prstGeom prst="rect">
-            <a:avLst/>
-          </a:prstGeom>
-          <a:noFill/>
-          <a:ln/>
-        </p:spPr>
-        <p:txBody>
-          <a:bodyPr wrap="square" rtlCol="0" anchor="ctr"/>
-          <a:lstStyle/>
-          <a:p>
-            <a:pPr marL="0" indent="0">
-              <a:buNone/>
-            </a:pPr>
-            <a:r>
-              <a:rPr lang="en-US" sz="1050" dirty="0">
-                <a:solidFill>
-                  <a:srgbClr val="444466"/>
-                </a:solidFill>
-                <a:latin typeface="Calibri" pitchFamily="34" charset="0"/>
-                <a:ea typeface="Calibri" pitchFamily="34" charset="-122"/>
-                <a:cs typeface="Calibri" pitchFamily="34" charset="-120"/>
-              </a:rPr>
-              <a:t>64-bit block size → birthday bound of 2³² blocks.</a:t>
-            </a:r>
-            <a:endParaRPr lang="en-US" sz="1050" dirty="0"/>
-          </a:p>
-          <a:p>
-            <a:pPr marL="0" indent="0">
-              <a:buNone/>
-            </a:pPr>
-            <a:endParaRPr lang="en-US" sz="1050" dirty="0"/>
-          </a:p>
-          <a:p>
-            <a:pPr marL="0" indent="0">
-              <a:buNone/>
-            </a:pPr>
-            <a:r>
-              <a:rPr lang="en-US" sz="1050" dirty="0">
-                <a:solidFill>
-                  <a:srgbClr val="444466"/>
-                </a:solidFill>
-                <a:latin typeface="Calibri" pitchFamily="34" charset="0"/>
-                <a:ea typeface="Calibri" pitchFamily="34" charset="-122"/>
-                <a:cs typeface="Calibri" pitchFamily="34" charset="-120"/>
-              </a:rPr>
-              <a:t>Long-term usage requires proper tweak management to avoid collisions and repeated-state phenomena.</a:t>
-            </a:r>
-            <a:endParaRPr lang="en-US" sz="1050" dirty="0"/>
-          </a:p>
-          <a:p>
-            <a:pPr marL="0" indent="0">
-              <a:buNone/>
-            </a:pPr>
-            <a:endParaRPr lang="en-US" sz="1050" dirty="0"/>
-          </a:p>
-          <a:p>
-            <a:pPr marL="0" indent="0">
-              <a:buNone/>
-            </a:pPr>
-            <a:r>
-              <a:rPr lang="en-US" sz="1050" dirty="0">
-                <a:solidFill>
-                  <a:srgbClr val="444466"/>
-                </a:solidFill>
-                <a:latin typeface="Calibri" pitchFamily="34" charset="0"/>
-                <a:ea typeface="Calibri" pitchFamily="34" charset="-122"/>
-                <a:cs typeface="Calibri" pitchFamily="34" charset="-120"/>
-              </a:rPr>
-              <a:t>Solution: Use the memory address as tweak to ensure unique (key, tweak) pairs.</a:t>
-            </a:r>
-            <a:endParaRPr lang="en-US" sz="1050" dirty="0"/>
-          </a:p>
-        </p:txBody>
-      </p:sp>
-    </p:spTree>
-  </p:cSld>
-  <p:clrMapOvr>
-    <a:masterClrMapping/>
-  </p:clrMapOvr>
-</p:sld>
-</file>
-
-<file path=ppt/slides/slide17.xml><?xml version="1.0" encoding="utf-8"?>
-<p:sld xmlns:a="http://schemas.openxmlformats.org/drawingml/2006/main" xmlns:r="http://schemas.openxmlformats.org/officeDocument/2006/relationships" xmlns:p="http://schemas.openxmlformats.org/presentationml/2006/main">
   <p:cSld name="Slide 15">
     <p:bg>
       <p:bgPr>
@@ -18968,7 +18062,7 @@
 </p:sld>
 </file>
 
-<file path=ppt/slides/slide18.xml><?xml version="1.0" encoding="utf-8"?>
+<file path=ppt/slides/slide17.xml><?xml version="1.0" encoding="utf-8"?>
 <p:sld xmlns:a="http://schemas.openxmlformats.org/drawingml/2006/main" xmlns:r="http://schemas.openxmlformats.org/officeDocument/2006/relationships" xmlns:p="http://schemas.openxmlformats.org/presentationml/2006/main">
   <p:cSld>
     <p:spTree>
@@ -19028,7 +18122,7 @@
 </p:sld>
 </file>
 
-<file path=ppt/slides/slide19.xml><?xml version="1.0" encoding="utf-8"?>
+<file path=ppt/slides/slide18.xml><?xml version="1.0" encoding="utf-8"?>
 <p:sld xmlns:a="http://schemas.openxmlformats.org/drawingml/2006/main" xmlns:r="http://schemas.openxmlformats.org/officeDocument/2006/relationships" xmlns:p="http://schemas.openxmlformats.org/presentationml/2006/main">
   <p:cSld name="Slide 16">
     <p:bg>
@@ -20891,6 +19985,1274 @@
 </p:sld>
 </file>
 
+<file path=ppt/slides/slide19.xml><?xml version="1.0" encoding="utf-8"?>
+<p:sld xmlns:a="http://schemas.openxmlformats.org/drawingml/2006/main" xmlns:r="http://schemas.openxmlformats.org/officeDocument/2006/relationships" xmlns:p="http://schemas.openxmlformats.org/presentationml/2006/main">
+  <p:cSld name="Slide 17">
+    <p:bg>
+      <p:bgPr>
+        <a:solidFill>
+          <a:srgbClr val="FFFFFF"/>
+        </a:solidFill>
+        <a:effectLst/>
+      </p:bgPr>
+    </p:bg>
+    <p:spTree>
+      <p:nvGrpSpPr>
+        <p:cNvPr id="1" name=""/>
+        <p:cNvGrpSpPr/>
+        <p:nvPr/>
+      </p:nvGrpSpPr>
+      <p:grpSpPr>
+        <a:xfrm>
+          <a:off x="0" y="0"/>
+          <a:ext cx="0" cy="0"/>
+          <a:chOff x="0" y="0"/>
+          <a:chExt cx="0" cy="0"/>
+        </a:xfrm>
+      </p:grpSpPr>
+      <p:sp>
+        <p:nvSpPr>
+          <p:cNvPr id="2" name="Shape 0"/>
+          <p:cNvSpPr/>
+          <p:nvPr/>
+        </p:nvSpPr>
+        <p:spPr>
+          <a:xfrm>
+            <a:off x="0" y="0"/>
+            <a:ext cx="164592" cy="5143500"/>
+          </a:xfrm>
+          <a:prstGeom prst="rect">
+            <a:avLst/>
+          </a:prstGeom>
+          <a:solidFill>
+            <a:srgbClr val="0A0E1A"/>
+          </a:solidFill>
+          <a:ln w="12700">
+            <a:solidFill>
+              <a:srgbClr val="0A0E1A"/>
+            </a:solidFill>
+            <a:prstDash val="solid"/>
+          </a:ln>
+        </p:spPr>
+      </p:sp>
+      <p:sp>
+        <p:nvSpPr>
+          <p:cNvPr id="3" name="Shape 1"/>
+          <p:cNvSpPr/>
+          <p:nvPr/>
+        </p:nvSpPr>
+        <p:spPr>
+          <a:xfrm>
+            <a:off x="164592" y="0"/>
+            <a:ext cx="73152" cy="5143500"/>
+          </a:xfrm>
+          <a:prstGeom prst="rect">
+            <a:avLst/>
+          </a:prstGeom>
+          <a:solidFill>
+            <a:srgbClr val="00E676"/>
+          </a:solidFill>
+          <a:ln w="12700">
+            <a:solidFill>
+              <a:srgbClr val="00E676"/>
+            </a:solidFill>
+            <a:prstDash val="solid"/>
+          </a:ln>
+        </p:spPr>
+      </p:sp>
+      <p:sp>
+        <p:nvSpPr>
+          <p:cNvPr id="4" name="Text 2"/>
+          <p:cNvSpPr/>
+          <p:nvPr/>
+        </p:nvSpPr>
+        <p:spPr>
+          <a:xfrm>
+            <a:off x="411480" y="182880"/>
+            <a:ext cx="8229600" cy="292608"/>
+          </a:xfrm>
+          <a:prstGeom prst="rect">
+            <a:avLst/>
+          </a:prstGeom>
+          <a:noFill/>
+          <a:ln/>
+        </p:spPr>
+        <p:txBody>
+          <a:bodyPr wrap="square" rtlCol="0" anchor="ctr"/>
+          <a:lstStyle/>
+          <a:p>
+            <a:pPr marL="0" indent="0">
+              <a:buNone/>
+            </a:pPr>
+            <a:r>
+              <a:rPr lang="en-US" sz="1000" b="1" kern="0" spc="300" dirty="0">
+                <a:solidFill>
+                  <a:srgbClr val="009945"/>
+                </a:solidFill>
+                <a:latin typeface="Calibri" pitchFamily="34" charset="0"/>
+                <a:ea typeface="Calibri" pitchFamily="34" charset="-122"/>
+                <a:cs typeface="Calibri" pitchFamily="34" charset="-120"/>
+              </a:rPr>
+              <a:t>APPLICATIONS</a:t>
+            </a:r>
+            <a:endParaRPr lang="en-US" sz="1000" dirty="0"/>
+          </a:p>
+        </p:txBody>
+      </p:sp>
+      <p:sp>
+        <p:nvSpPr>
+          <p:cNvPr id="5" name="Text 3"/>
+          <p:cNvSpPr/>
+          <p:nvPr/>
+        </p:nvSpPr>
+        <p:spPr>
+          <a:xfrm>
+            <a:off x="411480" y="475488"/>
+            <a:ext cx="8229600" cy="457200"/>
+          </a:xfrm>
+          <a:prstGeom prst="rect">
+            <a:avLst/>
+          </a:prstGeom>
+          <a:noFill/>
+          <a:ln/>
+        </p:spPr>
+        <p:txBody>
+          <a:bodyPr wrap="square" rtlCol="0" anchor="ctr"/>
+          <a:lstStyle/>
+          <a:p>
+            <a:pPr marL="0" indent="0">
+              <a:buNone/>
+            </a:pPr>
+            <a:r>
+              <a:rPr lang="en-US" sz="2800" b="1" dirty="0">
+                <a:solidFill>
+                  <a:srgbClr val="1A1A2E"/>
+                </a:solidFill>
+                <a:latin typeface="Georgia" pitchFamily="34" charset="0"/>
+                <a:ea typeface="Georgia" pitchFamily="34" charset="-122"/>
+                <a:cs typeface="Georgia" pitchFamily="34" charset="-120"/>
+              </a:rPr>
+              <a:t>Where MANTIS Shines</a:t>
+            </a:r>
+            <a:endParaRPr lang="en-US" sz="2800" dirty="0"/>
+          </a:p>
+        </p:txBody>
+      </p:sp>
+      <p:sp>
+        <p:nvSpPr>
+          <p:cNvPr id="6" name="Shape 4"/>
+          <p:cNvSpPr/>
+          <p:nvPr/>
+        </p:nvSpPr>
+        <p:spPr>
+          <a:xfrm>
+            <a:off x="411480" y="1024128"/>
+            <a:ext cx="2743200" cy="3931920"/>
+          </a:xfrm>
+          <a:prstGeom prst="rect">
+            <a:avLst/>
+          </a:prstGeom>
+          <a:solidFill>
+            <a:srgbClr val="F4F7FB"/>
+          </a:solidFill>
+          <a:ln w="12700">
+            <a:solidFill>
+              <a:srgbClr val="D0D8E8"/>
+            </a:solidFill>
+            <a:prstDash val="solid"/>
+          </a:ln>
+          <a:effectLst>
+            <a:outerShdw blurRad="101600" dist="38100" dir="8100000" algn="bl" rotWithShape="0">
+              <a:srgbClr val="000000">
+                <a:alpha val="15000"/>
+              </a:srgbClr>
+            </a:outerShdw>
+          </a:effectLst>
+        </p:spPr>
+      </p:sp>
+      <p:sp>
+        <p:nvSpPr>
+          <p:cNvPr id="7" name="Shape 5"/>
+          <p:cNvSpPr/>
+          <p:nvPr/>
+        </p:nvSpPr>
+        <p:spPr>
+          <a:xfrm>
+            <a:off x="411480" y="1024128"/>
+            <a:ext cx="2743200" cy="54864"/>
+          </a:xfrm>
+          <a:prstGeom prst="rect">
+            <a:avLst/>
+          </a:prstGeom>
+          <a:solidFill>
+            <a:srgbClr val="00C8FF"/>
+          </a:solidFill>
+          <a:ln w="12700">
+            <a:solidFill>
+              <a:srgbClr val="00C8FF"/>
+            </a:solidFill>
+            <a:prstDash val="solid"/>
+          </a:ln>
+        </p:spPr>
+      </p:sp>
+      <p:sp>
+        <p:nvSpPr>
+          <p:cNvPr id="8" name="Text 6"/>
+          <p:cNvSpPr/>
+          <p:nvPr/>
+        </p:nvSpPr>
+        <p:spPr>
+          <a:xfrm>
+            <a:off x="411480" y="1115568"/>
+            <a:ext cx="2743200" cy="594360"/>
+          </a:xfrm>
+          <a:prstGeom prst="rect">
+            <a:avLst/>
+          </a:prstGeom>
+          <a:noFill/>
+          <a:ln/>
+        </p:spPr>
+        <p:txBody>
+          <a:bodyPr wrap="square" rtlCol="0" anchor="ctr"/>
+          <a:lstStyle/>
+          <a:p>
+            <a:pPr marL="0" indent="0" algn="ctr">
+              <a:buNone/>
+            </a:pPr>
+            <a:r>
+              <a:rPr lang="en-US" sz="2800" dirty="0">
+                <a:solidFill>
+                  <a:srgbClr val="000000"/>
+                </a:solidFill>
+              </a:rPr>
+              <a:t>🖥️</a:t>
+            </a:r>
+            <a:endParaRPr lang="en-US" sz="2800" dirty="0"/>
+          </a:p>
+        </p:txBody>
+      </p:sp>
+      <p:sp>
+        <p:nvSpPr>
+          <p:cNvPr id="9" name="Text 7"/>
+          <p:cNvSpPr/>
+          <p:nvPr/>
+        </p:nvSpPr>
+        <p:spPr>
+          <a:xfrm>
+            <a:off x="502920" y="1719072"/>
+            <a:ext cx="2560320" cy="384048"/>
+          </a:xfrm>
+          <a:prstGeom prst="rect">
+            <a:avLst/>
+          </a:prstGeom>
+          <a:noFill/>
+          <a:ln/>
+        </p:spPr>
+        <p:txBody>
+          <a:bodyPr wrap="square" rtlCol="0" anchor="ctr"/>
+          <a:lstStyle/>
+          <a:p>
+            <a:pPr marL="0" indent="0" algn="ctr">
+              <a:buNone/>
+            </a:pPr>
+            <a:r>
+              <a:rPr lang="en-US" sz="1300" b="1" dirty="0">
+                <a:solidFill>
+                  <a:srgbClr val="1A1A2E"/>
+                </a:solidFill>
+                <a:latin typeface="Calibri" pitchFamily="34" charset="0"/>
+                <a:ea typeface="Calibri" pitchFamily="34" charset="-122"/>
+                <a:cs typeface="Calibri" pitchFamily="34" charset="-120"/>
+              </a:rPr>
+              <a:t>Memory Encryption</a:t>
+            </a:r>
+            <a:endParaRPr lang="en-US" sz="1300" dirty="0"/>
+          </a:p>
+        </p:txBody>
+      </p:sp>
+      <p:sp>
+        <p:nvSpPr>
+          <p:cNvPr id="10" name="Text 8"/>
+          <p:cNvSpPr/>
+          <p:nvPr/>
+        </p:nvSpPr>
+        <p:spPr>
+          <a:xfrm>
+            <a:off x="502920" y="2148840"/>
+            <a:ext cx="2560320" cy="1645920"/>
+          </a:xfrm>
+          <a:prstGeom prst="rect">
+            <a:avLst/>
+          </a:prstGeom>
+          <a:noFill/>
+          <a:ln/>
+        </p:spPr>
+        <p:txBody>
+          <a:bodyPr wrap="square" rtlCol="0" anchor="ctr"/>
+          <a:lstStyle/>
+          <a:p>
+            <a:pPr marL="0" indent="0">
+              <a:buNone/>
+            </a:pPr>
+            <a:r>
+              <a:rPr lang="en-US" sz="1050" dirty="0">
+                <a:solidFill>
+                  <a:srgbClr val="444466"/>
+                </a:solidFill>
+                <a:latin typeface="Calibri" pitchFamily="34" charset="0"/>
+                <a:ea typeface="Calibri" pitchFamily="34" charset="-122"/>
+                <a:cs typeface="Calibri" pitchFamily="34" charset="-120"/>
+              </a:rPr>
+              <a:t>Primary use case — IBM SecureBlue++, Intel SGX. Every cache-line read/write encrypted on the critical path. Memory address serves as the tweak, providing natural sector isolation without IV management overhead.</a:t>
+            </a:r>
+            <a:endParaRPr lang="en-US" sz="1050" dirty="0"/>
+          </a:p>
+        </p:txBody>
+      </p:sp>
+      <p:sp>
+        <p:nvSpPr>
+          <p:cNvPr id="11" name="Shape 9"/>
+          <p:cNvSpPr/>
+          <p:nvPr/>
+        </p:nvSpPr>
+        <p:spPr>
+          <a:xfrm>
+            <a:off x="502920" y="3858768"/>
+            <a:ext cx="2560320" cy="292608"/>
+          </a:xfrm>
+          <a:prstGeom prst="rect">
+            <a:avLst/>
+          </a:prstGeom>
+          <a:solidFill>
+            <a:srgbClr val="00C8FF">
+              <a:alpha val="15000"/>
+            </a:srgbClr>
+          </a:solidFill>
+          <a:ln w="12700">
+            <a:solidFill>
+              <a:srgbClr val="00C8FF"/>
+            </a:solidFill>
+            <a:prstDash val="solid"/>
+          </a:ln>
+        </p:spPr>
+      </p:sp>
+      <p:sp>
+        <p:nvSpPr>
+          <p:cNvPr id="12" name="Text 10"/>
+          <p:cNvSpPr/>
+          <p:nvPr/>
+        </p:nvSpPr>
+        <p:spPr>
+          <a:xfrm>
+            <a:off x="548640" y="3858768"/>
+            <a:ext cx="2468880" cy="292608"/>
+          </a:xfrm>
+          <a:prstGeom prst="rect">
+            <a:avLst/>
+          </a:prstGeom>
+          <a:noFill/>
+          <a:ln/>
+        </p:spPr>
+        <p:txBody>
+          <a:bodyPr wrap="square" rtlCol="0" anchor="ctr"/>
+          <a:lstStyle/>
+          <a:p>
+            <a:pPr marL="0" indent="0">
+              <a:buNone/>
+            </a:pPr>
+            <a:r>
+              <a:rPr lang="en-US" sz="1000" dirty="0">
+                <a:solidFill>
+                  <a:srgbClr val="0A0E1A"/>
+                </a:solidFill>
+                <a:latin typeface="Calibri" pitchFamily="34" charset="0"/>
+                <a:ea typeface="Calibri" pitchFamily="34" charset="-122"/>
+                <a:cs typeface="Calibri" pitchFamily="34" charset="-120"/>
+              </a:rPr>
+              <a:t>✓  Single-cycle latency</a:t>
+            </a:r>
+            <a:endParaRPr lang="en-US" sz="1000" dirty="0"/>
+          </a:p>
+        </p:txBody>
+      </p:sp>
+      <p:sp>
+        <p:nvSpPr>
+          <p:cNvPr id="13" name="Shape 11"/>
+          <p:cNvSpPr/>
+          <p:nvPr/>
+        </p:nvSpPr>
+        <p:spPr>
+          <a:xfrm>
+            <a:off x="502920" y="4206240"/>
+            <a:ext cx="2560320" cy="292608"/>
+          </a:xfrm>
+          <a:prstGeom prst="rect">
+            <a:avLst/>
+          </a:prstGeom>
+          <a:solidFill>
+            <a:srgbClr val="00C8FF">
+              <a:alpha val="15000"/>
+            </a:srgbClr>
+          </a:solidFill>
+          <a:ln w="12700">
+            <a:solidFill>
+              <a:srgbClr val="00C8FF"/>
+            </a:solidFill>
+            <a:prstDash val="solid"/>
+          </a:ln>
+        </p:spPr>
+      </p:sp>
+      <p:sp>
+        <p:nvSpPr>
+          <p:cNvPr id="14" name="Text 12"/>
+          <p:cNvSpPr/>
+          <p:nvPr/>
+        </p:nvSpPr>
+        <p:spPr>
+          <a:xfrm>
+            <a:off x="548640" y="4206240"/>
+            <a:ext cx="2468880" cy="292608"/>
+          </a:xfrm>
+          <a:prstGeom prst="rect">
+            <a:avLst/>
+          </a:prstGeom>
+          <a:noFill/>
+          <a:ln/>
+        </p:spPr>
+        <p:txBody>
+          <a:bodyPr wrap="square" rtlCol="0" anchor="ctr"/>
+          <a:lstStyle/>
+          <a:p>
+            <a:pPr marL="0" indent="0">
+              <a:buNone/>
+            </a:pPr>
+            <a:r>
+              <a:rPr lang="en-US" sz="1000" dirty="0">
+                <a:solidFill>
+                  <a:srgbClr val="0A0E1A"/>
+                </a:solidFill>
+                <a:latin typeface="Calibri" pitchFamily="34" charset="0"/>
+                <a:ea typeface="Calibri" pitchFamily="34" charset="-122"/>
+                <a:cs typeface="Calibri" pitchFamily="34" charset="-120"/>
+              </a:rPr>
+              <a:t>✓  Zero decrypt overhead</a:t>
+            </a:r>
+            <a:endParaRPr lang="en-US" sz="1000" dirty="0"/>
+          </a:p>
+        </p:txBody>
+      </p:sp>
+      <p:sp>
+        <p:nvSpPr>
+          <p:cNvPr id="15" name="Shape 13"/>
+          <p:cNvSpPr/>
+          <p:nvPr/>
+        </p:nvSpPr>
+        <p:spPr>
+          <a:xfrm>
+            <a:off x="502920" y="4553712"/>
+            <a:ext cx="2560320" cy="292608"/>
+          </a:xfrm>
+          <a:prstGeom prst="rect">
+            <a:avLst/>
+          </a:prstGeom>
+          <a:solidFill>
+            <a:srgbClr val="00C8FF">
+              <a:alpha val="15000"/>
+            </a:srgbClr>
+          </a:solidFill>
+          <a:ln w="12700">
+            <a:solidFill>
+              <a:srgbClr val="00C8FF"/>
+            </a:solidFill>
+            <a:prstDash val="solid"/>
+          </a:ln>
+        </p:spPr>
+      </p:sp>
+      <p:sp>
+        <p:nvSpPr>
+          <p:cNvPr id="16" name="Text 14"/>
+          <p:cNvSpPr/>
+          <p:nvPr/>
+        </p:nvSpPr>
+        <p:spPr>
+          <a:xfrm>
+            <a:off x="548640" y="4553712"/>
+            <a:ext cx="2468880" cy="292608"/>
+          </a:xfrm>
+          <a:prstGeom prst="rect">
+            <a:avLst/>
+          </a:prstGeom>
+          <a:noFill/>
+          <a:ln/>
+        </p:spPr>
+        <p:txBody>
+          <a:bodyPr wrap="square" rtlCol="0" anchor="ctr"/>
+          <a:lstStyle/>
+          <a:p>
+            <a:pPr marL="0" indent="0">
+              <a:buNone/>
+            </a:pPr>
+            <a:r>
+              <a:rPr lang="en-US" sz="1000" dirty="0">
+                <a:solidFill>
+                  <a:srgbClr val="0A0E1A"/>
+                </a:solidFill>
+                <a:latin typeface="Calibri" pitchFamily="34" charset="0"/>
+                <a:ea typeface="Calibri" pitchFamily="34" charset="-122"/>
+                <a:cs typeface="Calibri" pitchFamily="34" charset="-120"/>
+              </a:rPr>
+              <a:t>✓  Tweak = memory address</a:t>
+            </a:r>
+            <a:endParaRPr lang="en-US" sz="1000" dirty="0"/>
+          </a:p>
+        </p:txBody>
+      </p:sp>
+      <p:sp>
+        <p:nvSpPr>
+          <p:cNvPr id="17" name="Shape 15"/>
+          <p:cNvSpPr/>
+          <p:nvPr/>
+        </p:nvSpPr>
+        <p:spPr>
+          <a:xfrm>
+            <a:off x="3319272" y="1024128"/>
+            <a:ext cx="2743200" cy="3931920"/>
+          </a:xfrm>
+          <a:prstGeom prst="rect">
+            <a:avLst/>
+          </a:prstGeom>
+          <a:solidFill>
+            <a:srgbClr val="F4F7FB"/>
+          </a:solidFill>
+          <a:ln w="12700">
+            <a:solidFill>
+              <a:srgbClr val="D0D8E8"/>
+            </a:solidFill>
+            <a:prstDash val="solid"/>
+          </a:ln>
+          <a:effectLst>
+            <a:outerShdw blurRad="101600" dist="38100" dir="8100000" algn="bl" rotWithShape="0">
+              <a:srgbClr val="000000">
+                <a:alpha val="15000"/>
+              </a:srgbClr>
+            </a:outerShdw>
+          </a:effectLst>
+        </p:spPr>
+      </p:sp>
+      <p:sp>
+        <p:nvSpPr>
+          <p:cNvPr id="18" name="Shape 16"/>
+          <p:cNvSpPr/>
+          <p:nvPr/>
+        </p:nvSpPr>
+        <p:spPr>
+          <a:xfrm>
+            <a:off x="3319272" y="1024128"/>
+            <a:ext cx="2743200" cy="54864"/>
+          </a:xfrm>
+          <a:prstGeom prst="rect">
+            <a:avLst/>
+          </a:prstGeom>
+          <a:solidFill>
+            <a:srgbClr val="00E676"/>
+          </a:solidFill>
+          <a:ln w="12700">
+            <a:solidFill>
+              <a:srgbClr val="00E676"/>
+            </a:solidFill>
+            <a:prstDash val="solid"/>
+          </a:ln>
+        </p:spPr>
+      </p:sp>
+      <p:sp>
+        <p:nvSpPr>
+          <p:cNvPr id="19" name="Text 17"/>
+          <p:cNvSpPr/>
+          <p:nvPr/>
+        </p:nvSpPr>
+        <p:spPr>
+          <a:xfrm>
+            <a:off x="3319272" y="1115568"/>
+            <a:ext cx="2743200" cy="594360"/>
+          </a:xfrm>
+          <a:prstGeom prst="rect">
+            <a:avLst/>
+          </a:prstGeom>
+          <a:noFill/>
+          <a:ln/>
+        </p:spPr>
+        <p:txBody>
+          <a:bodyPr wrap="square" rtlCol="0" anchor="ctr"/>
+          <a:lstStyle/>
+          <a:p>
+            <a:pPr marL="0" indent="0" algn="ctr">
+              <a:buNone/>
+            </a:pPr>
+            <a:r>
+              <a:rPr lang="en-US" sz="2800" dirty="0">
+                <a:solidFill>
+                  <a:srgbClr val="000000"/>
+                </a:solidFill>
+              </a:rPr>
+              <a:t>📡</a:t>
+            </a:r>
+            <a:endParaRPr lang="en-US" sz="2800" dirty="0"/>
+          </a:p>
+        </p:txBody>
+      </p:sp>
+      <p:sp>
+        <p:nvSpPr>
+          <p:cNvPr id="20" name="Text 18"/>
+          <p:cNvSpPr/>
+          <p:nvPr/>
+        </p:nvSpPr>
+        <p:spPr>
+          <a:xfrm>
+            <a:off x="3410712" y="1719072"/>
+            <a:ext cx="2560320" cy="384048"/>
+          </a:xfrm>
+          <a:prstGeom prst="rect">
+            <a:avLst/>
+          </a:prstGeom>
+          <a:noFill/>
+          <a:ln/>
+        </p:spPr>
+        <p:txBody>
+          <a:bodyPr wrap="square" rtlCol="0" anchor="ctr"/>
+          <a:lstStyle/>
+          <a:p>
+            <a:pPr marL="0" indent="0" algn="ctr">
+              <a:buNone/>
+            </a:pPr>
+            <a:r>
+              <a:rPr lang="en-US" sz="1300" b="1" dirty="0">
+                <a:solidFill>
+                  <a:srgbClr val="1A1A2E"/>
+                </a:solidFill>
+                <a:latin typeface="Calibri" pitchFamily="34" charset="0"/>
+                <a:ea typeface="Calibri" pitchFamily="34" charset="-122"/>
+                <a:cs typeface="Calibri" pitchFamily="34" charset="-120"/>
+              </a:rPr>
+              <a:t>IoT &amp; Embedded Systems</a:t>
+            </a:r>
+            <a:endParaRPr lang="en-US" sz="1300" dirty="0"/>
+          </a:p>
+        </p:txBody>
+      </p:sp>
+      <p:sp>
+        <p:nvSpPr>
+          <p:cNvPr id="21" name="Text 19"/>
+          <p:cNvSpPr/>
+          <p:nvPr/>
+        </p:nvSpPr>
+        <p:spPr>
+          <a:xfrm>
+            <a:off x="3410712" y="2148840"/>
+            <a:ext cx="2560320" cy="1645920"/>
+          </a:xfrm>
+          <a:prstGeom prst="rect">
+            <a:avLst/>
+          </a:prstGeom>
+          <a:noFill/>
+          <a:ln/>
+        </p:spPr>
+        <p:txBody>
+          <a:bodyPr wrap="square" rtlCol="0" anchor="ctr"/>
+          <a:lstStyle/>
+          <a:p>
+            <a:pPr marL="0" indent="0">
+              <a:buNone/>
+            </a:pPr>
+            <a:r>
+              <a:rPr lang="en-US" sz="1050" dirty="0">
+                <a:solidFill>
+                  <a:srgbClr val="444466"/>
+                </a:solidFill>
+                <a:latin typeface="Calibri" pitchFamily="34" charset="0"/>
+                <a:ea typeface="Calibri" pitchFamily="34" charset="-122"/>
+                <a:cs typeface="Calibri" pitchFamily="34" charset="-120"/>
+              </a:rPr>
+              <a:t>MANTIS5 requires only 8,544 GE at 15.95 ns (UMC 180 nm). Marginal area over PRINCE while gaining a full tweak input. Ideal for sensor-address binding in embedded deployments.</a:t>
+            </a:r>
+            <a:endParaRPr lang="en-US" sz="1050" dirty="0"/>
+          </a:p>
+        </p:txBody>
+      </p:sp>
+      <p:sp>
+        <p:nvSpPr>
+          <p:cNvPr id="22" name="Shape 20"/>
+          <p:cNvSpPr/>
+          <p:nvPr/>
+        </p:nvSpPr>
+        <p:spPr>
+          <a:xfrm>
+            <a:off x="3410712" y="3858768"/>
+            <a:ext cx="2560320" cy="292608"/>
+          </a:xfrm>
+          <a:prstGeom prst="rect">
+            <a:avLst/>
+          </a:prstGeom>
+          <a:solidFill>
+            <a:srgbClr val="00E676">
+              <a:alpha val="15000"/>
+            </a:srgbClr>
+          </a:solidFill>
+          <a:ln w="12700">
+            <a:solidFill>
+              <a:srgbClr val="00E676"/>
+            </a:solidFill>
+            <a:prstDash val="solid"/>
+          </a:ln>
+        </p:spPr>
+      </p:sp>
+      <p:sp>
+        <p:nvSpPr>
+          <p:cNvPr id="23" name="Text 21"/>
+          <p:cNvSpPr/>
+          <p:nvPr/>
+        </p:nvSpPr>
+        <p:spPr>
+          <a:xfrm>
+            <a:off x="3456432" y="3858768"/>
+            <a:ext cx="2468880" cy="292608"/>
+          </a:xfrm>
+          <a:prstGeom prst="rect">
+            <a:avLst/>
+          </a:prstGeom>
+          <a:noFill/>
+          <a:ln/>
+        </p:spPr>
+        <p:txBody>
+          <a:bodyPr wrap="square" rtlCol="0" anchor="ctr"/>
+          <a:lstStyle/>
+          <a:p>
+            <a:pPr marL="0" indent="0">
+              <a:buNone/>
+            </a:pPr>
+            <a:r>
+              <a:rPr lang="en-US" sz="1000" dirty="0">
+                <a:solidFill>
+                  <a:srgbClr val="0A0E1A"/>
+                </a:solidFill>
+                <a:latin typeface="Calibri" pitchFamily="34" charset="0"/>
+                <a:ea typeface="Calibri" pitchFamily="34" charset="-122"/>
+                <a:cs typeface="Calibri" pitchFamily="34" charset="-120"/>
+              </a:rPr>
+              <a:t>✓  8,544 GE gate count</a:t>
+            </a:r>
+            <a:endParaRPr lang="en-US" sz="1000" dirty="0"/>
+          </a:p>
+        </p:txBody>
+      </p:sp>
+      <p:sp>
+        <p:nvSpPr>
+          <p:cNvPr id="24" name="Shape 22"/>
+          <p:cNvSpPr/>
+          <p:nvPr/>
+        </p:nvSpPr>
+        <p:spPr>
+          <a:xfrm>
+            <a:off x="3410712" y="4206240"/>
+            <a:ext cx="2560320" cy="292608"/>
+          </a:xfrm>
+          <a:prstGeom prst="rect">
+            <a:avLst/>
+          </a:prstGeom>
+          <a:solidFill>
+            <a:srgbClr val="00E676">
+              <a:alpha val="15000"/>
+            </a:srgbClr>
+          </a:solidFill>
+          <a:ln w="12700">
+            <a:solidFill>
+              <a:srgbClr val="00E676"/>
+            </a:solidFill>
+            <a:prstDash val="solid"/>
+          </a:ln>
+        </p:spPr>
+      </p:sp>
+      <p:sp>
+        <p:nvSpPr>
+          <p:cNvPr id="25" name="Text 23"/>
+          <p:cNvSpPr/>
+          <p:nvPr/>
+        </p:nvSpPr>
+        <p:spPr>
+          <a:xfrm>
+            <a:off x="3456432" y="4206240"/>
+            <a:ext cx="2468880" cy="292608"/>
+          </a:xfrm>
+          <a:prstGeom prst="rect">
+            <a:avLst/>
+          </a:prstGeom>
+          <a:noFill/>
+          <a:ln/>
+        </p:spPr>
+        <p:txBody>
+          <a:bodyPr wrap="square" rtlCol="0" anchor="ctr"/>
+          <a:lstStyle/>
+          <a:p>
+            <a:pPr marL="0" indent="0">
+              <a:buNone/>
+            </a:pPr>
+            <a:r>
+              <a:rPr lang="en-US" sz="1000" dirty="0">
+                <a:solidFill>
+                  <a:srgbClr val="0A0E1A"/>
+                </a:solidFill>
+                <a:latin typeface="Calibri" pitchFamily="34" charset="0"/>
+                <a:ea typeface="Calibri" pitchFamily="34" charset="-122"/>
+                <a:cs typeface="Calibri" pitchFamily="34" charset="-120"/>
+              </a:rPr>
+              <a:t>✓  15.95 ns latency</a:t>
+            </a:r>
+            <a:endParaRPr lang="en-US" sz="1000" dirty="0"/>
+          </a:p>
+        </p:txBody>
+      </p:sp>
+      <p:sp>
+        <p:nvSpPr>
+          <p:cNvPr id="26" name="Shape 24"/>
+          <p:cNvSpPr/>
+          <p:nvPr/>
+        </p:nvSpPr>
+        <p:spPr>
+          <a:xfrm>
+            <a:off x="3410712" y="4553712"/>
+            <a:ext cx="2560320" cy="292608"/>
+          </a:xfrm>
+          <a:prstGeom prst="rect">
+            <a:avLst/>
+          </a:prstGeom>
+          <a:solidFill>
+            <a:srgbClr val="00E676">
+              <a:alpha val="15000"/>
+            </a:srgbClr>
+          </a:solidFill>
+          <a:ln w="12700">
+            <a:solidFill>
+              <a:srgbClr val="00E676"/>
+            </a:solidFill>
+            <a:prstDash val="solid"/>
+          </a:ln>
+        </p:spPr>
+      </p:sp>
+      <p:sp>
+        <p:nvSpPr>
+          <p:cNvPr id="27" name="Text 25"/>
+          <p:cNvSpPr/>
+          <p:nvPr/>
+        </p:nvSpPr>
+        <p:spPr>
+          <a:xfrm>
+            <a:off x="3456432" y="4553712"/>
+            <a:ext cx="2468880" cy="292608"/>
+          </a:xfrm>
+          <a:prstGeom prst="rect">
+            <a:avLst/>
+          </a:prstGeom>
+          <a:noFill/>
+          <a:ln/>
+        </p:spPr>
+        <p:txBody>
+          <a:bodyPr wrap="square" rtlCol="0" anchor="ctr"/>
+          <a:lstStyle/>
+          <a:p>
+            <a:pPr marL="0" indent="0">
+              <a:buNone/>
+            </a:pPr>
+            <a:r>
+              <a:rPr lang="en-US" sz="1000" dirty="0">
+                <a:solidFill>
+                  <a:srgbClr val="0A0E1A"/>
+                </a:solidFill>
+                <a:latin typeface="Calibri" pitchFamily="34" charset="0"/>
+                <a:ea typeface="Calibri" pitchFamily="34" charset="-122"/>
+                <a:cs typeface="Calibri" pitchFamily="34" charset="-120"/>
+              </a:rPr>
+              <a:t>✓  Tweak binds sensor ID</a:t>
+            </a:r>
+            <a:endParaRPr lang="en-US" sz="1000" dirty="0"/>
+          </a:p>
+        </p:txBody>
+      </p:sp>
+      <p:sp>
+        <p:nvSpPr>
+          <p:cNvPr id="28" name="Shape 26"/>
+          <p:cNvSpPr/>
+          <p:nvPr/>
+        </p:nvSpPr>
+        <p:spPr>
+          <a:xfrm>
+            <a:off x="6227064" y="1024128"/>
+            <a:ext cx="2743200" cy="3931920"/>
+          </a:xfrm>
+          <a:prstGeom prst="rect">
+            <a:avLst/>
+          </a:prstGeom>
+          <a:solidFill>
+            <a:srgbClr val="F4F7FB"/>
+          </a:solidFill>
+          <a:ln w="12700">
+            <a:solidFill>
+              <a:srgbClr val="D0D8E8"/>
+            </a:solidFill>
+            <a:prstDash val="solid"/>
+          </a:ln>
+          <a:effectLst>
+            <a:outerShdw blurRad="101600" dist="38100" dir="8100000" algn="bl" rotWithShape="0">
+              <a:srgbClr val="000000">
+                <a:alpha val="15000"/>
+              </a:srgbClr>
+            </a:outerShdw>
+          </a:effectLst>
+        </p:spPr>
+      </p:sp>
+      <p:sp>
+        <p:nvSpPr>
+          <p:cNvPr id="29" name="Shape 27"/>
+          <p:cNvSpPr/>
+          <p:nvPr/>
+        </p:nvSpPr>
+        <p:spPr>
+          <a:xfrm>
+            <a:off x="6227064" y="1024128"/>
+            <a:ext cx="2743200" cy="54864"/>
+          </a:xfrm>
+          <a:prstGeom prst="rect">
+            <a:avLst/>
+          </a:prstGeom>
+          <a:solidFill>
+            <a:srgbClr val="FFD166"/>
+          </a:solidFill>
+          <a:ln w="12700">
+            <a:solidFill>
+              <a:srgbClr val="FFD166"/>
+            </a:solidFill>
+            <a:prstDash val="solid"/>
+          </a:ln>
+        </p:spPr>
+      </p:sp>
+      <p:sp>
+        <p:nvSpPr>
+          <p:cNvPr id="30" name="Text 28"/>
+          <p:cNvSpPr/>
+          <p:nvPr/>
+        </p:nvSpPr>
+        <p:spPr>
+          <a:xfrm>
+            <a:off x="6227064" y="1115568"/>
+            <a:ext cx="2743200" cy="594360"/>
+          </a:xfrm>
+          <a:prstGeom prst="rect">
+            <a:avLst/>
+          </a:prstGeom>
+          <a:noFill/>
+          <a:ln/>
+        </p:spPr>
+        <p:txBody>
+          <a:bodyPr wrap="square" rtlCol="0" anchor="ctr"/>
+          <a:lstStyle/>
+          <a:p>
+            <a:pPr marL="0" indent="0" algn="ctr">
+              <a:buNone/>
+            </a:pPr>
+            <a:r>
+              <a:rPr lang="en-US" sz="2800" dirty="0">
+                <a:solidFill>
+                  <a:srgbClr val="000000"/>
+                </a:solidFill>
+              </a:rPr>
+              <a:t>🏷️</a:t>
+            </a:r>
+            <a:endParaRPr lang="en-US" sz="2800" dirty="0"/>
+          </a:p>
+        </p:txBody>
+      </p:sp>
+      <p:sp>
+        <p:nvSpPr>
+          <p:cNvPr id="31" name="Text 29"/>
+          <p:cNvSpPr/>
+          <p:nvPr/>
+        </p:nvSpPr>
+        <p:spPr>
+          <a:xfrm>
+            <a:off x="6318504" y="1719072"/>
+            <a:ext cx="2560320" cy="384048"/>
+          </a:xfrm>
+          <a:prstGeom prst="rect">
+            <a:avLst/>
+          </a:prstGeom>
+          <a:noFill/>
+          <a:ln/>
+        </p:spPr>
+        <p:txBody>
+          <a:bodyPr wrap="square" rtlCol="0" anchor="ctr"/>
+          <a:lstStyle/>
+          <a:p>
+            <a:pPr marL="0" indent="0" algn="ctr">
+              <a:buNone/>
+            </a:pPr>
+            <a:r>
+              <a:rPr lang="en-US" sz="1300" b="1" dirty="0">
+                <a:solidFill>
+                  <a:srgbClr val="1A1A2E"/>
+                </a:solidFill>
+                <a:latin typeface="Calibri" pitchFamily="34" charset="0"/>
+                <a:ea typeface="Calibri" pitchFamily="34" charset="-122"/>
+                <a:cs typeface="Calibri" pitchFamily="34" charset="-120"/>
+              </a:rPr>
+              <a:t>vs PRESENT / AES</a:t>
+            </a:r>
+            <a:endParaRPr lang="en-US" sz="1300" dirty="0"/>
+          </a:p>
+        </p:txBody>
+      </p:sp>
+      <p:sp>
+        <p:nvSpPr>
+          <p:cNvPr id="32" name="Text 30"/>
+          <p:cNvSpPr/>
+          <p:nvPr/>
+        </p:nvSpPr>
+        <p:spPr>
+          <a:xfrm>
+            <a:off x="6318504" y="2148840"/>
+            <a:ext cx="2560320" cy="1645920"/>
+          </a:xfrm>
+          <a:prstGeom prst="rect">
+            <a:avLst/>
+          </a:prstGeom>
+          <a:noFill/>
+          <a:ln/>
+        </p:spPr>
+        <p:txBody>
+          <a:bodyPr wrap="square" rtlCol="0" anchor="ctr"/>
+          <a:lstStyle/>
+          <a:p>
+            <a:pPr marL="0" indent="0">
+              <a:buNone/>
+            </a:pPr>
+            <a:r>
+              <a:rPr lang="en-US" sz="1050" dirty="0">
+                <a:solidFill>
+                  <a:srgbClr val="444466"/>
+                </a:solidFill>
+                <a:latin typeface="Calibri" pitchFamily="34" charset="0"/>
+                <a:ea typeface="Calibri" pitchFamily="34" charset="-122"/>
+                <a:cs typeface="Calibri" pitchFamily="34" charset="-120"/>
+              </a:rPr>
+              <a:t>PRESENT (ISO/IEC 29192-2) targets passive RFID (1,570 GE). AES dominates general-purpose usage. MANTIS fills the gap: active processors needing low-latency decryption with tweak support.</a:t>
+            </a:r>
+            <a:endParaRPr lang="en-US" sz="1050" dirty="0"/>
+          </a:p>
+        </p:txBody>
+      </p:sp>
+      <p:sp>
+        <p:nvSpPr>
+          <p:cNvPr id="33" name="Shape 31"/>
+          <p:cNvSpPr/>
+          <p:nvPr/>
+        </p:nvSpPr>
+        <p:spPr>
+          <a:xfrm>
+            <a:off x="6318504" y="3858768"/>
+            <a:ext cx="2560320" cy="292608"/>
+          </a:xfrm>
+          <a:prstGeom prst="rect">
+            <a:avLst/>
+          </a:prstGeom>
+          <a:solidFill>
+            <a:srgbClr val="FFD166">
+              <a:alpha val="15000"/>
+            </a:srgbClr>
+          </a:solidFill>
+          <a:ln w="12700">
+            <a:solidFill>
+              <a:srgbClr val="FFD166"/>
+            </a:solidFill>
+            <a:prstDash val="solid"/>
+          </a:ln>
+        </p:spPr>
+      </p:sp>
+      <p:sp>
+        <p:nvSpPr>
+          <p:cNvPr id="34" name="Text 32"/>
+          <p:cNvSpPr/>
+          <p:nvPr/>
+        </p:nvSpPr>
+        <p:spPr>
+          <a:xfrm>
+            <a:off x="6364224" y="3858768"/>
+            <a:ext cx="2468880" cy="292608"/>
+          </a:xfrm>
+          <a:prstGeom prst="rect">
+            <a:avLst/>
+          </a:prstGeom>
+          <a:noFill/>
+          <a:ln/>
+        </p:spPr>
+        <p:txBody>
+          <a:bodyPr wrap="square" rtlCol="0" anchor="ctr"/>
+          <a:lstStyle/>
+          <a:p>
+            <a:pPr marL="0" indent="0">
+              <a:buNone/>
+            </a:pPr>
+            <a:r>
+              <a:rPr lang="en-US" sz="1000" dirty="0">
+                <a:solidFill>
+                  <a:srgbClr val="0A0E1A"/>
+                </a:solidFill>
+                <a:latin typeface="Calibri" pitchFamily="34" charset="0"/>
+                <a:ea typeface="Calibri" pitchFamily="34" charset="-122"/>
+                <a:cs typeface="Calibri" pitchFamily="34" charset="-120"/>
+              </a:rPr>
+              <a:t>✓  Active processor niche</a:t>
+            </a:r>
+            <a:endParaRPr lang="en-US" sz="1000" dirty="0"/>
+          </a:p>
+        </p:txBody>
+      </p:sp>
+      <p:sp>
+        <p:nvSpPr>
+          <p:cNvPr id="35" name="Shape 33"/>
+          <p:cNvSpPr/>
+          <p:nvPr/>
+        </p:nvSpPr>
+        <p:spPr>
+          <a:xfrm>
+            <a:off x="6318504" y="4206240"/>
+            <a:ext cx="2560320" cy="292608"/>
+          </a:xfrm>
+          <a:prstGeom prst="rect">
+            <a:avLst/>
+          </a:prstGeom>
+          <a:solidFill>
+            <a:srgbClr val="FFD166">
+              <a:alpha val="15000"/>
+            </a:srgbClr>
+          </a:solidFill>
+          <a:ln w="12700">
+            <a:solidFill>
+              <a:srgbClr val="FFD166"/>
+            </a:solidFill>
+            <a:prstDash val="solid"/>
+          </a:ln>
+        </p:spPr>
+      </p:sp>
+      <p:sp>
+        <p:nvSpPr>
+          <p:cNvPr id="36" name="Text 34"/>
+          <p:cNvSpPr/>
+          <p:nvPr/>
+        </p:nvSpPr>
+        <p:spPr>
+          <a:xfrm>
+            <a:off x="6364224" y="4206240"/>
+            <a:ext cx="2468880" cy="292608"/>
+          </a:xfrm>
+          <a:prstGeom prst="rect">
+            <a:avLst/>
+          </a:prstGeom>
+          <a:noFill/>
+          <a:ln/>
+        </p:spPr>
+        <p:txBody>
+          <a:bodyPr wrap="square" rtlCol="0" anchor="ctr"/>
+          <a:lstStyle/>
+          <a:p>
+            <a:pPr marL="0" indent="0">
+              <a:buNone/>
+            </a:pPr>
+            <a:r>
+              <a:rPr lang="en-US" sz="1000" dirty="0">
+                <a:solidFill>
+                  <a:srgbClr val="0A0E1A"/>
+                </a:solidFill>
+                <a:latin typeface="Calibri" pitchFamily="34" charset="0"/>
+                <a:ea typeface="Calibri" pitchFamily="34" charset="-122"/>
+                <a:cs typeface="Calibri" pitchFamily="34" charset="-120"/>
+              </a:rPr>
+              <a:t>✓  Tweak beats PRESENT</a:t>
+            </a:r>
+            <a:endParaRPr lang="en-US" sz="1000" dirty="0"/>
+          </a:p>
+        </p:txBody>
+      </p:sp>
+      <p:sp>
+        <p:nvSpPr>
+          <p:cNvPr id="37" name="Shape 35"/>
+          <p:cNvSpPr/>
+          <p:nvPr/>
+        </p:nvSpPr>
+        <p:spPr>
+          <a:xfrm>
+            <a:off x="6318504" y="4553712"/>
+            <a:ext cx="2560320" cy="292608"/>
+          </a:xfrm>
+          <a:prstGeom prst="rect">
+            <a:avLst/>
+          </a:prstGeom>
+          <a:solidFill>
+            <a:srgbClr val="FFD166">
+              <a:alpha val="15000"/>
+            </a:srgbClr>
+          </a:solidFill>
+          <a:ln w="12700">
+            <a:solidFill>
+              <a:srgbClr val="FFD166"/>
+            </a:solidFill>
+            <a:prstDash val="solid"/>
+          </a:ln>
+        </p:spPr>
+      </p:sp>
+      <p:sp>
+        <p:nvSpPr>
+          <p:cNvPr id="38" name="Text 36"/>
+          <p:cNvSpPr/>
+          <p:nvPr/>
+        </p:nvSpPr>
+        <p:spPr>
+          <a:xfrm>
+            <a:off x="6364224" y="4553712"/>
+            <a:ext cx="2468880" cy="292608"/>
+          </a:xfrm>
+          <a:prstGeom prst="rect">
+            <a:avLst/>
+          </a:prstGeom>
+          <a:noFill/>
+          <a:ln/>
+        </p:spPr>
+        <p:txBody>
+          <a:bodyPr wrap="square" rtlCol="0" anchor="ctr"/>
+          <a:lstStyle/>
+          <a:p>
+            <a:pPr marL="0" indent="0">
+              <a:buNone/>
+            </a:pPr>
+            <a:r>
+              <a:rPr lang="en-US" sz="1000" dirty="0">
+                <a:solidFill>
+                  <a:srgbClr val="0A0E1A"/>
+                </a:solidFill>
+                <a:latin typeface="Calibri" pitchFamily="34" charset="0"/>
+                <a:ea typeface="Calibri" pitchFamily="34" charset="-122"/>
+                <a:cs typeface="Calibri" pitchFamily="34" charset="-120"/>
+              </a:rPr>
+              <a:t>✓  Better latency than AES</a:t>
+            </a:r>
+            <a:endParaRPr lang="en-US" sz="1000" dirty="0"/>
+          </a:p>
+        </p:txBody>
+      </p:sp>
+    </p:spTree>
+  </p:cSld>
+  <p:clrMapOvr>
+    <a:masterClrMapping/>
+  </p:clrMapOvr>
+</p:sld>
+</file>
+
 <file path=ppt/slides/slide2.xml><?xml version="1.0" encoding="utf-8"?>
 <p:sld xmlns:a="http://schemas.openxmlformats.org/drawingml/2006/main" xmlns:r="http://schemas.openxmlformats.org/officeDocument/2006/relationships" xmlns:p="http://schemas.openxmlformats.org/presentationml/2006/main">
   <p:cSld name="Slide 2">
@@ -21630,1274 +21992,6 @@
 </file>
 
 <file path=ppt/slides/slide20.xml><?xml version="1.0" encoding="utf-8"?>
-<p:sld xmlns:a="http://schemas.openxmlformats.org/drawingml/2006/main" xmlns:r="http://schemas.openxmlformats.org/officeDocument/2006/relationships" xmlns:p="http://schemas.openxmlformats.org/presentationml/2006/main">
-  <p:cSld name="Slide 17">
-    <p:bg>
-      <p:bgPr>
-        <a:solidFill>
-          <a:srgbClr val="FFFFFF"/>
-        </a:solidFill>
-        <a:effectLst/>
-      </p:bgPr>
-    </p:bg>
-    <p:spTree>
-      <p:nvGrpSpPr>
-        <p:cNvPr id="1" name=""/>
-        <p:cNvGrpSpPr/>
-        <p:nvPr/>
-      </p:nvGrpSpPr>
-      <p:grpSpPr>
-        <a:xfrm>
-          <a:off x="0" y="0"/>
-          <a:ext cx="0" cy="0"/>
-          <a:chOff x="0" y="0"/>
-          <a:chExt cx="0" cy="0"/>
-        </a:xfrm>
-      </p:grpSpPr>
-      <p:sp>
-        <p:nvSpPr>
-          <p:cNvPr id="2" name="Shape 0"/>
-          <p:cNvSpPr/>
-          <p:nvPr/>
-        </p:nvSpPr>
-        <p:spPr>
-          <a:xfrm>
-            <a:off x="0" y="0"/>
-            <a:ext cx="164592" cy="5143500"/>
-          </a:xfrm>
-          <a:prstGeom prst="rect">
-            <a:avLst/>
-          </a:prstGeom>
-          <a:solidFill>
-            <a:srgbClr val="0A0E1A"/>
-          </a:solidFill>
-          <a:ln w="12700">
-            <a:solidFill>
-              <a:srgbClr val="0A0E1A"/>
-            </a:solidFill>
-            <a:prstDash val="solid"/>
-          </a:ln>
-        </p:spPr>
-      </p:sp>
-      <p:sp>
-        <p:nvSpPr>
-          <p:cNvPr id="3" name="Shape 1"/>
-          <p:cNvSpPr/>
-          <p:nvPr/>
-        </p:nvSpPr>
-        <p:spPr>
-          <a:xfrm>
-            <a:off x="164592" y="0"/>
-            <a:ext cx="73152" cy="5143500"/>
-          </a:xfrm>
-          <a:prstGeom prst="rect">
-            <a:avLst/>
-          </a:prstGeom>
-          <a:solidFill>
-            <a:srgbClr val="00E676"/>
-          </a:solidFill>
-          <a:ln w="12700">
-            <a:solidFill>
-              <a:srgbClr val="00E676"/>
-            </a:solidFill>
-            <a:prstDash val="solid"/>
-          </a:ln>
-        </p:spPr>
-      </p:sp>
-      <p:sp>
-        <p:nvSpPr>
-          <p:cNvPr id="4" name="Text 2"/>
-          <p:cNvSpPr/>
-          <p:nvPr/>
-        </p:nvSpPr>
-        <p:spPr>
-          <a:xfrm>
-            <a:off x="411480" y="182880"/>
-            <a:ext cx="8229600" cy="292608"/>
-          </a:xfrm>
-          <a:prstGeom prst="rect">
-            <a:avLst/>
-          </a:prstGeom>
-          <a:noFill/>
-          <a:ln/>
-        </p:spPr>
-        <p:txBody>
-          <a:bodyPr wrap="square" rtlCol="0" anchor="ctr"/>
-          <a:lstStyle/>
-          <a:p>
-            <a:pPr marL="0" indent="0">
-              <a:buNone/>
-            </a:pPr>
-            <a:r>
-              <a:rPr lang="en-US" sz="1000" b="1" kern="0" spc="300" dirty="0">
-                <a:solidFill>
-                  <a:srgbClr val="009945"/>
-                </a:solidFill>
-                <a:latin typeface="Calibri" pitchFamily="34" charset="0"/>
-                <a:ea typeface="Calibri" pitchFamily="34" charset="-122"/>
-                <a:cs typeface="Calibri" pitchFamily="34" charset="-120"/>
-              </a:rPr>
-              <a:t>APPLICATIONS</a:t>
-            </a:r>
-            <a:endParaRPr lang="en-US" sz="1000" dirty="0"/>
-          </a:p>
-        </p:txBody>
-      </p:sp>
-      <p:sp>
-        <p:nvSpPr>
-          <p:cNvPr id="5" name="Text 3"/>
-          <p:cNvSpPr/>
-          <p:nvPr/>
-        </p:nvSpPr>
-        <p:spPr>
-          <a:xfrm>
-            <a:off x="411480" y="475488"/>
-            <a:ext cx="8229600" cy="457200"/>
-          </a:xfrm>
-          <a:prstGeom prst="rect">
-            <a:avLst/>
-          </a:prstGeom>
-          <a:noFill/>
-          <a:ln/>
-        </p:spPr>
-        <p:txBody>
-          <a:bodyPr wrap="square" rtlCol="0" anchor="ctr"/>
-          <a:lstStyle/>
-          <a:p>
-            <a:pPr marL="0" indent="0">
-              <a:buNone/>
-            </a:pPr>
-            <a:r>
-              <a:rPr lang="en-US" sz="2800" b="1" dirty="0">
-                <a:solidFill>
-                  <a:srgbClr val="1A1A2E"/>
-                </a:solidFill>
-                <a:latin typeface="Georgia" pitchFamily="34" charset="0"/>
-                <a:ea typeface="Georgia" pitchFamily="34" charset="-122"/>
-                <a:cs typeface="Georgia" pitchFamily="34" charset="-120"/>
-              </a:rPr>
-              <a:t>Where MANTIS Shines</a:t>
-            </a:r>
-            <a:endParaRPr lang="en-US" sz="2800" dirty="0"/>
-          </a:p>
-        </p:txBody>
-      </p:sp>
-      <p:sp>
-        <p:nvSpPr>
-          <p:cNvPr id="6" name="Shape 4"/>
-          <p:cNvSpPr/>
-          <p:nvPr/>
-        </p:nvSpPr>
-        <p:spPr>
-          <a:xfrm>
-            <a:off x="411480" y="1024128"/>
-            <a:ext cx="2743200" cy="3931920"/>
-          </a:xfrm>
-          <a:prstGeom prst="rect">
-            <a:avLst/>
-          </a:prstGeom>
-          <a:solidFill>
-            <a:srgbClr val="F4F7FB"/>
-          </a:solidFill>
-          <a:ln w="12700">
-            <a:solidFill>
-              <a:srgbClr val="D0D8E8"/>
-            </a:solidFill>
-            <a:prstDash val="solid"/>
-          </a:ln>
-          <a:effectLst>
-            <a:outerShdw blurRad="101600" dist="38100" dir="8100000" algn="bl" rotWithShape="0">
-              <a:srgbClr val="000000">
-                <a:alpha val="15000"/>
-              </a:srgbClr>
-            </a:outerShdw>
-          </a:effectLst>
-        </p:spPr>
-      </p:sp>
-      <p:sp>
-        <p:nvSpPr>
-          <p:cNvPr id="7" name="Shape 5"/>
-          <p:cNvSpPr/>
-          <p:nvPr/>
-        </p:nvSpPr>
-        <p:spPr>
-          <a:xfrm>
-            <a:off x="411480" y="1024128"/>
-            <a:ext cx="2743200" cy="54864"/>
-          </a:xfrm>
-          <a:prstGeom prst="rect">
-            <a:avLst/>
-          </a:prstGeom>
-          <a:solidFill>
-            <a:srgbClr val="00C8FF"/>
-          </a:solidFill>
-          <a:ln w="12700">
-            <a:solidFill>
-              <a:srgbClr val="00C8FF"/>
-            </a:solidFill>
-            <a:prstDash val="solid"/>
-          </a:ln>
-        </p:spPr>
-      </p:sp>
-      <p:sp>
-        <p:nvSpPr>
-          <p:cNvPr id="8" name="Text 6"/>
-          <p:cNvSpPr/>
-          <p:nvPr/>
-        </p:nvSpPr>
-        <p:spPr>
-          <a:xfrm>
-            <a:off x="411480" y="1115568"/>
-            <a:ext cx="2743200" cy="594360"/>
-          </a:xfrm>
-          <a:prstGeom prst="rect">
-            <a:avLst/>
-          </a:prstGeom>
-          <a:noFill/>
-          <a:ln/>
-        </p:spPr>
-        <p:txBody>
-          <a:bodyPr wrap="square" rtlCol="0" anchor="ctr"/>
-          <a:lstStyle/>
-          <a:p>
-            <a:pPr marL="0" indent="0" algn="ctr">
-              <a:buNone/>
-            </a:pPr>
-            <a:r>
-              <a:rPr lang="en-US" sz="2800" dirty="0">
-                <a:solidFill>
-                  <a:srgbClr val="000000"/>
-                </a:solidFill>
-              </a:rPr>
-              <a:t>🖥️</a:t>
-            </a:r>
-            <a:endParaRPr lang="en-US" sz="2800" dirty="0"/>
-          </a:p>
-        </p:txBody>
-      </p:sp>
-      <p:sp>
-        <p:nvSpPr>
-          <p:cNvPr id="9" name="Text 7"/>
-          <p:cNvSpPr/>
-          <p:nvPr/>
-        </p:nvSpPr>
-        <p:spPr>
-          <a:xfrm>
-            <a:off x="502920" y="1719072"/>
-            <a:ext cx="2560320" cy="384048"/>
-          </a:xfrm>
-          <a:prstGeom prst="rect">
-            <a:avLst/>
-          </a:prstGeom>
-          <a:noFill/>
-          <a:ln/>
-        </p:spPr>
-        <p:txBody>
-          <a:bodyPr wrap="square" rtlCol="0" anchor="ctr"/>
-          <a:lstStyle/>
-          <a:p>
-            <a:pPr marL="0" indent="0" algn="ctr">
-              <a:buNone/>
-            </a:pPr>
-            <a:r>
-              <a:rPr lang="en-US" sz="1300" b="1" dirty="0">
-                <a:solidFill>
-                  <a:srgbClr val="1A1A2E"/>
-                </a:solidFill>
-                <a:latin typeface="Calibri" pitchFamily="34" charset="0"/>
-                <a:ea typeface="Calibri" pitchFamily="34" charset="-122"/>
-                <a:cs typeface="Calibri" pitchFamily="34" charset="-120"/>
-              </a:rPr>
-              <a:t>Memory Encryption</a:t>
-            </a:r>
-            <a:endParaRPr lang="en-US" sz="1300" dirty="0"/>
-          </a:p>
-        </p:txBody>
-      </p:sp>
-      <p:sp>
-        <p:nvSpPr>
-          <p:cNvPr id="10" name="Text 8"/>
-          <p:cNvSpPr/>
-          <p:nvPr/>
-        </p:nvSpPr>
-        <p:spPr>
-          <a:xfrm>
-            <a:off x="502920" y="2148840"/>
-            <a:ext cx="2560320" cy="1645920"/>
-          </a:xfrm>
-          <a:prstGeom prst="rect">
-            <a:avLst/>
-          </a:prstGeom>
-          <a:noFill/>
-          <a:ln/>
-        </p:spPr>
-        <p:txBody>
-          <a:bodyPr wrap="square" rtlCol="0" anchor="ctr"/>
-          <a:lstStyle/>
-          <a:p>
-            <a:pPr marL="0" indent="0">
-              <a:buNone/>
-            </a:pPr>
-            <a:r>
-              <a:rPr lang="en-US" sz="1050" dirty="0">
-                <a:solidFill>
-                  <a:srgbClr val="444466"/>
-                </a:solidFill>
-                <a:latin typeface="Calibri" pitchFamily="34" charset="0"/>
-                <a:ea typeface="Calibri" pitchFamily="34" charset="-122"/>
-                <a:cs typeface="Calibri" pitchFamily="34" charset="-120"/>
-              </a:rPr>
-              <a:t>Primary use case — IBM SecureBlue++, Intel SGX. Every cache-line read/write encrypted on the critical path. Memory address serves as the tweak, providing natural sector isolation without IV management overhead.</a:t>
-            </a:r>
-            <a:endParaRPr lang="en-US" sz="1050" dirty="0"/>
-          </a:p>
-        </p:txBody>
-      </p:sp>
-      <p:sp>
-        <p:nvSpPr>
-          <p:cNvPr id="11" name="Shape 9"/>
-          <p:cNvSpPr/>
-          <p:nvPr/>
-        </p:nvSpPr>
-        <p:spPr>
-          <a:xfrm>
-            <a:off x="502920" y="3858768"/>
-            <a:ext cx="2560320" cy="292608"/>
-          </a:xfrm>
-          <a:prstGeom prst="rect">
-            <a:avLst/>
-          </a:prstGeom>
-          <a:solidFill>
-            <a:srgbClr val="00C8FF">
-              <a:alpha val="15000"/>
-            </a:srgbClr>
-          </a:solidFill>
-          <a:ln w="12700">
-            <a:solidFill>
-              <a:srgbClr val="00C8FF"/>
-            </a:solidFill>
-            <a:prstDash val="solid"/>
-          </a:ln>
-        </p:spPr>
-      </p:sp>
-      <p:sp>
-        <p:nvSpPr>
-          <p:cNvPr id="12" name="Text 10"/>
-          <p:cNvSpPr/>
-          <p:nvPr/>
-        </p:nvSpPr>
-        <p:spPr>
-          <a:xfrm>
-            <a:off x="548640" y="3858768"/>
-            <a:ext cx="2468880" cy="292608"/>
-          </a:xfrm>
-          <a:prstGeom prst="rect">
-            <a:avLst/>
-          </a:prstGeom>
-          <a:noFill/>
-          <a:ln/>
-        </p:spPr>
-        <p:txBody>
-          <a:bodyPr wrap="square" rtlCol="0" anchor="ctr"/>
-          <a:lstStyle/>
-          <a:p>
-            <a:pPr marL="0" indent="0">
-              <a:buNone/>
-            </a:pPr>
-            <a:r>
-              <a:rPr lang="en-US" sz="1000" dirty="0">
-                <a:solidFill>
-                  <a:srgbClr val="0A0E1A"/>
-                </a:solidFill>
-                <a:latin typeface="Calibri" pitchFamily="34" charset="0"/>
-                <a:ea typeface="Calibri" pitchFamily="34" charset="-122"/>
-                <a:cs typeface="Calibri" pitchFamily="34" charset="-120"/>
-              </a:rPr>
-              <a:t>✓  Single-cycle latency</a:t>
-            </a:r>
-            <a:endParaRPr lang="en-US" sz="1000" dirty="0"/>
-          </a:p>
-        </p:txBody>
-      </p:sp>
-      <p:sp>
-        <p:nvSpPr>
-          <p:cNvPr id="13" name="Shape 11"/>
-          <p:cNvSpPr/>
-          <p:nvPr/>
-        </p:nvSpPr>
-        <p:spPr>
-          <a:xfrm>
-            <a:off x="502920" y="4206240"/>
-            <a:ext cx="2560320" cy="292608"/>
-          </a:xfrm>
-          <a:prstGeom prst="rect">
-            <a:avLst/>
-          </a:prstGeom>
-          <a:solidFill>
-            <a:srgbClr val="00C8FF">
-              <a:alpha val="15000"/>
-            </a:srgbClr>
-          </a:solidFill>
-          <a:ln w="12700">
-            <a:solidFill>
-              <a:srgbClr val="00C8FF"/>
-            </a:solidFill>
-            <a:prstDash val="solid"/>
-          </a:ln>
-        </p:spPr>
-      </p:sp>
-      <p:sp>
-        <p:nvSpPr>
-          <p:cNvPr id="14" name="Text 12"/>
-          <p:cNvSpPr/>
-          <p:nvPr/>
-        </p:nvSpPr>
-        <p:spPr>
-          <a:xfrm>
-            <a:off x="548640" y="4206240"/>
-            <a:ext cx="2468880" cy="292608"/>
-          </a:xfrm>
-          <a:prstGeom prst="rect">
-            <a:avLst/>
-          </a:prstGeom>
-          <a:noFill/>
-          <a:ln/>
-        </p:spPr>
-        <p:txBody>
-          <a:bodyPr wrap="square" rtlCol="0" anchor="ctr"/>
-          <a:lstStyle/>
-          <a:p>
-            <a:pPr marL="0" indent="0">
-              <a:buNone/>
-            </a:pPr>
-            <a:r>
-              <a:rPr lang="en-US" sz="1000" dirty="0">
-                <a:solidFill>
-                  <a:srgbClr val="0A0E1A"/>
-                </a:solidFill>
-                <a:latin typeface="Calibri" pitchFamily="34" charset="0"/>
-                <a:ea typeface="Calibri" pitchFamily="34" charset="-122"/>
-                <a:cs typeface="Calibri" pitchFamily="34" charset="-120"/>
-              </a:rPr>
-              <a:t>✓  Zero decrypt overhead</a:t>
-            </a:r>
-            <a:endParaRPr lang="en-US" sz="1000" dirty="0"/>
-          </a:p>
-        </p:txBody>
-      </p:sp>
-      <p:sp>
-        <p:nvSpPr>
-          <p:cNvPr id="15" name="Shape 13"/>
-          <p:cNvSpPr/>
-          <p:nvPr/>
-        </p:nvSpPr>
-        <p:spPr>
-          <a:xfrm>
-            <a:off x="502920" y="4553712"/>
-            <a:ext cx="2560320" cy="292608"/>
-          </a:xfrm>
-          <a:prstGeom prst="rect">
-            <a:avLst/>
-          </a:prstGeom>
-          <a:solidFill>
-            <a:srgbClr val="00C8FF">
-              <a:alpha val="15000"/>
-            </a:srgbClr>
-          </a:solidFill>
-          <a:ln w="12700">
-            <a:solidFill>
-              <a:srgbClr val="00C8FF"/>
-            </a:solidFill>
-            <a:prstDash val="solid"/>
-          </a:ln>
-        </p:spPr>
-      </p:sp>
-      <p:sp>
-        <p:nvSpPr>
-          <p:cNvPr id="16" name="Text 14"/>
-          <p:cNvSpPr/>
-          <p:nvPr/>
-        </p:nvSpPr>
-        <p:spPr>
-          <a:xfrm>
-            <a:off x="548640" y="4553712"/>
-            <a:ext cx="2468880" cy="292608"/>
-          </a:xfrm>
-          <a:prstGeom prst="rect">
-            <a:avLst/>
-          </a:prstGeom>
-          <a:noFill/>
-          <a:ln/>
-        </p:spPr>
-        <p:txBody>
-          <a:bodyPr wrap="square" rtlCol="0" anchor="ctr"/>
-          <a:lstStyle/>
-          <a:p>
-            <a:pPr marL="0" indent="0">
-              <a:buNone/>
-            </a:pPr>
-            <a:r>
-              <a:rPr lang="en-US" sz="1000" dirty="0">
-                <a:solidFill>
-                  <a:srgbClr val="0A0E1A"/>
-                </a:solidFill>
-                <a:latin typeface="Calibri" pitchFamily="34" charset="0"/>
-                <a:ea typeface="Calibri" pitchFamily="34" charset="-122"/>
-                <a:cs typeface="Calibri" pitchFamily="34" charset="-120"/>
-              </a:rPr>
-              <a:t>✓  Tweak = memory address</a:t>
-            </a:r>
-            <a:endParaRPr lang="en-US" sz="1000" dirty="0"/>
-          </a:p>
-        </p:txBody>
-      </p:sp>
-      <p:sp>
-        <p:nvSpPr>
-          <p:cNvPr id="17" name="Shape 15"/>
-          <p:cNvSpPr/>
-          <p:nvPr/>
-        </p:nvSpPr>
-        <p:spPr>
-          <a:xfrm>
-            <a:off x="3319272" y="1024128"/>
-            <a:ext cx="2743200" cy="3931920"/>
-          </a:xfrm>
-          <a:prstGeom prst="rect">
-            <a:avLst/>
-          </a:prstGeom>
-          <a:solidFill>
-            <a:srgbClr val="F4F7FB"/>
-          </a:solidFill>
-          <a:ln w="12700">
-            <a:solidFill>
-              <a:srgbClr val="D0D8E8"/>
-            </a:solidFill>
-            <a:prstDash val="solid"/>
-          </a:ln>
-          <a:effectLst>
-            <a:outerShdw blurRad="101600" dist="38100" dir="8100000" algn="bl" rotWithShape="0">
-              <a:srgbClr val="000000">
-                <a:alpha val="15000"/>
-              </a:srgbClr>
-            </a:outerShdw>
-          </a:effectLst>
-        </p:spPr>
-      </p:sp>
-      <p:sp>
-        <p:nvSpPr>
-          <p:cNvPr id="18" name="Shape 16"/>
-          <p:cNvSpPr/>
-          <p:nvPr/>
-        </p:nvSpPr>
-        <p:spPr>
-          <a:xfrm>
-            <a:off x="3319272" y="1024128"/>
-            <a:ext cx="2743200" cy="54864"/>
-          </a:xfrm>
-          <a:prstGeom prst="rect">
-            <a:avLst/>
-          </a:prstGeom>
-          <a:solidFill>
-            <a:srgbClr val="00E676"/>
-          </a:solidFill>
-          <a:ln w="12700">
-            <a:solidFill>
-              <a:srgbClr val="00E676"/>
-            </a:solidFill>
-            <a:prstDash val="solid"/>
-          </a:ln>
-        </p:spPr>
-      </p:sp>
-      <p:sp>
-        <p:nvSpPr>
-          <p:cNvPr id="19" name="Text 17"/>
-          <p:cNvSpPr/>
-          <p:nvPr/>
-        </p:nvSpPr>
-        <p:spPr>
-          <a:xfrm>
-            <a:off x="3319272" y="1115568"/>
-            <a:ext cx="2743200" cy="594360"/>
-          </a:xfrm>
-          <a:prstGeom prst="rect">
-            <a:avLst/>
-          </a:prstGeom>
-          <a:noFill/>
-          <a:ln/>
-        </p:spPr>
-        <p:txBody>
-          <a:bodyPr wrap="square" rtlCol="0" anchor="ctr"/>
-          <a:lstStyle/>
-          <a:p>
-            <a:pPr marL="0" indent="0" algn="ctr">
-              <a:buNone/>
-            </a:pPr>
-            <a:r>
-              <a:rPr lang="en-US" sz="2800" dirty="0">
-                <a:solidFill>
-                  <a:srgbClr val="000000"/>
-                </a:solidFill>
-              </a:rPr>
-              <a:t>📡</a:t>
-            </a:r>
-            <a:endParaRPr lang="en-US" sz="2800" dirty="0"/>
-          </a:p>
-        </p:txBody>
-      </p:sp>
-      <p:sp>
-        <p:nvSpPr>
-          <p:cNvPr id="20" name="Text 18"/>
-          <p:cNvSpPr/>
-          <p:nvPr/>
-        </p:nvSpPr>
-        <p:spPr>
-          <a:xfrm>
-            <a:off x="3410712" y="1719072"/>
-            <a:ext cx="2560320" cy="384048"/>
-          </a:xfrm>
-          <a:prstGeom prst="rect">
-            <a:avLst/>
-          </a:prstGeom>
-          <a:noFill/>
-          <a:ln/>
-        </p:spPr>
-        <p:txBody>
-          <a:bodyPr wrap="square" rtlCol="0" anchor="ctr"/>
-          <a:lstStyle/>
-          <a:p>
-            <a:pPr marL="0" indent="0" algn="ctr">
-              <a:buNone/>
-            </a:pPr>
-            <a:r>
-              <a:rPr lang="en-US" sz="1300" b="1" dirty="0">
-                <a:solidFill>
-                  <a:srgbClr val="1A1A2E"/>
-                </a:solidFill>
-                <a:latin typeface="Calibri" pitchFamily="34" charset="0"/>
-                <a:ea typeface="Calibri" pitchFamily="34" charset="-122"/>
-                <a:cs typeface="Calibri" pitchFamily="34" charset="-120"/>
-              </a:rPr>
-              <a:t>IoT &amp; Embedded Systems</a:t>
-            </a:r>
-            <a:endParaRPr lang="en-US" sz="1300" dirty="0"/>
-          </a:p>
-        </p:txBody>
-      </p:sp>
-      <p:sp>
-        <p:nvSpPr>
-          <p:cNvPr id="21" name="Text 19"/>
-          <p:cNvSpPr/>
-          <p:nvPr/>
-        </p:nvSpPr>
-        <p:spPr>
-          <a:xfrm>
-            <a:off x="3410712" y="2148840"/>
-            <a:ext cx="2560320" cy="1645920"/>
-          </a:xfrm>
-          <a:prstGeom prst="rect">
-            <a:avLst/>
-          </a:prstGeom>
-          <a:noFill/>
-          <a:ln/>
-        </p:spPr>
-        <p:txBody>
-          <a:bodyPr wrap="square" rtlCol="0" anchor="ctr"/>
-          <a:lstStyle/>
-          <a:p>
-            <a:pPr marL="0" indent="0">
-              <a:buNone/>
-            </a:pPr>
-            <a:r>
-              <a:rPr lang="en-US" sz="1050" dirty="0">
-                <a:solidFill>
-                  <a:srgbClr val="444466"/>
-                </a:solidFill>
-                <a:latin typeface="Calibri" pitchFamily="34" charset="0"/>
-                <a:ea typeface="Calibri" pitchFamily="34" charset="-122"/>
-                <a:cs typeface="Calibri" pitchFamily="34" charset="-120"/>
-              </a:rPr>
-              <a:t>MANTIS5 requires only 8,544 GE at 15.95 ns (UMC 180 nm). Marginal area over PRINCE while gaining a full tweak input. Ideal for sensor-address binding in embedded deployments.</a:t>
-            </a:r>
-            <a:endParaRPr lang="en-US" sz="1050" dirty="0"/>
-          </a:p>
-        </p:txBody>
-      </p:sp>
-      <p:sp>
-        <p:nvSpPr>
-          <p:cNvPr id="22" name="Shape 20"/>
-          <p:cNvSpPr/>
-          <p:nvPr/>
-        </p:nvSpPr>
-        <p:spPr>
-          <a:xfrm>
-            <a:off x="3410712" y="3858768"/>
-            <a:ext cx="2560320" cy="292608"/>
-          </a:xfrm>
-          <a:prstGeom prst="rect">
-            <a:avLst/>
-          </a:prstGeom>
-          <a:solidFill>
-            <a:srgbClr val="00E676">
-              <a:alpha val="15000"/>
-            </a:srgbClr>
-          </a:solidFill>
-          <a:ln w="12700">
-            <a:solidFill>
-              <a:srgbClr val="00E676"/>
-            </a:solidFill>
-            <a:prstDash val="solid"/>
-          </a:ln>
-        </p:spPr>
-      </p:sp>
-      <p:sp>
-        <p:nvSpPr>
-          <p:cNvPr id="23" name="Text 21"/>
-          <p:cNvSpPr/>
-          <p:nvPr/>
-        </p:nvSpPr>
-        <p:spPr>
-          <a:xfrm>
-            <a:off x="3456432" y="3858768"/>
-            <a:ext cx="2468880" cy="292608"/>
-          </a:xfrm>
-          <a:prstGeom prst="rect">
-            <a:avLst/>
-          </a:prstGeom>
-          <a:noFill/>
-          <a:ln/>
-        </p:spPr>
-        <p:txBody>
-          <a:bodyPr wrap="square" rtlCol="0" anchor="ctr"/>
-          <a:lstStyle/>
-          <a:p>
-            <a:pPr marL="0" indent="0">
-              <a:buNone/>
-            </a:pPr>
-            <a:r>
-              <a:rPr lang="en-US" sz="1000" dirty="0">
-                <a:solidFill>
-                  <a:srgbClr val="0A0E1A"/>
-                </a:solidFill>
-                <a:latin typeface="Calibri" pitchFamily="34" charset="0"/>
-                <a:ea typeface="Calibri" pitchFamily="34" charset="-122"/>
-                <a:cs typeface="Calibri" pitchFamily="34" charset="-120"/>
-              </a:rPr>
-              <a:t>✓  8,544 GE gate count</a:t>
-            </a:r>
-            <a:endParaRPr lang="en-US" sz="1000" dirty="0"/>
-          </a:p>
-        </p:txBody>
-      </p:sp>
-      <p:sp>
-        <p:nvSpPr>
-          <p:cNvPr id="24" name="Shape 22"/>
-          <p:cNvSpPr/>
-          <p:nvPr/>
-        </p:nvSpPr>
-        <p:spPr>
-          <a:xfrm>
-            <a:off x="3410712" y="4206240"/>
-            <a:ext cx="2560320" cy="292608"/>
-          </a:xfrm>
-          <a:prstGeom prst="rect">
-            <a:avLst/>
-          </a:prstGeom>
-          <a:solidFill>
-            <a:srgbClr val="00E676">
-              <a:alpha val="15000"/>
-            </a:srgbClr>
-          </a:solidFill>
-          <a:ln w="12700">
-            <a:solidFill>
-              <a:srgbClr val="00E676"/>
-            </a:solidFill>
-            <a:prstDash val="solid"/>
-          </a:ln>
-        </p:spPr>
-      </p:sp>
-      <p:sp>
-        <p:nvSpPr>
-          <p:cNvPr id="25" name="Text 23"/>
-          <p:cNvSpPr/>
-          <p:nvPr/>
-        </p:nvSpPr>
-        <p:spPr>
-          <a:xfrm>
-            <a:off x="3456432" y="4206240"/>
-            <a:ext cx="2468880" cy="292608"/>
-          </a:xfrm>
-          <a:prstGeom prst="rect">
-            <a:avLst/>
-          </a:prstGeom>
-          <a:noFill/>
-          <a:ln/>
-        </p:spPr>
-        <p:txBody>
-          <a:bodyPr wrap="square" rtlCol="0" anchor="ctr"/>
-          <a:lstStyle/>
-          <a:p>
-            <a:pPr marL="0" indent="0">
-              <a:buNone/>
-            </a:pPr>
-            <a:r>
-              <a:rPr lang="en-US" sz="1000" dirty="0">
-                <a:solidFill>
-                  <a:srgbClr val="0A0E1A"/>
-                </a:solidFill>
-                <a:latin typeface="Calibri" pitchFamily="34" charset="0"/>
-                <a:ea typeface="Calibri" pitchFamily="34" charset="-122"/>
-                <a:cs typeface="Calibri" pitchFamily="34" charset="-120"/>
-              </a:rPr>
-              <a:t>✓  15.95 ns latency</a:t>
-            </a:r>
-            <a:endParaRPr lang="en-US" sz="1000" dirty="0"/>
-          </a:p>
-        </p:txBody>
-      </p:sp>
-      <p:sp>
-        <p:nvSpPr>
-          <p:cNvPr id="26" name="Shape 24"/>
-          <p:cNvSpPr/>
-          <p:nvPr/>
-        </p:nvSpPr>
-        <p:spPr>
-          <a:xfrm>
-            <a:off x="3410712" y="4553712"/>
-            <a:ext cx="2560320" cy="292608"/>
-          </a:xfrm>
-          <a:prstGeom prst="rect">
-            <a:avLst/>
-          </a:prstGeom>
-          <a:solidFill>
-            <a:srgbClr val="00E676">
-              <a:alpha val="15000"/>
-            </a:srgbClr>
-          </a:solidFill>
-          <a:ln w="12700">
-            <a:solidFill>
-              <a:srgbClr val="00E676"/>
-            </a:solidFill>
-            <a:prstDash val="solid"/>
-          </a:ln>
-        </p:spPr>
-      </p:sp>
-      <p:sp>
-        <p:nvSpPr>
-          <p:cNvPr id="27" name="Text 25"/>
-          <p:cNvSpPr/>
-          <p:nvPr/>
-        </p:nvSpPr>
-        <p:spPr>
-          <a:xfrm>
-            <a:off x="3456432" y="4553712"/>
-            <a:ext cx="2468880" cy="292608"/>
-          </a:xfrm>
-          <a:prstGeom prst="rect">
-            <a:avLst/>
-          </a:prstGeom>
-          <a:noFill/>
-          <a:ln/>
-        </p:spPr>
-        <p:txBody>
-          <a:bodyPr wrap="square" rtlCol="0" anchor="ctr"/>
-          <a:lstStyle/>
-          <a:p>
-            <a:pPr marL="0" indent="0">
-              <a:buNone/>
-            </a:pPr>
-            <a:r>
-              <a:rPr lang="en-US" sz="1000" dirty="0">
-                <a:solidFill>
-                  <a:srgbClr val="0A0E1A"/>
-                </a:solidFill>
-                <a:latin typeface="Calibri" pitchFamily="34" charset="0"/>
-                <a:ea typeface="Calibri" pitchFamily="34" charset="-122"/>
-                <a:cs typeface="Calibri" pitchFamily="34" charset="-120"/>
-              </a:rPr>
-              <a:t>✓  Tweak binds sensor ID</a:t>
-            </a:r>
-            <a:endParaRPr lang="en-US" sz="1000" dirty="0"/>
-          </a:p>
-        </p:txBody>
-      </p:sp>
-      <p:sp>
-        <p:nvSpPr>
-          <p:cNvPr id="28" name="Shape 26"/>
-          <p:cNvSpPr/>
-          <p:nvPr/>
-        </p:nvSpPr>
-        <p:spPr>
-          <a:xfrm>
-            <a:off x="6227064" y="1024128"/>
-            <a:ext cx="2743200" cy="3931920"/>
-          </a:xfrm>
-          <a:prstGeom prst="rect">
-            <a:avLst/>
-          </a:prstGeom>
-          <a:solidFill>
-            <a:srgbClr val="F4F7FB"/>
-          </a:solidFill>
-          <a:ln w="12700">
-            <a:solidFill>
-              <a:srgbClr val="D0D8E8"/>
-            </a:solidFill>
-            <a:prstDash val="solid"/>
-          </a:ln>
-          <a:effectLst>
-            <a:outerShdw blurRad="101600" dist="38100" dir="8100000" algn="bl" rotWithShape="0">
-              <a:srgbClr val="000000">
-                <a:alpha val="15000"/>
-              </a:srgbClr>
-            </a:outerShdw>
-          </a:effectLst>
-        </p:spPr>
-      </p:sp>
-      <p:sp>
-        <p:nvSpPr>
-          <p:cNvPr id="29" name="Shape 27"/>
-          <p:cNvSpPr/>
-          <p:nvPr/>
-        </p:nvSpPr>
-        <p:spPr>
-          <a:xfrm>
-            <a:off x="6227064" y="1024128"/>
-            <a:ext cx="2743200" cy="54864"/>
-          </a:xfrm>
-          <a:prstGeom prst="rect">
-            <a:avLst/>
-          </a:prstGeom>
-          <a:solidFill>
-            <a:srgbClr val="FFD166"/>
-          </a:solidFill>
-          <a:ln w="12700">
-            <a:solidFill>
-              <a:srgbClr val="FFD166"/>
-            </a:solidFill>
-            <a:prstDash val="solid"/>
-          </a:ln>
-        </p:spPr>
-      </p:sp>
-      <p:sp>
-        <p:nvSpPr>
-          <p:cNvPr id="30" name="Text 28"/>
-          <p:cNvSpPr/>
-          <p:nvPr/>
-        </p:nvSpPr>
-        <p:spPr>
-          <a:xfrm>
-            <a:off x="6227064" y="1115568"/>
-            <a:ext cx="2743200" cy="594360"/>
-          </a:xfrm>
-          <a:prstGeom prst="rect">
-            <a:avLst/>
-          </a:prstGeom>
-          <a:noFill/>
-          <a:ln/>
-        </p:spPr>
-        <p:txBody>
-          <a:bodyPr wrap="square" rtlCol="0" anchor="ctr"/>
-          <a:lstStyle/>
-          <a:p>
-            <a:pPr marL="0" indent="0" algn="ctr">
-              <a:buNone/>
-            </a:pPr>
-            <a:r>
-              <a:rPr lang="en-US" sz="2800" dirty="0">
-                <a:solidFill>
-                  <a:srgbClr val="000000"/>
-                </a:solidFill>
-              </a:rPr>
-              <a:t>🏷️</a:t>
-            </a:r>
-            <a:endParaRPr lang="en-US" sz="2800" dirty="0"/>
-          </a:p>
-        </p:txBody>
-      </p:sp>
-      <p:sp>
-        <p:nvSpPr>
-          <p:cNvPr id="31" name="Text 29"/>
-          <p:cNvSpPr/>
-          <p:nvPr/>
-        </p:nvSpPr>
-        <p:spPr>
-          <a:xfrm>
-            <a:off x="6318504" y="1719072"/>
-            <a:ext cx="2560320" cy="384048"/>
-          </a:xfrm>
-          <a:prstGeom prst="rect">
-            <a:avLst/>
-          </a:prstGeom>
-          <a:noFill/>
-          <a:ln/>
-        </p:spPr>
-        <p:txBody>
-          <a:bodyPr wrap="square" rtlCol="0" anchor="ctr"/>
-          <a:lstStyle/>
-          <a:p>
-            <a:pPr marL="0" indent="0" algn="ctr">
-              <a:buNone/>
-            </a:pPr>
-            <a:r>
-              <a:rPr lang="en-US" sz="1300" b="1" dirty="0">
-                <a:solidFill>
-                  <a:srgbClr val="1A1A2E"/>
-                </a:solidFill>
-                <a:latin typeface="Calibri" pitchFamily="34" charset="0"/>
-                <a:ea typeface="Calibri" pitchFamily="34" charset="-122"/>
-                <a:cs typeface="Calibri" pitchFamily="34" charset="-120"/>
-              </a:rPr>
-              <a:t>vs PRESENT / AES</a:t>
-            </a:r>
-            <a:endParaRPr lang="en-US" sz="1300" dirty="0"/>
-          </a:p>
-        </p:txBody>
-      </p:sp>
-      <p:sp>
-        <p:nvSpPr>
-          <p:cNvPr id="32" name="Text 30"/>
-          <p:cNvSpPr/>
-          <p:nvPr/>
-        </p:nvSpPr>
-        <p:spPr>
-          <a:xfrm>
-            <a:off x="6318504" y="2148840"/>
-            <a:ext cx="2560320" cy="1645920"/>
-          </a:xfrm>
-          <a:prstGeom prst="rect">
-            <a:avLst/>
-          </a:prstGeom>
-          <a:noFill/>
-          <a:ln/>
-        </p:spPr>
-        <p:txBody>
-          <a:bodyPr wrap="square" rtlCol="0" anchor="ctr"/>
-          <a:lstStyle/>
-          <a:p>
-            <a:pPr marL="0" indent="0">
-              <a:buNone/>
-            </a:pPr>
-            <a:r>
-              <a:rPr lang="en-US" sz="1050" dirty="0">
-                <a:solidFill>
-                  <a:srgbClr val="444466"/>
-                </a:solidFill>
-                <a:latin typeface="Calibri" pitchFamily="34" charset="0"/>
-                <a:ea typeface="Calibri" pitchFamily="34" charset="-122"/>
-                <a:cs typeface="Calibri" pitchFamily="34" charset="-120"/>
-              </a:rPr>
-              <a:t>PRESENT (ISO/IEC 29192-2) targets passive RFID (1,570 GE). AES dominates general-purpose usage. MANTIS fills the gap: active processors needing low-latency decryption with tweak support.</a:t>
-            </a:r>
-            <a:endParaRPr lang="en-US" sz="1050" dirty="0"/>
-          </a:p>
-        </p:txBody>
-      </p:sp>
-      <p:sp>
-        <p:nvSpPr>
-          <p:cNvPr id="33" name="Shape 31"/>
-          <p:cNvSpPr/>
-          <p:nvPr/>
-        </p:nvSpPr>
-        <p:spPr>
-          <a:xfrm>
-            <a:off x="6318504" y="3858768"/>
-            <a:ext cx="2560320" cy="292608"/>
-          </a:xfrm>
-          <a:prstGeom prst="rect">
-            <a:avLst/>
-          </a:prstGeom>
-          <a:solidFill>
-            <a:srgbClr val="FFD166">
-              <a:alpha val="15000"/>
-            </a:srgbClr>
-          </a:solidFill>
-          <a:ln w="12700">
-            <a:solidFill>
-              <a:srgbClr val="FFD166"/>
-            </a:solidFill>
-            <a:prstDash val="solid"/>
-          </a:ln>
-        </p:spPr>
-      </p:sp>
-      <p:sp>
-        <p:nvSpPr>
-          <p:cNvPr id="34" name="Text 32"/>
-          <p:cNvSpPr/>
-          <p:nvPr/>
-        </p:nvSpPr>
-        <p:spPr>
-          <a:xfrm>
-            <a:off x="6364224" y="3858768"/>
-            <a:ext cx="2468880" cy="292608"/>
-          </a:xfrm>
-          <a:prstGeom prst="rect">
-            <a:avLst/>
-          </a:prstGeom>
-          <a:noFill/>
-          <a:ln/>
-        </p:spPr>
-        <p:txBody>
-          <a:bodyPr wrap="square" rtlCol="0" anchor="ctr"/>
-          <a:lstStyle/>
-          <a:p>
-            <a:pPr marL="0" indent="0">
-              <a:buNone/>
-            </a:pPr>
-            <a:r>
-              <a:rPr lang="en-US" sz="1000" dirty="0">
-                <a:solidFill>
-                  <a:srgbClr val="0A0E1A"/>
-                </a:solidFill>
-                <a:latin typeface="Calibri" pitchFamily="34" charset="0"/>
-                <a:ea typeface="Calibri" pitchFamily="34" charset="-122"/>
-                <a:cs typeface="Calibri" pitchFamily="34" charset="-120"/>
-              </a:rPr>
-              <a:t>✓  Active processor niche</a:t>
-            </a:r>
-            <a:endParaRPr lang="en-US" sz="1000" dirty="0"/>
-          </a:p>
-        </p:txBody>
-      </p:sp>
-      <p:sp>
-        <p:nvSpPr>
-          <p:cNvPr id="35" name="Shape 33"/>
-          <p:cNvSpPr/>
-          <p:nvPr/>
-        </p:nvSpPr>
-        <p:spPr>
-          <a:xfrm>
-            <a:off x="6318504" y="4206240"/>
-            <a:ext cx="2560320" cy="292608"/>
-          </a:xfrm>
-          <a:prstGeom prst="rect">
-            <a:avLst/>
-          </a:prstGeom>
-          <a:solidFill>
-            <a:srgbClr val="FFD166">
-              <a:alpha val="15000"/>
-            </a:srgbClr>
-          </a:solidFill>
-          <a:ln w="12700">
-            <a:solidFill>
-              <a:srgbClr val="FFD166"/>
-            </a:solidFill>
-            <a:prstDash val="solid"/>
-          </a:ln>
-        </p:spPr>
-      </p:sp>
-      <p:sp>
-        <p:nvSpPr>
-          <p:cNvPr id="36" name="Text 34"/>
-          <p:cNvSpPr/>
-          <p:nvPr/>
-        </p:nvSpPr>
-        <p:spPr>
-          <a:xfrm>
-            <a:off x="6364224" y="4206240"/>
-            <a:ext cx="2468880" cy="292608"/>
-          </a:xfrm>
-          <a:prstGeom prst="rect">
-            <a:avLst/>
-          </a:prstGeom>
-          <a:noFill/>
-          <a:ln/>
-        </p:spPr>
-        <p:txBody>
-          <a:bodyPr wrap="square" rtlCol="0" anchor="ctr"/>
-          <a:lstStyle/>
-          <a:p>
-            <a:pPr marL="0" indent="0">
-              <a:buNone/>
-            </a:pPr>
-            <a:r>
-              <a:rPr lang="en-US" sz="1000" dirty="0">
-                <a:solidFill>
-                  <a:srgbClr val="0A0E1A"/>
-                </a:solidFill>
-                <a:latin typeface="Calibri" pitchFamily="34" charset="0"/>
-                <a:ea typeface="Calibri" pitchFamily="34" charset="-122"/>
-                <a:cs typeface="Calibri" pitchFamily="34" charset="-120"/>
-              </a:rPr>
-              <a:t>✓  Tweak beats PRESENT</a:t>
-            </a:r>
-            <a:endParaRPr lang="en-US" sz="1000" dirty="0"/>
-          </a:p>
-        </p:txBody>
-      </p:sp>
-      <p:sp>
-        <p:nvSpPr>
-          <p:cNvPr id="37" name="Shape 35"/>
-          <p:cNvSpPr/>
-          <p:nvPr/>
-        </p:nvSpPr>
-        <p:spPr>
-          <a:xfrm>
-            <a:off x="6318504" y="4553712"/>
-            <a:ext cx="2560320" cy="292608"/>
-          </a:xfrm>
-          <a:prstGeom prst="rect">
-            <a:avLst/>
-          </a:prstGeom>
-          <a:solidFill>
-            <a:srgbClr val="FFD166">
-              <a:alpha val="15000"/>
-            </a:srgbClr>
-          </a:solidFill>
-          <a:ln w="12700">
-            <a:solidFill>
-              <a:srgbClr val="FFD166"/>
-            </a:solidFill>
-            <a:prstDash val="solid"/>
-          </a:ln>
-        </p:spPr>
-      </p:sp>
-      <p:sp>
-        <p:nvSpPr>
-          <p:cNvPr id="38" name="Text 36"/>
-          <p:cNvSpPr/>
-          <p:nvPr/>
-        </p:nvSpPr>
-        <p:spPr>
-          <a:xfrm>
-            <a:off x="6364224" y="4553712"/>
-            <a:ext cx="2468880" cy="292608"/>
-          </a:xfrm>
-          <a:prstGeom prst="rect">
-            <a:avLst/>
-          </a:prstGeom>
-          <a:noFill/>
-          <a:ln/>
-        </p:spPr>
-        <p:txBody>
-          <a:bodyPr wrap="square" rtlCol="0" anchor="ctr"/>
-          <a:lstStyle/>
-          <a:p>
-            <a:pPr marL="0" indent="0">
-              <a:buNone/>
-            </a:pPr>
-            <a:r>
-              <a:rPr lang="en-US" sz="1000" dirty="0">
-                <a:solidFill>
-                  <a:srgbClr val="0A0E1A"/>
-                </a:solidFill>
-                <a:latin typeface="Calibri" pitchFamily="34" charset="0"/>
-                <a:ea typeface="Calibri" pitchFamily="34" charset="-122"/>
-                <a:cs typeface="Calibri" pitchFamily="34" charset="-120"/>
-              </a:rPr>
-              <a:t>✓  Better latency than AES</a:t>
-            </a:r>
-            <a:endParaRPr lang="en-US" sz="1000" dirty="0"/>
-          </a:p>
-        </p:txBody>
-      </p:sp>
-    </p:spTree>
-  </p:cSld>
-  <p:clrMapOvr>
-    <a:masterClrMapping/>
-  </p:clrMapOvr>
-</p:sld>
-</file>
-
-<file path=ppt/slides/slide21.xml><?xml version="1.0" encoding="utf-8"?>
 <p:sld xmlns:a="http://schemas.openxmlformats.org/drawingml/2006/main" xmlns:r="http://schemas.openxmlformats.org/officeDocument/2006/relationships" xmlns:p="http://schemas.openxmlformats.org/presentationml/2006/main">
   <p:cSld name="Slide 18">
     <p:bg>
